--- a/slides/Day5_Testing_CICD_Shipping.pptx
+++ b/slides/Day5_Testing_CICD_Shipping.pptx
@@ -1,6 +1,6 @@
 
 <file path=ppt/presentation.xml><?xml version="1.0" encoding="utf-8"?>
-<p:presentation xmlns:a="http://schemas.openxmlformats.org/drawingml/2006/main" xmlns:r="http://schemas.openxmlformats.org/officeDocument/2006/relationships" xmlns:p="http://schemas.openxmlformats.org/presentationml/2006/main" saveSubsetFonts="1" autoCompressPictures="0">
+<p:presentation xmlns:a="http://schemas.openxmlformats.org/drawingml/2006/main" xmlns:p="http://schemas.openxmlformats.org/presentationml/2006/main" xmlns:r="http://schemas.openxmlformats.org/officeDocument/2006/relationships" saveSubsetFonts="1" autoCompressPictures="0">
   <p:sldMasterIdLst>
     <p:sldMasterId id="2147483648" r:id="rId1"/>
   </p:sldMasterIdLst>
@@ -51,7 +51,6 @@
     <p:sldId id="299" r:id="rId45"/>
     <p:sldId id="300" r:id="rId46"/>
     <p:sldId id="301" r:id="rId47"/>
-    <p:sldId id="302" r:id="rId48"/>
     <p:sldId id="303" r:id="rId49"/>
     <p:sldId id="304" r:id="rId50"/>
     <p:sldId id="305" r:id="rId51"/>
@@ -511,5192 +510,6 @@
     </a:lvl9pPr>
   </p:notesStyle>
 </p:notesMaster>
-</file>
-
-<file path=ppt/notesSlides/notesSlide1.xml><?xml version="1.0" encoding="utf-8"?>
-<p:notes xmlns:a="http://schemas.openxmlformats.org/drawingml/2006/main" xmlns:r="http://schemas.openxmlformats.org/officeDocument/2006/relationships" xmlns:p="http://schemas.openxmlformats.org/presentationml/2006/main">
-  <p:cSld>
-    <p:spTree>
-      <p:nvGrpSpPr>
-        <p:cNvPr id="1" name=""/>
-        <p:cNvGrpSpPr/>
-        <p:nvPr/>
-      </p:nvGrpSpPr>
-      <p:grpSpPr>
-        <a:xfrm>
-          <a:off x="0" y="0"/>
-          <a:ext cx="0" cy="0"/>
-          <a:chOff x="0" y="0"/>
-          <a:chExt cx="0" cy="0"/>
-        </a:xfrm>
-      </p:grpSpPr>
-      <p:sp>
-        <p:nvSpPr>
-          <p:cNvPr id="2" name="Slide Image Placeholder 1"/>
-          <p:cNvSpPr>
-            <a:spLocks noGrp="1" noRot="1" noChangeAspect="1"/>
-          </p:cNvSpPr>
-          <p:nvPr>
-            <p:ph type="sldImg"/>
-          </p:nvPr>
-        </p:nvSpPr>
-        <p:spPr/>
-      </p:sp>
-      <p:sp>
-        <p:nvSpPr>
-          <p:cNvPr id="3" name="Notes Placeholder 2"/>
-          <p:cNvSpPr>
-            <a:spLocks noGrp="1"/>
-          </p:cNvSpPr>
-          <p:nvPr>
-            <p:ph type="body" idx="1"/>
-          </p:nvPr>
-        </p:nvSpPr>
-        <p:spPr/>
-        <p:txBody>
-          <a:bodyPr/>
-          <a:lstStyle/>
-          <a:p>
-            <a:r>
-              <a:rPr lang="en-US" dirty="0"/>
-              <a:t>SCRIPT: You have an app that works. Today you make it one you can ship, and ship again next week: tests that catch pricing regressions, two brands from one codebase, a signed bundle, a pipeline, and the store walkthroughs. The afternoon ends with your real project on the whiteboard.
-OPENER: two delegates present the testing homework (Q2, Q4). Then we write the first widget test live.
-PRESENTER CHECKLIST: reference repo at lab-5-start with tests green; two flavours running; keystore + key.properties ready (NOT in the repo); GitHub Actions run green on your fork; Codemagic workflow file in the repo; Mac: Xcode open with the iOS build archived and a TestFlight upload done last night so processing is finished; Play Console and App Store Connect open in browser tabs with screenshots as backup if the venue blocks them; mock API running.</a:t>
-            </a:r>
-            <a:endParaRPr lang="en-US" dirty="0"/>
-          </a:p>
-        </p:txBody>
-      </p:sp>
-      <p:sp>
-        <p:nvSpPr>
-          <p:cNvPr id="4" name="Slide Number Placeholder 3"/>
-          <p:cNvSpPr>
-            <a:spLocks noGrp="1"/>
-          </p:cNvSpPr>
-          <p:nvPr>
-            <p:ph type="sldNum" sz="quarter" idx="10"/>
-          </p:nvPr>
-        </p:nvSpPr>
-        <p:spPr/>
-        <p:txBody>
-          <a:bodyPr/>
-          <a:lstStyle/>
-          <a:p>
-            <a:fld id="{F7021451-1387-4CA6-816F-3879F97B5CBC}" type="slidenum">
-              <a:rPr lang="en-US"/>
-              <a:t>1</a:t>
-            </a:fld>
-            <a:endParaRPr lang="en-US"/>
-          </a:p>
-        </p:txBody>
-      </p:sp>
-    </p:spTree>
-    <p:extLst>
-      <p:ext uri="{BB962C8B-B14F-4D97-AF65-F5344CB8AC3E}">
-        <p14:creationId xmlns:p14="http://schemas.microsoft.com/office/powerpoint/2010/main" val="1024086991"/>
-      </p:ext>
-    </p:extLst>
-  </p:cSld>
-  <p:clrMapOvr>
-    <a:masterClrMapping/>
-  </p:clrMapOvr>
-</p:notes>
-</file>
-
-<file path=ppt/notesSlides/notesSlide10.xml><?xml version="1.0" encoding="utf-8"?>
-<p:notes xmlns:a="http://schemas.openxmlformats.org/drawingml/2006/main" xmlns:r="http://schemas.openxmlformats.org/officeDocument/2006/relationships" xmlns:p="http://schemas.openxmlformats.org/presentationml/2006/main">
-  <p:cSld>
-    <p:spTree>
-      <p:nvGrpSpPr>
-        <p:cNvPr id="1" name=""/>
-        <p:cNvGrpSpPr/>
-        <p:nvPr/>
-      </p:nvGrpSpPr>
-      <p:grpSpPr>
-        <a:xfrm>
-          <a:off x="0" y="0"/>
-          <a:ext cx="0" cy="0"/>
-          <a:chOff x="0" y="0"/>
-          <a:chExt cx="0" cy="0"/>
-        </a:xfrm>
-      </p:grpSpPr>
-      <p:sp>
-        <p:nvSpPr>
-          <p:cNvPr id="2" name="Slide Image Placeholder 1"/>
-          <p:cNvSpPr>
-            <a:spLocks noGrp="1" noRot="1" noChangeAspect="1"/>
-          </p:cNvSpPr>
-          <p:nvPr>
-            <p:ph type="sldImg"/>
-          </p:nvPr>
-        </p:nvSpPr>
-        <p:spPr/>
-      </p:sp>
-      <p:sp>
-        <p:nvSpPr>
-          <p:cNvPr id="3" name="Notes Placeholder 2"/>
-          <p:cNvSpPr>
-            <a:spLocks noGrp="1"/>
-          </p:cNvSpPr>
-          <p:nvPr>
-            <p:ph type="body" idx="1"/>
-          </p:nvPr>
-        </p:nvSpPr>
-        <p:spPr/>
-        <p:txBody>
-          <a:bodyPr/>
-          <a:lstStyle/>
-          <a:p>
-            <a:r>
-              <a:rPr lang="en-US" dirty="0"/>
-              <a:t>SCRIPT: Two tests: validation errors, and a valid submission captured through the callback. Note the wrap helper - without MaterialApp you get "No MaterialLocalizations found" from the date picker and "No Material widget found" from InkWell.
-enterText on find.widgetWithText(TextFormField, 'Vehicle make'): the label text is inside the field's decoration, so widgetWithText matches it. Alternative: give fields Keys (ValueKey('make')) and use find.byKey - more robust when labels are localised.
-The date picker test taps OK with the initial date; that is enough to satisfy the validator.</a:t>
-            </a:r>
-            <a:endParaRPr lang="en-US" dirty="0"/>
-          </a:p>
-        </p:txBody>
-      </p:sp>
-      <p:sp>
-        <p:nvSpPr>
-          <p:cNvPr id="4" name="Slide Number Placeholder 3"/>
-          <p:cNvSpPr>
-            <a:spLocks noGrp="1"/>
-          </p:cNvSpPr>
-          <p:nvPr>
-            <p:ph type="sldNum" sz="quarter" idx="10"/>
-          </p:nvPr>
-        </p:nvSpPr>
-        <p:spPr/>
-        <p:txBody>
-          <a:bodyPr/>
-          <a:lstStyle/>
-          <a:p>
-            <a:fld id="{F7021451-1387-4CA6-816F-3879F97B5CBC}" type="slidenum">
-              <a:rPr lang="en-US"/>
-              <a:t>10</a:t>
-            </a:fld>
-            <a:endParaRPr lang="en-US"/>
-          </a:p>
-        </p:txBody>
-      </p:sp>
-    </p:spTree>
-    <p:extLst>
-      <p:ext uri="{BB962C8B-B14F-4D97-AF65-F5344CB8AC3E}">
-        <p14:creationId xmlns:p14="http://schemas.microsoft.com/office/powerpoint/2010/main" val="1024086991"/>
-      </p:ext>
-    </p:extLst>
-  </p:cSld>
-  <p:clrMapOvr>
-    <a:masterClrMapping/>
-  </p:clrMapOvr>
-</p:notes>
-</file>
-
-<file path=ppt/notesSlides/notesSlide11.xml><?xml version="1.0" encoding="utf-8"?>
-<p:notes xmlns:a="http://schemas.openxmlformats.org/drawingml/2006/main" xmlns:r="http://schemas.openxmlformats.org/officeDocument/2006/relationships" xmlns:p="http://schemas.openxmlformats.org/presentationml/2006/main">
-  <p:cSld>
-    <p:spTree>
-      <p:nvGrpSpPr>
-        <p:cNvPr id="1" name=""/>
-        <p:cNvGrpSpPr/>
-        <p:nvPr/>
-      </p:nvGrpSpPr>
-      <p:grpSpPr>
-        <a:xfrm>
-          <a:off x="0" y="0"/>
-          <a:ext cx="0" cy="0"/>
-          <a:chOff x="0" y="0"/>
-          <a:chExt cx="0" cy="0"/>
-        </a:xfrm>
-      </p:grpSpPr>
-      <p:sp>
-        <p:nvSpPr>
-          <p:cNvPr id="2" name="Slide Image Placeholder 1"/>
-          <p:cNvSpPr>
-            <a:spLocks noGrp="1" noRot="1" noChangeAspect="1"/>
-          </p:cNvSpPr>
-          <p:nvPr>
-            <p:ph type="sldImg"/>
-          </p:nvPr>
-        </p:nvSpPr>
-        <p:spPr/>
-      </p:sp>
-      <p:sp>
-        <p:nvSpPr>
-          <p:cNvPr id="3" name="Notes Placeholder 2"/>
-          <p:cNvSpPr>
-            <a:spLocks noGrp="1"/>
-          </p:cNvSpPr>
-          <p:nvPr>
-            <p:ph type="body" idx="1"/>
-          </p:nvPr>
-        </p:nvSpPr>
-        <p:spPr/>
-        <p:txBody>
-          <a:bodyPr/>
-          <a:lstStyle/>
-          <a:p>
-            <a:r>
-              <a:rPr lang="en-US" dirty="0"/>
-              <a:t>SCRIPT: Two tests: validation errors, and a valid submission captured through the callback. Note the wrap helper - without MaterialApp you get "No MaterialLocalizations found" from the date picker and "No Material widget found" from InkWell.
-enterText on find.widgetWithText(TextFormField, 'Vehicle make'): the label text is inside the field's decoration, so widgetWithText matches it. Alternative: give fields Keys (ValueKey('make')) and use find.byKey - more robust when labels are localised.
-The date picker test taps OK with the initial date; that is enough to satisfy the validator.</a:t>
-            </a:r>
-            <a:endParaRPr lang="en-US" dirty="0"/>
-          </a:p>
-        </p:txBody>
-      </p:sp>
-      <p:sp>
-        <p:nvSpPr>
-          <p:cNvPr id="4" name="Slide Number Placeholder 3"/>
-          <p:cNvSpPr>
-            <a:spLocks noGrp="1"/>
-          </p:cNvSpPr>
-          <p:nvPr>
-            <p:ph type="sldNum" sz="quarter" idx="10"/>
-          </p:nvPr>
-        </p:nvSpPr>
-        <p:spPr/>
-        <p:txBody>
-          <a:bodyPr/>
-          <a:lstStyle/>
-          <a:p>
-            <a:fld id="{F7021451-1387-4CA6-816F-3879F97B5CBC}" type="slidenum">
-              <a:rPr lang="en-US"/>
-              <a:t>11</a:t>
-            </a:fld>
-            <a:endParaRPr lang="en-US"/>
-          </a:p>
-        </p:txBody>
-      </p:sp>
-    </p:spTree>
-    <p:extLst>
-      <p:ext uri="{BB962C8B-B14F-4D97-AF65-F5344CB8AC3E}">
-        <p14:creationId xmlns:p14="http://schemas.microsoft.com/office/powerpoint/2010/main" val="1024086991"/>
-      </p:ext>
-    </p:extLst>
-  </p:cSld>
-  <p:clrMapOvr>
-    <a:masterClrMapping/>
-  </p:clrMapOvr>
-</p:notes>
-</file>
-
-<file path=ppt/notesSlides/notesSlide12.xml><?xml version="1.0" encoding="utf-8"?>
-<p:notes xmlns:a="http://schemas.openxmlformats.org/drawingml/2006/main" xmlns:r="http://schemas.openxmlformats.org/officeDocument/2006/relationships" xmlns:p="http://schemas.openxmlformats.org/presentationml/2006/main">
-  <p:cSld>
-    <p:spTree>
-      <p:nvGrpSpPr>
-        <p:cNvPr id="1" name=""/>
-        <p:cNvGrpSpPr/>
-        <p:nvPr/>
-      </p:nvGrpSpPr>
-      <p:grpSpPr>
-        <a:xfrm>
-          <a:off x="0" y="0"/>
-          <a:ext cx="0" cy="0"/>
-          <a:chOff x="0" y="0"/>
-          <a:chExt cx="0" cy="0"/>
-        </a:xfrm>
-      </p:grpSpPr>
-      <p:sp>
-        <p:nvSpPr>
-          <p:cNvPr id="2" name="Slide Image Placeholder 1"/>
-          <p:cNvSpPr>
-            <a:spLocks noGrp="1" noRot="1" noChangeAspect="1"/>
-          </p:cNvSpPr>
-          <p:nvPr>
-            <p:ph type="sldImg"/>
-          </p:nvPr>
-        </p:nvSpPr>
-        <p:spPr/>
-      </p:sp>
-      <p:sp>
-        <p:nvSpPr>
-          <p:cNvPr id="3" name="Notes Placeholder 2"/>
-          <p:cNvSpPr>
-            <a:spLocks noGrp="1"/>
-          </p:cNvSpPr>
-          <p:nvPr>
-            <p:ph type="body" idx="1"/>
-          </p:nvPr>
-        </p:nvSpPr>
-        <p:spPr/>
-        <p:txBody>
-          <a:bodyPr/>
-          <a:lstStyle/>
-          <a:p>
-            <a:r>
-              <a:rPr lang="en-US" dirty="0"/>
-              <a:t>SCRIPT: The whole screen under test with a fake service: submit → spinner → navigation → PremiumCard on the result screen. Three specifics: setMockInitialValues before getInstance (otherwise MissingPluginException); pump(const Duration(seconds: 2)) because the spinner never settles; and a two-route test GoRouter overriding routerProvider, because the Day 4 CaptureScreen calls context.push on QuoteLoaded and needs a GoRouter in scope.
-If you only want to test the form, test CaptureForm directly (previous slide) - it has no router dependency.</a:t>
-            </a:r>
-            <a:endParaRPr lang="en-US" dirty="0"/>
-          </a:p>
-        </p:txBody>
-      </p:sp>
-      <p:sp>
-        <p:nvSpPr>
-          <p:cNvPr id="4" name="Slide Number Placeholder 3"/>
-          <p:cNvSpPr>
-            <a:spLocks noGrp="1"/>
-          </p:cNvSpPr>
-          <p:nvPr>
-            <p:ph type="sldNum" sz="quarter" idx="10"/>
-          </p:nvPr>
-        </p:nvSpPr>
-        <p:spPr/>
-        <p:txBody>
-          <a:bodyPr/>
-          <a:lstStyle/>
-          <a:p>
-            <a:fld id="{F7021451-1387-4CA6-816F-3879F97B5CBC}" type="slidenum">
-              <a:rPr lang="en-US"/>
-              <a:t>12</a:t>
-            </a:fld>
-            <a:endParaRPr lang="en-US"/>
-          </a:p>
-        </p:txBody>
-      </p:sp>
-    </p:spTree>
-    <p:extLst>
-      <p:ext uri="{BB962C8B-B14F-4D97-AF65-F5344CB8AC3E}">
-        <p14:creationId xmlns:p14="http://schemas.microsoft.com/office/powerpoint/2010/main" val="1024086991"/>
-      </p:ext>
-    </p:extLst>
-  </p:cSld>
-  <p:clrMapOvr>
-    <a:masterClrMapping/>
-  </p:clrMapOvr>
-</p:notes>
-</file>
-
-<file path=ppt/notesSlides/notesSlide13.xml><?xml version="1.0" encoding="utf-8"?>
-<p:notes xmlns:a="http://schemas.openxmlformats.org/drawingml/2006/main" xmlns:r="http://schemas.openxmlformats.org/officeDocument/2006/relationships" xmlns:p="http://schemas.openxmlformats.org/presentationml/2006/main">
-  <p:cSld>
-    <p:spTree>
-      <p:nvGrpSpPr>
-        <p:cNvPr id="1" name=""/>
-        <p:cNvGrpSpPr/>
-        <p:nvPr/>
-      </p:nvGrpSpPr>
-      <p:grpSpPr>
-        <a:xfrm>
-          <a:off x="0" y="0"/>
-          <a:ext cx="0" cy="0"/>
-          <a:chOff x="0" y="0"/>
-          <a:chExt cx="0" cy="0"/>
-        </a:xfrm>
-      </p:grpSpPr>
-      <p:sp>
-        <p:nvSpPr>
-          <p:cNvPr id="2" name="Slide Image Placeholder 1"/>
-          <p:cNvSpPr>
-            <a:spLocks noGrp="1" noRot="1" noChangeAspect="1"/>
-          </p:cNvSpPr>
-          <p:nvPr>
-            <p:ph type="sldImg"/>
-          </p:nvPr>
-        </p:nvSpPr>
-        <p:spPr/>
-      </p:sp>
-      <p:sp>
-        <p:nvSpPr>
-          <p:cNvPr id="3" name="Notes Placeholder 2"/>
-          <p:cNvSpPr>
-            <a:spLocks noGrp="1"/>
-          </p:cNvSpPr>
-          <p:nvPr>
-            <p:ph type="body" idx="1"/>
-          </p:nvPr>
-        </p:nvSpPr>
-        <p:spPr/>
-        <p:txBody>
-          <a:bodyPr/>
-          <a:lstStyle/>
-          <a:p>
-            <a:r>
-              <a:rPr lang="en-US" dirty="0"/>
-              <a:t>SCRIPT: The whole screen under test with a fake service: submit → spinner → navigation → PremiumCard on the result screen. Three specifics: setMockInitialValues before getInstance (otherwise MissingPluginException); pump(const Duration(seconds: 2)) because the spinner never settles; and a two-route test GoRouter overriding routerProvider, because the Day 4 CaptureScreen calls context.push on QuoteLoaded and needs a GoRouter in scope.
-If you only want to test the form, test CaptureForm directly (previous slide) - it has no router dependency.</a:t>
-            </a:r>
-            <a:endParaRPr lang="en-US" dirty="0"/>
-          </a:p>
-        </p:txBody>
-      </p:sp>
-      <p:sp>
-        <p:nvSpPr>
-          <p:cNvPr id="4" name="Slide Number Placeholder 3"/>
-          <p:cNvSpPr>
-            <a:spLocks noGrp="1"/>
-          </p:cNvSpPr>
-          <p:nvPr>
-            <p:ph type="sldNum" sz="quarter" idx="10"/>
-          </p:nvPr>
-        </p:nvSpPr>
-        <p:spPr/>
-        <p:txBody>
-          <a:bodyPr/>
-          <a:lstStyle/>
-          <a:p>
-            <a:fld id="{F7021451-1387-4CA6-816F-3879F97B5CBC}" type="slidenum">
-              <a:rPr lang="en-US"/>
-              <a:t>13</a:t>
-            </a:fld>
-            <a:endParaRPr lang="en-US"/>
-          </a:p>
-        </p:txBody>
-      </p:sp>
-    </p:spTree>
-    <p:extLst>
-      <p:ext uri="{BB962C8B-B14F-4D97-AF65-F5344CB8AC3E}">
-        <p14:creationId xmlns:p14="http://schemas.microsoft.com/office/powerpoint/2010/main" val="1024086991"/>
-      </p:ext>
-    </p:extLst>
-  </p:cSld>
-  <p:clrMapOvr>
-    <a:masterClrMapping/>
-  </p:clrMapOvr>
-</p:notes>
-</file>
-
-<file path=ppt/notesSlides/notesSlide14.xml><?xml version="1.0" encoding="utf-8"?>
-<p:notes xmlns:a="http://schemas.openxmlformats.org/drawingml/2006/main" xmlns:r="http://schemas.openxmlformats.org/officeDocument/2006/relationships" xmlns:p="http://schemas.openxmlformats.org/presentationml/2006/main">
-  <p:cSld>
-    <p:spTree>
-      <p:nvGrpSpPr>
-        <p:cNvPr id="1" name=""/>
-        <p:cNvGrpSpPr/>
-        <p:nvPr/>
-      </p:nvGrpSpPr>
-      <p:grpSpPr>
-        <a:xfrm>
-          <a:off x="0" y="0"/>
-          <a:ext cx="0" cy="0"/>
-          <a:chOff x="0" y="0"/>
-          <a:chExt cx="0" cy="0"/>
-        </a:xfrm>
-      </p:grpSpPr>
-      <p:sp>
-        <p:nvSpPr>
-          <p:cNvPr id="2" name="Slide Image Placeholder 1"/>
-          <p:cNvSpPr>
-            <a:spLocks noGrp="1" noRot="1" noChangeAspect="1"/>
-          </p:cNvSpPr>
-          <p:nvPr>
-            <p:ph type="sldImg"/>
-          </p:nvPr>
-        </p:nvSpPr>
-        <p:spPr/>
-      </p:sp>
-      <p:sp>
-        <p:nvSpPr>
-          <p:cNvPr id="3" name="Notes Placeholder 2"/>
-          <p:cNvSpPr>
-            <a:spLocks noGrp="1"/>
-          </p:cNvSpPr>
-          <p:nvPr>
-            <p:ph type="body" idx="1"/>
-          </p:nvPr>
-        </p:nvSpPr>
-        <p:spPr/>
-        <p:txBody>
-          <a:bodyPr/>
-          <a:lstStyle/>
-          <a:p>
-            <a:r>
-              <a:rPr lang="en-US" dirty="0"/>
-              <a:t>SCRIPT: Same test API, real device. integration_test is an SDK package (--sdk=flutter). The mock API must be running and reachable from the emulator (10.0.2.2).
-WINDOWS: identical. Device id: flutter devices lists e.g. emulator-5554.
-The onboarding branch: the test checks whether "Get started" exists so it passes on both fresh and onboarded installs; alternatively pm clear before the run.
-CI: integration tests on an emulator in GitHub Actions need the reactivecircus/android-emulator-runner action - show in the appendix, do not build today.</a:t>
-            </a:r>
-            <a:endParaRPr lang="en-US" dirty="0"/>
-          </a:p>
-        </p:txBody>
-      </p:sp>
-      <p:sp>
-        <p:nvSpPr>
-          <p:cNvPr id="4" name="Slide Number Placeholder 3"/>
-          <p:cNvSpPr>
-            <a:spLocks noGrp="1"/>
-          </p:cNvSpPr>
-          <p:nvPr>
-            <p:ph type="sldNum" sz="quarter" idx="10"/>
-          </p:nvPr>
-        </p:nvSpPr>
-        <p:spPr/>
-        <p:txBody>
-          <a:bodyPr/>
-          <a:lstStyle/>
-          <a:p>
-            <a:fld id="{F7021451-1387-4CA6-816F-3879F97B5CBC}" type="slidenum">
-              <a:rPr lang="en-US"/>
-              <a:t>14</a:t>
-            </a:fld>
-            <a:endParaRPr lang="en-US"/>
-          </a:p>
-        </p:txBody>
-      </p:sp>
-    </p:spTree>
-    <p:extLst>
-      <p:ext uri="{BB962C8B-B14F-4D97-AF65-F5344CB8AC3E}">
-        <p14:creationId xmlns:p14="http://schemas.microsoft.com/office/powerpoint/2010/main" val="1024086991"/>
-      </p:ext>
-    </p:extLst>
-  </p:cSld>
-  <p:clrMapOvr>
-    <a:masterClrMapping/>
-  </p:clrMapOvr>
-</p:notes>
-</file>
-
-<file path=ppt/notesSlides/notesSlide15.xml><?xml version="1.0" encoding="utf-8"?>
-<p:notes xmlns:a="http://schemas.openxmlformats.org/drawingml/2006/main" xmlns:r="http://schemas.openxmlformats.org/officeDocument/2006/relationships" xmlns:p="http://schemas.openxmlformats.org/presentationml/2006/main">
-  <p:cSld>
-    <p:spTree>
-      <p:nvGrpSpPr>
-        <p:cNvPr id="1" name=""/>
-        <p:cNvGrpSpPr/>
-        <p:nvPr/>
-      </p:nvGrpSpPr>
-      <p:grpSpPr>
-        <a:xfrm>
-          <a:off x="0" y="0"/>
-          <a:ext cx="0" cy="0"/>
-          <a:chOff x="0" y="0"/>
-          <a:chExt cx="0" cy="0"/>
-        </a:xfrm>
-      </p:grpSpPr>
-      <p:sp>
-        <p:nvSpPr>
-          <p:cNvPr id="2" name="Slide Image Placeholder 1"/>
-          <p:cNvSpPr>
-            <a:spLocks noGrp="1" noRot="1" noChangeAspect="1"/>
-          </p:cNvSpPr>
-          <p:nvPr>
-            <p:ph type="sldImg"/>
-          </p:nvPr>
-        </p:nvSpPr>
-        <p:spPr/>
-      </p:sp>
-      <p:sp>
-        <p:nvSpPr>
-          <p:cNvPr id="3" name="Notes Placeholder 2"/>
-          <p:cNvSpPr>
-            <a:spLocks noGrp="1"/>
-          </p:cNvSpPr>
-          <p:nvPr>
-            <p:ph type="body" idx="1"/>
-          </p:nvPr>
-        </p:nvSpPr>
-        <p:spPr/>
-        <p:txBody>
-          <a:bodyPr/>
-          <a:lstStyle/>
-          <a:p>
-            <a:r>
-              <a:rPr lang="en-US" dirty="0"/>
-              <a:t>SCRIPT: Same test API, real device. integration_test is an SDK package (--sdk=flutter). The mock API must be running and reachable from the emulator (10.0.2.2).
-WINDOWS: identical. Device id: flutter devices lists e.g. emulator-5554.
-The onboarding branch: the test checks whether "Get started" exists so it passes on both fresh and onboarded installs; alternatively pm clear before the run.
-CI: integration tests on an emulator in GitHub Actions need the reactivecircus/android-emulator-runner action - show in the appendix, do not build today.</a:t>
-            </a:r>
-            <a:endParaRPr lang="en-US" dirty="0"/>
-          </a:p>
-        </p:txBody>
-      </p:sp>
-      <p:sp>
-        <p:nvSpPr>
-          <p:cNvPr id="4" name="Slide Number Placeholder 3"/>
-          <p:cNvSpPr>
-            <a:spLocks noGrp="1"/>
-          </p:cNvSpPr>
-          <p:nvPr>
-            <p:ph type="sldNum" sz="quarter" idx="10"/>
-          </p:nvPr>
-        </p:nvSpPr>
-        <p:spPr/>
-        <p:txBody>
-          <a:bodyPr/>
-          <a:lstStyle/>
-          <a:p>
-            <a:fld id="{F7021451-1387-4CA6-816F-3879F97B5CBC}" type="slidenum">
-              <a:rPr lang="en-US"/>
-              <a:t>15</a:t>
-            </a:fld>
-            <a:endParaRPr lang="en-US"/>
-          </a:p>
-        </p:txBody>
-      </p:sp>
-    </p:spTree>
-    <p:extLst>
-      <p:ext uri="{BB962C8B-B14F-4D97-AF65-F5344CB8AC3E}">
-        <p14:creationId xmlns:p14="http://schemas.microsoft.com/office/powerpoint/2010/main" val="1024086991"/>
-      </p:ext>
-    </p:extLst>
-  </p:cSld>
-  <p:clrMapOvr>
-    <a:masterClrMapping/>
-  </p:clrMapOvr>
-</p:notes>
-</file>
-
-<file path=ppt/notesSlides/notesSlide16.xml><?xml version="1.0" encoding="utf-8"?>
-<p:notes xmlns:a="http://schemas.openxmlformats.org/drawingml/2006/main" xmlns:r="http://schemas.openxmlformats.org/officeDocument/2006/relationships" xmlns:p="http://schemas.openxmlformats.org/presentationml/2006/main">
-  <p:cSld>
-    <p:spTree>
-      <p:nvGrpSpPr>
-        <p:cNvPr id="1" name=""/>
-        <p:cNvGrpSpPr/>
-        <p:nvPr/>
-      </p:nvGrpSpPr>
-      <p:grpSpPr>
-        <a:xfrm>
-          <a:off x="0" y="0"/>
-          <a:ext cx="0" cy="0"/>
-          <a:chOff x="0" y="0"/>
-          <a:chExt cx="0" cy="0"/>
-        </a:xfrm>
-      </p:grpSpPr>
-      <p:sp>
-        <p:nvSpPr>
-          <p:cNvPr id="2" name="Slide Image Placeholder 1"/>
-          <p:cNvSpPr>
-            <a:spLocks noGrp="1" noRot="1" noChangeAspect="1"/>
-          </p:cNvSpPr>
-          <p:nvPr>
-            <p:ph type="sldImg"/>
-          </p:nvPr>
-        </p:nvSpPr>
-        <p:spPr/>
-      </p:sp>
-      <p:sp>
-        <p:nvSpPr>
-          <p:cNvPr id="3" name="Notes Placeholder 2"/>
-          <p:cNvSpPr>
-            <a:spLocks noGrp="1"/>
-          </p:cNvSpPr>
-          <p:nvPr>
-            <p:ph type="body" idx="1"/>
-          </p:nvPr>
-        </p:nvSpPr>
-        <p:spPr/>
-        <p:txBody>
-          <a:bodyPr/>
-          <a:lstStyle/>
-          <a:p>
-            <a:r>
-              <a:rPr lang="en-US" dirty="0"/>
-              <a:t>WHY: Q4 produces something the client takes away: an integration test plan for their real app.
-EXPECTED: Q1 a binding that drives a real app on a device with real plugins and rendering; needs a device because of plugins and native rendering. Q2 Test Lab has a free daily quota; beyond that per-device-minute pricing; a 2-minute flow on 3 devices nightly is small. Q3 HTTP-level mocks test parsing and error mapping; service-level mocks test the notifier; we mock the service for notifier tests and would use a mock adapter (dio's HttpClientAdapter) for DioQuoteService tests. Q4 typically: quote → bind/purchase, login/OTP, document download; plus onboarding.</a:t>
-            </a:r>
-            <a:endParaRPr lang="en-US" dirty="0"/>
-          </a:p>
-        </p:txBody>
-      </p:sp>
-      <p:sp>
-        <p:nvSpPr>
-          <p:cNvPr id="4" name="Slide Number Placeholder 3"/>
-          <p:cNvSpPr>
-            <a:spLocks noGrp="1"/>
-          </p:cNvSpPr>
-          <p:nvPr>
-            <p:ph type="sldNum" sz="quarter" idx="10"/>
-          </p:nvPr>
-        </p:nvSpPr>
-        <p:spPr/>
-        <p:txBody>
-          <a:bodyPr/>
-          <a:lstStyle/>
-          <a:p>
-            <a:fld id="{F7021451-1387-4CA6-816F-3879F97B5CBC}" type="slidenum">
-              <a:rPr lang="en-US"/>
-              <a:t>16</a:t>
-            </a:fld>
-            <a:endParaRPr lang="en-US"/>
-          </a:p>
-        </p:txBody>
-      </p:sp>
-    </p:spTree>
-    <p:extLst>
-      <p:ext uri="{BB962C8B-B14F-4D97-AF65-F5344CB8AC3E}">
-        <p14:creationId xmlns:p14="http://schemas.microsoft.com/office/powerpoint/2010/main" val="1024086991"/>
-      </p:ext>
-    </p:extLst>
-  </p:cSld>
-  <p:clrMapOvr>
-    <a:masterClrMapping/>
-  </p:clrMapOvr>
-</p:notes>
-</file>
-
-<file path=ppt/notesSlides/notesSlide17.xml><?xml version="1.0" encoding="utf-8"?>
-<p:notes xmlns:a="http://schemas.openxmlformats.org/drawingml/2006/main" xmlns:r="http://schemas.openxmlformats.org/officeDocument/2006/relationships" xmlns:p="http://schemas.openxmlformats.org/presentationml/2006/main">
-  <p:cSld>
-    <p:spTree>
-      <p:nvGrpSpPr>
-        <p:cNvPr id="1" name=""/>
-        <p:cNvGrpSpPr/>
-        <p:nvPr/>
-      </p:nvGrpSpPr>
-      <p:grpSpPr>
-        <a:xfrm>
-          <a:off x="0" y="0"/>
-          <a:ext cx="0" cy="0"/>
-          <a:chOff x="0" y="0"/>
-          <a:chExt cx="0" cy="0"/>
-        </a:xfrm>
-      </p:grpSpPr>
-      <p:sp>
-        <p:nvSpPr>
-          <p:cNvPr id="2" name="Slide Image Placeholder 1"/>
-          <p:cNvSpPr>
-            <a:spLocks noGrp="1" noRot="1" noChangeAspect="1"/>
-          </p:cNvSpPr>
-          <p:nvPr>
-            <p:ph type="sldImg"/>
-          </p:nvPr>
-        </p:nvSpPr>
-        <p:spPr/>
-      </p:sp>
-      <p:sp>
-        <p:nvSpPr>
-          <p:cNvPr id="3" name="Notes Placeholder 2"/>
-          <p:cNvSpPr>
-            <a:spLocks noGrp="1"/>
-          </p:cNvSpPr>
-          <p:nvPr>
-            <p:ph type="body" idx="1"/>
-          </p:nvPr>
-        </p:nvSpPr>
-        <p:spPr/>
-        <p:txBody>
-          <a:bodyPr/>
-          <a:lstStyle/>
-          <a:p>
-            <a:r>
-              <a:rPr lang="en-US" dirty="0"/>
-              <a:t>RUN THE LAB: 40 min. Core = steps 2-4; 5-6 are the quality bar.
-COMMON ERRORS: "No MaterialLocalizations found" → wrap in MaterialApp. pumpAndSettle timeout → spinner on screen; use pump(Duration). "registerFallbackValue" error → setUpAll missing. Integration test cannot find the device → flutter devices for the id; emulator must be booted. "Connection refused" in the integration test → mock API not running or API_URL define missing.
-WINDOWS PATHS in coverage: lcov.info uses forward slashes; fine for VS Code extensions.
-SOLUTION: Appendix A, branch lab-5-1-solution.</a:t>
-            </a:r>
-            <a:endParaRPr lang="en-US" dirty="0"/>
-          </a:p>
-        </p:txBody>
-      </p:sp>
-      <p:sp>
-        <p:nvSpPr>
-          <p:cNvPr id="4" name="Slide Number Placeholder 3"/>
-          <p:cNvSpPr>
-            <a:spLocks noGrp="1"/>
-          </p:cNvSpPr>
-          <p:nvPr>
-            <p:ph type="sldNum" sz="quarter" idx="10"/>
-          </p:nvPr>
-        </p:nvSpPr>
-        <p:spPr/>
-        <p:txBody>
-          <a:bodyPr/>
-          <a:lstStyle/>
-          <a:p>
-            <a:fld id="{F7021451-1387-4CA6-816F-3879F97B5CBC}" type="slidenum">
-              <a:rPr lang="en-US"/>
-              <a:t>17</a:t>
-            </a:fld>
-            <a:endParaRPr lang="en-US"/>
-          </a:p>
-        </p:txBody>
-      </p:sp>
-    </p:spTree>
-    <p:extLst>
-      <p:ext uri="{BB962C8B-B14F-4D97-AF65-F5344CB8AC3E}">
-        <p14:creationId xmlns:p14="http://schemas.microsoft.com/office/powerpoint/2010/main" val="1024086991"/>
-      </p:ext>
-    </p:extLst>
-  </p:cSld>
-  <p:clrMapOvr>
-    <a:masterClrMapping/>
-  </p:clrMapOvr>
-</p:notes>
-</file>
-
-<file path=ppt/notesSlides/notesSlide18.xml><?xml version="1.0" encoding="utf-8"?>
-<p:notes xmlns:a="http://schemas.openxmlformats.org/drawingml/2006/main" xmlns:r="http://schemas.openxmlformats.org/officeDocument/2006/relationships" xmlns:p="http://schemas.openxmlformats.org/presentationml/2006/main">
-  <p:cSld>
-    <p:spTree>
-      <p:nvGrpSpPr>
-        <p:cNvPr id="1" name=""/>
-        <p:cNvGrpSpPr/>
-        <p:nvPr/>
-      </p:nvGrpSpPr>
-      <p:grpSpPr>
-        <a:xfrm>
-          <a:off x="0" y="0"/>
-          <a:ext cx="0" cy="0"/>
-          <a:chOff x="0" y="0"/>
-          <a:chExt cx="0" cy="0"/>
-        </a:xfrm>
-      </p:grpSpPr>
-      <p:sp>
-        <p:nvSpPr>
-          <p:cNvPr id="2" name="Slide Image Placeholder 1"/>
-          <p:cNvSpPr>
-            <a:spLocks noGrp="1" noRot="1" noChangeAspect="1"/>
-          </p:cNvSpPr>
-          <p:nvPr>
-            <p:ph type="sldImg"/>
-          </p:nvPr>
-        </p:nvSpPr>
-        <p:spPr/>
-      </p:sp>
-      <p:sp>
-        <p:nvSpPr>
-          <p:cNvPr id="3" name="Notes Placeholder 2"/>
-          <p:cNvSpPr>
-            <a:spLocks noGrp="1"/>
-          </p:cNvSpPr>
-          <p:nvPr>
-            <p:ph type="body" idx="1"/>
-          </p:nvPr>
-        </p:nvSpPr>
-        <p:spPr/>
-        <p:txBody>
-          <a:bodyPr/>
-          <a:lstStyle/>
-          <a:p>
-            <a:r>
-              <a:rPr lang="en-US" dirty="0"/>
-              <a:t>SCRIPT: The multi-brand requirement from the survey, delivered. Runtime brand (Day 2/3) + build-time flavour (today) = one artefact per brand from one codebase.
-PRESENTER: this is where the Kotlin DSL vs Groovy gradle difference bites - the start branch was created on current Flutter so it is build.gradle.kts; delegates with older projects have build.gradle (Groovy). Both versions are on the slides.</a:t>
-            </a:r>
-            <a:endParaRPr lang="en-US" dirty="0"/>
-          </a:p>
-        </p:txBody>
-      </p:sp>
-      <p:sp>
-        <p:nvSpPr>
-          <p:cNvPr id="4" name="Slide Number Placeholder 3"/>
-          <p:cNvSpPr>
-            <a:spLocks noGrp="1"/>
-          </p:cNvSpPr>
-          <p:nvPr>
-            <p:ph type="sldNum" sz="quarter" idx="10"/>
-          </p:nvPr>
-        </p:nvSpPr>
-        <p:spPr/>
-        <p:txBody>
-          <a:bodyPr/>
-          <a:lstStyle/>
-          <a:p>
-            <a:fld id="{F7021451-1387-4CA6-816F-3879F97B5CBC}" type="slidenum">
-              <a:rPr lang="en-US"/>
-              <a:t>18</a:t>
-            </a:fld>
-            <a:endParaRPr lang="en-US"/>
-          </a:p>
-        </p:txBody>
-      </p:sp>
-    </p:spTree>
-    <p:extLst>
-      <p:ext uri="{BB962C8B-B14F-4D97-AF65-F5344CB8AC3E}">
-        <p14:creationId xmlns:p14="http://schemas.microsoft.com/office/powerpoint/2010/main" val="1024086991"/>
-      </p:ext>
-    </p:extLst>
-  </p:cSld>
-  <p:clrMapOvr>
-    <a:masterClrMapping/>
-  </p:clrMapOvr>
-</p:notes>
-</file>
-
-<file path=ppt/notesSlides/notesSlide19.xml><?xml version="1.0" encoding="utf-8"?>
-<p:notes xmlns:a="http://schemas.openxmlformats.org/drawingml/2006/main" xmlns:r="http://schemas.openxmlformats.org/officeDocument/2006/relationships" xmlns:p="http://schemas.openxmlformats.org/presentationml/2006/main">
-  <p:cSld>
-    <p:spTree>
-      <p:nvGrpSpPr>
-        <p:cNvPr id="1" name=""/>
-        <p:cNvGrpSpPr/>
-        <p:nvPr/>
-      </p:nvGrpSpPr>
-      <p:grpSpPr>
-        <a:xfrm>
-          <a:off x="0" y="0"/>
-          <a:ext cx="0" cy="0"/>
-          <a:chOff x="0" y="0"/>
-          <a:chExt cx="0" cy="0"/>
-        </a:xfrm>
-      </p:grpSpPr>
-      <p:sp>
-        <p:nvSpPr>
-          <p:cNvPr id="2" name="Slide Image Placeholder 1"/>
-          <p:cNvSpPr>
-            <a:spLocks noGrp="1" noRot="1" noChangeAspect="1"/>
-          </p:cNvSpPr>
-          <p:nvPr>
-            <p:ph type="sldImg"/>
-          </p:nvPr>
-        </p:nvSpPr>
-        <p:spPr/>
-      </p:sp>
-      <p:sp>
-        <p:nvSpPr>
-          <p:cNvPr id="3" name="Notes Placeholder 2"/>
-          <p:cNvSpPr>
-            <a:spLocks noGrp="1"/>
-          </p:cNvSpPr>
-          <p:nvPr>
-            <p:ph type="body" idx="1"/>
-          </p:nvPr>
-        </p:nvSpPr>
-        <p:spPr/>
-        <p:txBody>
-          <a:bodyPr/>
-          <a:lstStyle/>
-          <a:p>
-            <a:r>
-              <a:rPr lang="en-US" dirty="0"/>
-              <a:t>SCRIPT: The three layers and which one owns what. The config JSON files are per brand and committed (no secrets - they are baked into the binary). Env.brand is a const so the compiler can tree-shake the other brand's code paths.
-BrandKeyNotifier.build now falls back to Env.brand: a beta build starts as beta even before the user picks anything; prefs still win if the user switched (or drop the toggle in production builds).
-Both OS: --dart-define-from-file works identically; paths are relative to the project.</a:t>
-            </a:r>
-            <a:endParaRPr lang="en-US" dirty="0"/>
-          </a:p>
-        </p:txBody>
-      </p:sp>
-      <p:sp>
-        <p:nvSpPr>
-          <p:cNvPr id="4" name="Slide Number Placeholder 3"/>
-          <p:cNvSpPr>
-            <a:spLocks noGrp="1"/>
-          </p:cNvSpPr>
-          <p:nvPr>
-            <p:ph type="sldNum" sz="quarter" idx="10"/>
-          </p:nvPr>
-        </p:nvSpPr>
-        <p:spPr/>
-        <p:txBody>
-          <a:bodyPr/>
-          <a:lstStyle/>
-          <a:p>
-            <a:fld id="{F7021451-1387-4CA6-816F-3879F97B5CBC}" type="slidenum">
-              <a:rPr lang="en-US"/>
-              <a:t>19</a:t>
-            </a:fld>
-            <a:endParaRPr lang="en-US"/>
-          </a:p>
-        </p:txBody>
-      </p:sp>
-    </p:spTree>
-    <p:extLst>
-      <p:ext uri="{BB962C8B-B14F-4D97-AF65-F5344CB8AC3E}">
-        <p14:creationId xmlns:p14="http://schemas.microsoft.com/office/powerpoint/2010/main" val="1024086991"/>
-      </p:ext>
-    </p:extLst>
-  </p:cSld>
-  <p:clrMapOvr>
-    <a:masterClrMapping/>
-  </p:clrMapOvr>
-</p:notes>
-</file>
-
-<file path=ppt/notesSlides/notesSlide2.xml><?xml version="1.0" encoding="utf-8"?>
-<p:notes xmlns:a="http://schemas.openxmlformats.org/drawingml/2006/main" xmlns:r="http://schemas.openxmlformats.org/officeDocument/2006/relationships" xmlns:p="http://schemas.openxmlformats.org/presentationml/2006/main">
-  <p:cSld>
-    <p:spTree>
-      <p:nvGrpSpPr>
-        <p:cNvPr id="1" name=""/>
-        <p:cNvGrpSpPr/>
-        <p:nvPr/>
-      </p:nvGrpSpPr>
-      <p:grpSpPr>
-        <a:xfrm>
-          <a:off x="0" y="0"/>
-          <a:ext cx="0" cy="0"/>
-          <a:chOff x="0" y="0"/>
-          <a:chExt cx="0" cy="0"/>
-        </a:xfrm>
-      </p:grpSpPr>
-      <p:sp>
-        <p:nvSpPr>
-          <p:cNvPr id="2" name="Slide Image Placeholder 1"/>
-          <p:cNvSpPr>
-            <a:spLocks noGrp="1" noRot="1" noChangeAspect="1"/>
-          </p:cNvSpPr>
-          <p:nvPr>
-            <p:ph type="sldImg"/>
-          </p:nvPr>
-        </p:nvSpPr>
-        <p:spPr/>
-      </p:sp>
-      <p:sp>
-        <p:nvSpPr>
-          <p:cNvPr id="3" name="Notes Placeholder 2"/>
-          <p:cNvSpPr>
-            <a:spLocks noGrp="1"/>
-          </p:cNvSpPr>
-          <p:nvPr>
-            <p:ph type="body" idx="1"/>
-          </p:nvPr>
-        </p:nvSpPr>
-        <p:spPr/>
-        <p:txBody>
-          <a:bodyPr/>
-          <a:lstStyle/>
-          <a:p>
-            <a:r>
-              <a:rPr lang="en-US" dirty="0"/>
-              <a:t>SCRIPT: The morning makes the app trustworthy; the afternoon makes it shippable; the last hour is theirs.
-TIMING: protect the clinic. If release runs long, move the Codemagic detail to the appendix and demo only the local Mac iOS flow.</a:t>
-            </a:r>
-            <a:endParaRPr lang="en-US" dirty="0"/>
-          </a:p>
-        </p:txBody>
-      </p:sp>
-      <p:sp>
-        <p:nvSpPr>
-          <p:cNvPr id="4" name="Slide Number Placeholder 3"/>
-          <p:cNvSpPr>
-            <a:spLocks noGrp="1"/>
-          </p:cNvSpPr>
-          <p:nvPr>
-            <p:ph type="sldNum" sz="quarter" idx="10"/>
-          </p:nvPr>
-        </p:nvSpPr>
-        <p:spPr/>
-        <p:txBody>
-          <a:bodyPr/>
-          <a:lstStyle/>
-          <a:p>
-            <a:fld id="{F7021451-1387-4CA6-816F-3879F97B5CBC}" type="slidenum">
-              <a:rPr lang="en-US"/>
-              <a:t>2</a:t>
-            </a:fld>
-            <a:endParaRPr lang="en-US"/>
-          </a:p>
-        </p:txBody>
-      </p:sp>
-    </p:spTree>
-    <p:extLst>
-      <p:ext uri="{BB962C8B-B14F-4D97-AF65-F5344CB8AC3E}">
-        <p14:creationId xmlns:p14="http://schemas.microsoft.com/office/powerpoint/2010/main" val="1024086991"/>
-      </p:ext>
-    </p:extLst>
-  </p:cSld>
-  <p:clrMapOvr>
-    <a:masterClrMapping/>
-  </p:clrMapOvr>
-</p:notes>
-</file>
-
-<file path=ppt/notesSlides/notesSlide20.xml><?xml version="1.0" encoding="utf-8"?>
-<p:notes xmlns:a="http://schemas.openxmlformats.org/drawingml/2006/main" xmlns:r="http://schemas.openxmlformats.org/officeDocument/2006/relationships" xmlns:p="http://schemas.openxmlformats.org/presentationml/2006/main">
-  <p:cSld>
-    <p:spTree>
-      <p:nvGrpSpPr>
-        <p:cNvPr id="1" name=""/>
-        <p:cNvGrpSpPr/>
-        <p:nvPr/>
-      </p:nvGrpSpPr>
-      <p:grpSpPr>
-        <a:xfrm>
-          <a:off x="0" y="0"/>
-          <a:ext cx="0" cy="0"/>
-          <a:chOff x="0" y="0"/>
-          <a:chExt cx="0" cy="0"/>
-        </a:xfrm>
-      </p:grpSpPr>
-      <p:sp>
-        <p:nvSpPr>
-          <p:cNvPr id="2" name="Slide Image Placeholder 1"/>
-          <p:cNvSpPr>
-            <a:spLocks noGrp="1" noRot="1" noChangeAspect="1"/>
-          </p:cNvSpPr>
-          <p:nvPr>
-            <p:ph type="sldImg"/>
-          </p:nvPr>
-        </p:nvSpPr>
-        <p:spPr/>
-      </p:sp>
-      <p:sp>
-        <p:nvSpPr>
-          <p:cNvPr id="3" name="Notes Placeholder 2"/>
-          <p:cNvSpPr>
-            <a:spLocks noGrp="1"/>
-          </p:cNvSpPr>
-          <p:nvPr>
-            <p:ph type="body" idx="1"/>
-          </p:nvPr>
-        </p:nvSpPr>
-        <p:spPr/>
-        <p:txBody>
-          <a:bodyPr/>
-          <a:lstStyle/>
-          <a:p>
-            <a:r>
-              <a:rPr lang="en-US" dirty="0"/>
-              <a:t>SCRIPT: Flavour dimension "brand", two flavours, each with an id suffix and an app_name string. Then set android:label="@string/app_name" in AndroidManifest.xml (replace the hard-coded label).
-KTS vs GROOVY: Flutter 3.29+ templates use build.gradle.kts. If a delegate's file is build.gradle (no .kts), use the Groovy syntax on the next slide; do not mix.
-RUN: flutter run --flavor alpha --dart-define-from-file=config/alpha.json. Without --flavor after adding flavours you get "You must specify a --flavor"; with a wrong name, "flavor not found".
-ICONS per flavour: android/app/src/alpha/res/mipmap-*/ic_launcher.png; flutter_launcher_icons can generate them (Appendix).</a:t>
-            </a:r>
-            <a:endParaRPr lang="en-US" dirty="0"/>
-          </a:p>
-        </p:txBody>
-      </p:sp>
-      <p:sp>
-        <p:nvSpPr>
-          <p:cNvPr id="4" name="Slide Number Placeholder 3"/>
-          <p:cNvSpPr>
-            <a:spLocks noGrp="1"/>
-          </p:cNvSpPr>
-          <p:nvPr>
-            <p:ph type="sldNum" sz="quarter" idx="10"/>
-          </p:nvPr>
-        </p:nvSpPr>
-        <p:spPr/>
-        <p:txBody>
-          <a:bodyPr/>
-          <a:lstStyle/>
-          <a:p>
-            <a:fld id="{F7021451-1387-4CA6-816F-3879F97B5CBC}" type="slidenum">
-              <a:rPr lang="en-US"/>
-              <a:t>20</a:t>
-            </a:fld>
-            <a:endParaRPr lang="en-US"/>
-          </a:p>
-        </p:txBody>
-      </p:sp>
-    </p:spTree>
-    <p:extLst>
-      <p:ext uri="{BB962C8B-B14F-4D97-AF65-F5344CB8AC3E}">
-        <p14:creationId xmlns:p14="http://schemas.microsoft.com/office/powerpoint/2010/main" val="1024086991"/>
-      </p:ext>
-    </p:extLst>
-  </p:cSld>
-  <p:clrMapOvr>
-    <a:masterClrMapping/>
-  </p:clrMapOvr>
-</p:notes>
-</file>
-
-<file path=ppt/notesSlides/notesSlide21.xml><?xml version="1.0" encoding="utf-8"?>
-<p:notes xmlns:a="http://schemas.openxmlformats.org/drawingml/2006/main" xmlns:r="http://schemas.openxmlformats.org/officeDocument/2006/relationships" xmlns:p="http://schemas.openxmlformats.org/presentationml/2006/main">
-  <p:cSld>
-    <p:spTree>
-      <p:nvGrpSpPr>
-        <p:cNvPr id="1" name=""/>
-        <p:cNvGrpSpPr/>
-        <p:nvPr/>
-      </p:nvGrpSpPr>
-      <p:grpSpPr>
-        <a:xfrm>
-          <a:off x="0" y="0"/>
-          <a:ext cx="0" cy="0"/>
-          <a:chOff x="0" y="0"/>
-          <a:chExt cx="0" cy="0"/>
-        </a:xfrm>
-      </p:grpSpPr>
-      <p:sp>
-        <p:nvSpPr>
-          <p:cNvPr id="2" name="Slide Image Placeholder 1"/>
-          <p:cNvSpPr>
-            <a:spLocks noGrp="1" noRot="1" noChangeAspect="1"/>
-          </p:cNvSpPr>
-          <p:nvPr>
-            <p:ph type="sldImg"/>
-          </p:nvPr>
-        </p:nvSpPr>
-        <p:spPr/>
-      </p:sp>
-      <p:sp>
-        <p:nvSpPr>
-          <p:cNvPr id="3" name="Notes Placeholder 2"/>
-          <p:cNvSpPr>
-            <a:spLocks noGrp="1"/>
-          </p:cNvSpPr>
-          <p:nvPr>
-            <p:ph type="body" idx="1"/>
-          </p:nvPr>
-        </p:nvSpPr>
-        <p:spPr/>
-        <p:txBody>
-          <a:bodyPr/>
-          <a:lstStyle/>
-          <a:p>
-            <a:r>
-              <a:rPr lang="en-US" dirty="0"/>
-              <a:t>SCRIPT: Groovy for older projects. Then the run/build commands - identical on both OS.
-iOS: on the Mac, open ios/Runner.xcworkspace, duplicate the Debug/Release/Profile configurations as Debug-alpha etc., create schemes alpha and beta, set PRODUCT_BUNDLE_IDENTIFIER per configuration. That is 15 minutes of clicking; show it on the projector once, then show flavorizr generating it (next slide). Windows delegates cannot do this step; they commit the Android side and let CI/Mac handle iOS.</a:t>
-            </a:r>
-            <a:endParaRPr lang="en-US" dirty="0"/>
-          </a:p>
-        </p:txBody>
-      </p:sp>
-      <p:sp>
-        <p:nvSpPr>
-          <p:cNvPr id="4" name="Slide Number Placeholder 3"/>
-          <p:cNvSpPr>
-            <a:spLocks noGrp="1"/>
-          </p:cNvSpPr>
-          <p:nvPr>
-            <p:ph type="sldNum" sz="quarter" idx="10"/>
-          </p:nvPr>
-        </p:nvSpPr>
-        <p:spPr/>
-        <p:txBody>
-          <a:bodyPr/>
-          <a:lstStyle/>
-          <a:p>
-            <a:fld id="{F7021451-1387-4CA6-816F-3879F97B5CBC}" type="slidenum">
-              <a:rPr lang="en-US"/>
-              <a:t>21</a:t>
-            </a:fld>
-            <a:endParaRPr lang="en-US"/>
-          </a:p>
-        </p:txBody>
-      </p:sp>
-    </p:spTree>
-    <p:extLst>
-      <p:ext uri="{BB962C8B-B14F-4D97-AF65-F5344CB8AC3E}">
-        <p14:creationId xmlns:p14="http://schemas.microsoft.com/office/powerpoint/2010/main" val="1024086991"/>
-      </p:ext>
-    </p:extLst>
-  </p:cSld>
-  <p:clrMapOvr>
-    <a:masterClrMapping/>
-  </p:clrMapOvr>
-</p:notes>
-</file>
-
-<file path=ppt/notesSlides/notesSlide22.xml><?xml version="1.0" encoding="utf-8"?>
-<p:notes xmlns:a="http://schemas.openxmlformats.org/drawingml/2006/main" xmlns:r="http://schemas.openxmlformats.org/officeDocument/2006/relationships" xmlns:p="http://schemas.openxmlformats.org/presentationml/2006/main">
-  <p:cSld>
-    <p:spTree>
-      <p:nvGrpSpPr>
-        <p:cNvPr id="1" name=""/>
-        <p:cNvGrpSpPr/>
-        <p:nvPr/>
-      </p:nvGrpSpPr>
-      <p:grpSpPr>
-        <a:xfrm>
-          <a:off x="0" y="0"/>
-          <a:ext cx="0" cy="0"/>
-          <a:chOff x="0" y="0"/>
-          <a:chExt cx="0" cy="0"/>
-        </a:xfrm>
-      </p:grpSpPr>
-      <p:sp>
-        <p:nvSpPr>
-          <p:cNvPr id="2" name="Slide Image Placeholder 1"/>
-          <p:cNvSpPr>
-            <a:spLocks noGrp="1" noRot="1" noChangeAspect="1"/>
-          </p:cNvSpPr>
-          <p:nvPr>
-            <p:ph type="sldImg"/>
-          </p:nvPr>
-        </p:nvSpPr>
-        <p:spPr/>
-      </p:sp>
-      <p:sp>
-        <p:nvSpPr>
-          <p:cNvPr id="3" name="Notes Placeholder 2"/>
-          <p:cNvSpPr>
-            <a:spLocks noGrp="1"/>
-          </p:cNvSpPr>
-          <p:nvPr>
-            <p:ph type="body" idx="1"/>
-          </p:nvPr>
-        </p:nvSpPr>
-        <p:spPr/>
-        <p:txBody>
-          <a:bodyPr/>
-          <a:lstStyle/>
-          <a:p>
-            <a:r>
-              <a:rPr lang="en-US" dirty="0"/>
-              <a:t>SCRIPT: For a team where nobody wants to touch Xcode, flavorizr is the answer: one YAML, one command, both platforms. Caveats: it overwrites native config (commit before), and it generates main_alpha.dart entry points (run with -t lib/main_alpha.dart) - we prefer dart-define for brand selection, so you can ignore or delete those and keep a single main.dart.
-Run it on the Mac once so the iOS side exists in the repo; Windows delegates then never need Xcode.</a:t>
-            </a:r>
-            <a:endParaRPr lang="en-US" dirty="0"/>
-          </a:p>
-        </p:txBody>
-      </p:sp>
-      <p:sp>
-        <p:nvSpPr>
-          <p:cNvPr id="4" name="Slide Number Placeholder 3"/>
-          <p:cNvSpPr>
-            <a:spLocks noGrp="1"/>
-          </p:cNvSpPr>
-          <p:nvPr>
-            <p:ph type="sldNum" sz="quarter" idx="10"/>
-          </p:nvPr>
-        </p:nvSpPr>
-        <p:spPr/>
-        <p:txBody>
-          <a:bodyPr/>
-          <a:lstStyle/>
-          <a:p>
-            <a:fld id="{F7021451-1387-4CA6-816F-3879F97B5CBC}" type="slidenum">
-              <a:rPr lang="en-US"/>
-              <a:t>22</a:t>
-            </a:fld>
-            <a:endParaRPr lang="en-US"/>
-          </a:p>
-        </p:txBody>
-      </p:sp>
-    </p:spTree>
-    <p:extLst>
-      <p:ext uri="{BB962C8B-B14F-4D97-AF65-F5344CB8AC3E}">
-        <p14:creationId xmlns:p14="http://schemas.microsoft.com/office/powerpoint/2010/main" val="1024086991"/>
-      </p:ext>
-    </p:extLst>
-  </p:cSld>
-  <p:clrMapOvr>
-    <a:masterClrMapping/>
-  </p:clrMapOvr>
-</p:notes>
-</file>
-
-<file path=ppt/notesSlides/notesSlide23.xml><?xml version="1.0" encoding="utf-8"?>
-<p:notes xmlns:a="http://schemas.openxmlformats.org/drawingml/2006/main" xmlns:r="http://schemas.openxmlformats.org/officeDocument/2006/relationships" xmlns:p="http://schemas.openxmlformats.org/presentationml/2006/main">
-  <p:cSld>
-    <p:spTree>
-      <p:nvGrpSpPr>
-        <p:cNvPr id="1" name=""/>
-        <p:cNvGrpSpPr/>
-        <p:nvPr/>
-      </p:nvGrpSpPr>
-      <p:grpSpPr>
-        <a:xfrm>
-          <a:off x="0" y="0"/>
-          <a:ext cx="0" cy="0"/>
-          <a:chOff x="0" y="0"/>
-          <a:chExt cx="0" cy="0"/>
-        </a:xfrm>
-      </p:grpSpPr>
-      <p:sp>
-        <p:nvSpPr>
-          <p:cNvPr id="2" name="Slide Image Placeholder 1"/>
-          <p:cNvSpPr>
-            <a:spLocks noGrp="1" noRot="1" noChangeAspect="1"/>
-          </p:cNvSpPr>
-          <p:nvPr>
-            <p:ph type="sldImg"/>
-          </p:nvPr>
-        </p:nvSpPr>
-        <p:spPr/>
-      </p:sp>
-      <p:sp>
-        <p:nvSpPr>
-          <p:cNvPr id="3" name="Notes Placeholder 2"/>
-          <p:cNvSpPr>
-            <a:spLocks noGrp="1"/>
-          </p:cNvSpPr>
-          <p:nvPr>
-            <p:ph type="body" idx="1"/>
-          </p:nvPr>
-        </p:nvSpPr>
-        <p:spPr/>
-        <p:txBody>
-          <a:bodyPr/>
-          <a:lstStyle/>
-          <a:p>
-            <a:r>
-              <a:rPr lang="en-US" dirty="0"/>
-              <a:t>RUN THE LAB: 45 min. The Gradle edit is the risk: one wrong brace and the build fails with a Kotlin script compile error pointing at the line. Have the KTS block on the second display.
-COMMON ERRORS: "You must specify a --flavor" → flavours exist, flag missing. "Flavor 'alpha' not found" → typo or wrong dimension. Manifest label error → @string/app_name needs the resValue; clean and rebuild. Icons unchanged → flutter clean then run (launcher caches icons; sometimes uninstall). Gradle sync slow on Windows → antivirus exclusion for the project and .gradle.
-SOLUTION: Appendix B, branch lab-5-2-solution.</a:t>
-            </a:r>
-            <a:endParaRPr lang="en-US" dirty="0"/>
-          </a:p>
-        </p:txBody>
-      </p:sp>
-      <p:sp>
-        <p:nvSpPr>
-          <p:cNvPr id="4" name="Slide Number Placeholder 3"/>
-          <p:cNvSpPr>
-            <a:spLocks noGrp="1"/>
-          </p:cNvSpPr>
-          <p:nvPr>
-            <p:ph type="sldNum" sz="quarter" idx="10"/>
-          </p:nvPr>
-        </p:nvSpPr>
-        <p:spPr/>
-        <p:txBody>
-          <a:bodyPr/>
-          <a:lstStyle/>
-          <a:p>
-            <a:fld id="{F7021451-1387-4CA6-816F-3879F97B5CBC}" type="slidenum">
-              <a:rPr lang="en-US"/>
-              <a:t>23</a:t>
-            </a:fld>
-            <a:endParaRPr lang="en-US"/>
-          </a:p>
-        </p:txBody>
-      </p:sp>
-    </p:spTree>
-    <p:extLst>
-      <p:ext uri="{BB962C8B-B14F-4D97-AF65-F5344CB8AC3E}">
-        <p14:creationId xmlns:p14="http://schemas.microsoft.com/office/powerpoint/2010/main" val="1024086991"/>
-      </p:ext>
-    </p:extLst>
-  </p:cSld>
-  <p:clrMapOvr>
-    <a:masterClrMapping/>
-  </p:clrMapOvr>
-</p:notes>
-</file>
-
-<file path=ppt/notesSlides/notesSlide24.xml><?xml version="1.0" encoding="utf-8"?>
-<p:notes xmlns:a="http://schemas.openxmlformats.org/drawingml/2006/main" xmlns:r="http://schemas.openxmlformats.org/officeDocument/2006/relationships" xmlns:p="http://schemas.openxmlformats.org/presentationml/2006/main">
-  <p:cSld>
-    <p:spTree>
-      <p:nvGrpSpPr>
-        <p:cNvPr id="1" name=""/>
-        <p:cNvGrpSpPr/>
-        <p:nvPr/>
-      </p:nvGrpSpPr>
-      <p:grpSpPr>
-        <a:xfrm>
-          <a:off x="0" y="0"/>
-          <a:ext cx="0" cy="0"/>
-          <a:chOff x="0" y="0"/>
-          <a:chExt cx="0" cy="0"/>
-        </a:xfrm>
-      </p:grpSpPr>
-      <p:sp>
-        <p:nvSpPr>
-          <p:cNvPr id="2" name="Slide Image Placeholder 1"/>
-          <p:cNvSpPr>
-            <a:spLocks noGrp="1" noRot="1" noChangeAspect="1"/>
-          </p:cNvSpPr>
-          <p:nvPr>
-            <p:ph type="sldImg"/>
-          </p:nvPr>
-        </p:nvSpPr>
-        <p:spPr/>
-      </p:sp>
-      <p:sp>
-        <p:nvSpPr>
-          <p:cNvPr id="3" name="Notes Placeholder 2"/>
-          <p:cNvSpPr>
-            <a:spLocks noGrp="1"/>
-          </p:cNvSpPr>
-          <p:nvPr>
-            <p:ph type="body" idx="1"/>
-          </p:nvPr>
-        </p:nvSpPr>
-        <p:spPr/>
-        <p:txBody>
-          <a:bodyPr/>
-          <a:lstStyle/>
-          <a:p>
-            <a:r>
-              <a:rPr lang="en-US" dirty="0"/>
-              <a:t>SCRIPT: The lowest survey score. Every step gets a command on both OS and a checklist for the consoles. Your ThynkPay App Store experience is the credibility here - tell one war story about a rejection.</a:t>
-            </a:r>
-            <a:endParaRPr lang="en-US" dirty="0"/>
-          </a:p>
-        </p:txBody>
-      </p:sp>
-      <p:sp>
-        <p:nvSpPr>
-          <p:cNvPr id="4" name="Slide Number Placeholder 3"/>
-          <p:cNvSpPr>
-            <a:spLocks noGrp="1"/>
-          </p:cNvSpPr>
-          <p:nvPr>
-            <p:ph type="sldNum" sz="quarter" idx="10"/>
-          </p:nvPr>
-        </p:nvSpPr>
-        <p:spPr/>
-        <p:txBody>
-          <a:bodyPr/>
-          <a:lstStyle/>
-          <a:p>
-            <a:fld id="{F7021451-1387-4CA6-816F-3879F97B5CBC}" type="slidenum">
-              <a:rPr lang="en-US"/>
-              <a:t>24</a:t>
-            </a:fld>
-            <a:endParaRPr lang="en-US"/>
-          </a:p>
-        </p:txBody>
-      </p:sp>
-    </p:spTree>
-    <p:extLst>
-      <p:ext uri="{BB962C8B-B14F-4D97-AF65-F5344CB8AC3E}">
-        <p14:creationId xmlns:p14="http://schemas.microsoft.com/office/powerpoint/2010/main" val="1024086991"/>
-      </p:ext>
-    </p:extLst>
-  </p:cSld>
-  <p:clrMapOvr>
-    <a:masterClrMapping/>
-  </p:clrMapOvr>
-</p:notes>
-</file>
-
-<file path=ppt/notesSlides/notesSlide25.xml><?xml version="1.0" encoding="utf-8"?>
-<p:notes xmlns:a="http://schemas.openxmlformats.org/drawingml/2006/main" xmlns:r="http://schemas.openxmlformats.org/officeDocument/2006/relationships" xmlns:p="http://schemas.openxmlformats.org/presentationml/2006/main">
-  <p:cSld>
-    <p:spTree>
-      <p:nvGrpSpPr>
-        <p:cNvPr id="1" name=""/>
-        <p:cNvGrpSpPr/>
-        <p:nvPr/>
-      </p:nvGrpSpPr>
-      <p:grpSpPr>
-        <a:xfrm>
-          <a:off x="0" y="0"/>
-          <a:ext cx="0" cy="0"/>
-          <a:chOff x="0" y="0"/>
-          <a:chExt cx="0" cy="0"/>
-        </a:xfrm>
-      </p:grpSpPr>
-      <p:sp>
-        <p:nvSpPr>
-          <p:cNvPr id="2" name="Slide Image Placeholder 1"/>
-          <p:cNvSpPr>
-            <a:spLocks noGrp="1" noRot="1" noChangeAspect="1"/>
-          </p:cNvSpPr>
-          <p:nvPr>
-            <p:ph type="sldImg"/>
-          </p:nvPr>
-        </p:nvSpPr>
-        <p:spPr/>
-      </p:sp>
-      <p:sp>
-        <p:nvSpPr>
-          <p:cNvPr id="3" name="Notes Placeholder 2"/>
-          <p:cNvSpPr>
-            <a:spLocks noGrp="1"/>
-          </p:cNvSpPr>
-          <p:nvPr>
-            <p:ph type="body" idx="1"/>
-          </p:nvPr>
-        </p:nvSpPr>
-        <p:spPr/>
-        <p:txBody>
-          <a:bodyPr/>
-          <a:lstStyle/>
-          <a:p>
-            <a:r>
-              <a:rPr lang="en-US" dirty="0"/>
-              <a:t>SCRIPT: Run it on your Mac live; delegates run the Windows column. keytool is in the JDK bundled with Android Studio (jbr); if not on PATH, the full path is on the slide.
-PASSWORDS: keytool asks store password then key password; use the same for simplicity, keep them in a password manager. Later they go into key.properties (local) and CI secrets.
-BACKUP: say it twice. With Play App Signing enrolled, a lost upload key can be reset through Play Console support; a lost signing key without Play App Signing means you can never update the app.
-WINDOWS: the &amp; call operator is needed when the path has spaces.</a:t>
-            </a:r>
-            <a:endParaRPr lang="en-US" dirty="0"/>
-          </a:p>
-        </p:txBody>
-      </p:sp>
-      <p:sp>
-        <p:nvSpPr>
-          <p:cNvPr id="4" name="Slide Number Placeholder 3"/>
-          <p:cNvSpPr>
-            <a:spLocks noGrp="1"/>
-          </p:cNvSpPr>
-          <p:nvPr>
-            <p:ph type="sldNum" sz="quarter" idx="10"/>
-          </p:nvPr>
-        </p:nvSpPr>
-        <p:spPr/>
-        <p:txBody>
-          <a:bodyPr/>
-          <a:lstStyle/>
-          <a:p>
-            <a:fld id="{F7021451-1387-4CA6-816F-3879F97B5CBC}" type="slidenum">
-              <a:rPr lang="en-US"/>
-              <a:t>25</a:t>
-            </a:fld>
-            <a:endParaRPr lang="en-US"/>
-          </a:p>
-        </p:txBody>
-      </p:sp>
-    </p:spTree>
-    <p:extLst>
-      <p:ext uri="{BB962C8B-B14F-4D97-AF65-F5344CB8AC3E}">
-        <p14:creationId xmlns:p14="http://schemas.microsoft.com/office/powerpoint/2010/main" val="1024086991"/>
-      </p:ext>
-    </p:extLst>
-  </p:cSld>
-  <p:clrMapOvr>
-    <a:masterClrMapping/>
-  </p:clrMapOvr>
-</p:notes>
-</file>
-
-<file path=ppt/notesSlides/notesSlide26.xml><?xml version="1.0" encoding="utf-8"?>
-<p:notes xmlns:a="http://schemas.openxmlformats.org/drawingml/2006/main" xmlns:r="http://schemas.openxmlformats.org/officeDocument/2006/relationships" xmlns:p="http://schemas.openxmlformats.org/presentationml/2006/main">
-  <p:cSld>
-    <p:spTree>
-      <p:nvGrpSpPr>
-        <p:cNvPr id="1" name=""/>
-        <p:cNvGrpSpPr/>
-        <p:nvPr/>
-      </p:nvGrpSpPr>
-      <p:grpSpPr>
-        <a:xfrm>
-          <a:off x="0" y="0"/>
-          <a:ext cx="0" cy="0"/>
-          <a:chOff x="0" y="0"/>
-          <a:chExt cx="0" cy="0"/>
-        </a:xfrm>
-      </p:grpSpPr>
-      <p:sp>
-        <p:nvSpPr>
-          <p:cNvPr id="2" name="Slide Image Placeholder 1"/>
-          <p:cNvSpPr>
-            <a:spLocks noGrp="1" noRot="1" noChangeAspect="1"/>
-          </p:cNvSpPr>
-          <p:nvPr>
-            <p:ph type="sldImg"/>
-          </p:nvPr>
-        </p:nvSpPr>
-        <p:spPr/>
-      </p:sp>
-      <p:sp>
-        <p:nvSpPr>
-          <p:cNvPr id="3" name="Notes Placeholder 2"/>
-          <p:cNvSpPr>
-            <a:spLocks noGrp="1"/>
-          </p:cNvSpPr>
-          <p:nvPr>
-            <p:ph type="body" idx="1"/>
-          </p:nvPr>
-        </p:nvSpPr>
-        <p:spPr/>
-        <p:txBody>
-          <a:bodyPr/>
-          <a:lstStyle/>
-          <a:p>
-            <a:r>
-              <a:rPr lang="en-US" dirty="0"/>
-              <a:t>SCRIPT: Two files. key.properties holds paths and passwords locally; the Gradle block reads it and signs release builds. On Windows the storeFile path needs double backslashes or forward slashes.
-Add android/key.properties and *.jks to .gitignore now, before the first commit of the day.
-Groovy equivalent: def keystoreProperties = new Properties() … signingConfigs { release { keyAlias keystoreProperties['keyAlias'] … } } - Appendix D.
-Minify errors at runtime (ClassNotFound for a plugin) → add keep rules to proguard-rules.pro; most Flutter plugins ship their own rules.</a:t>
-            </a:r>
-            <a:endParaRPr lang="en-US" dirty="0"/>
-          </a:p>
-        </p:txBody>
-      </p:sp>
-      <p:sp>
-        <p:nvSpPr>
-          <p:cNvPr id="4" name="Slide Number Placeholder 3"/>
-          <p:cNvSpPr>
-            <a:spLocks noGrp="1"/>
-          </p:cNvSpPr>
-          <p:nvPr>
-            <p:ph type="sldNum" sz="quarter" idx="10"/>
-          </p:nvPr>
-        </p:nvSpPr>
-        <p:spPr/>
-        <p:txBody>
-          <a:bodyPr/>
-          <a:lstStyle/>
-          <a:p>
-            <a:fld id="{F7021451-1387-4CA6-816F-3879F97B5CBC}" type="slidenum">
-              <a:rPr lang="en-US"/>
-              <a:t>26</a:t>
-            </a:fld>
-            <a:endParaRPr lang="en-US"/>
-          </a:p>
-        </p:txBody>
-      </p:sp>
-    </p:spTree>
-    <p:extLst>
-      <p:ext uri="{BB962C8B-B14F-4D97-AF65-F5344CB8AC3E}">
-        <p14:creationId xmlns:p14="http://schemas.microsoft.com/office/powerpoint/2010/main" val="1024086991"/>
-      </p:ext>
-    </p:extLst>
-  </p:cSld>
-  <p:clrMapOvr>
-    <a:masterClrMapping/>
-  </p:clrMapOvr>
-</p:notes>
-</file>
-
-<file path=ppt/notesSlides/notesSlide27.xml><?xml version="1.0" encoding="utf-8"?>
-<p:notes xmlns:a="http://schemas.openxmlformats.org/drawingml/2006/main" xmlns:r="http://schemas.openxmlformats.org/officeDocument/2006/relationships" xmlns:p="http://schemas.openxmlformats.org/presentationml/2006/main">
-  <p:cSld>
-    <p:spTree>
-      <p:nvGrpSpPr>
-        <p:cNvPr id="1" name=""/>
-        <p:cNvGrpSpPr/>
-        <p:nvPr/>
-      </p:nvGrpSpPr>
-      <p:grpSpPr>
-        <a:xfrm>
-          <a:off x="0" y="0"/>
-          <a:ext cx="0" cy="0"/>
-          <a:chOff x="0" y="0"/>
-          <a:chExt cx="0" cy="0"/>
-        </a:xfrm>
-      </p:grpSpPr>
-      <p:sp>
-        <p:nvSpPr>
-          <p:cNvPr id="2" name="Slide Image Placeholder 1"/>
-          <p:cNvSpPr>
-            <a:spLocks noGrp="1" noRot="1" noChangeAspect="1"/>
-          </p:cNvSpPr>
-          <p:nvPr>
-            <p:ph type="sldImg"/>
-          </p:nvPr>
-        </p:nvSpPr>
-        <p:spPr/>
-      </p:sp>
-      <p:sp>
-        <p:nvSpPr>
-          <p:cNvPr id="3" name="Notes Placeholder 2"/>
-          <p:cNvSpPr>
-            <a:spLocks noGrp="1"/>
-          </p:cNvSpPr>
-          <p:nvPr>
-            <p:ph type="body" idx="1"/>
-          </p:nvPr>
-        </p:nvSpPr>
-        <p:spPr/>
-        <p:txBody>
-          <a:bodyPr/>
-          <a:lstStyle/>
-          <a:p>
-            <a:r>
-              <a:rPr lang="en-US" dirty="0"/>
-              <a:t>SCRIPT: Two files. key.properties holds paths and passwords locally; the Gradle block reads it and signs release builds. On Windows the storeFile path needs double backslashes or forward slashes.
-Add android/key.properties and *.jks to .gitignore now, before the first commit of the day.
-Groovy equivalent: def keystoreProperties = new Properties() … signingConfigs { release { keyAlias keystoreProperties['keyAlias'] … } } - Appendix D.
-Minify errors at runtime (ClassNotFound for a plugin) → add keep rules to proguard-rules.pro; most Flutter plugins ship their own rules.</a:t>
-            </a:r>
-            <a:endParaRPr lang="en-US" dirty="0"/>
-          </a:p>
-        </p:txBody>
-      </p:sp>
-      <p:sp>
-        <p:nvSpPr>
-          <p:cNvPr id="4" name="Slide Number Placeholder 3"/>
-          <p:cNvSpPr>
-            <a:spLocks noGrp="1"/>
-          </p:cNvSpPr>
-          <p:nvPr>
-            <p:ph type="sldNum" sz="quarter" idx="10"/>
-          </p:nvPr>
-        </p:nvSpPr>
-        <p:spPr/>
-        <p:txBody>
-          <a:bodyPr/>
-          <a:lstStyle/>
-          <a:p>
-            <a:fld id="{F7021451-1387-4CA6-816F-3879F97B5CBC}" type="slidenum">
-              <a:rPr lang="en-US"/>
-              <a:t>27</a:t>
-            </a:fld>
-            <a:endParaRPr lang="en-US"/>
-          </a:p>
-        </p:txBody>
-      </p:sp>
-    </p:spTree>
-    <p:extLst>
-      <p:ext uri="{BB962C8B-B14F-4D97-AF65-F5344CB8AC3E}">
-        <p14:creationId xmlns:p14="http://schemas.microsoft.com/office/powerpoint/2010/main" val="1024086991"/>
-      </p:ext>
-    </p:extLst>
-  </p:cSld>
-  <p:clrMapOvr>
-    <a:masterClrMapping/>
-  </p:clrMapOvr>
-</p:notes>
-</file>
-
-<file path=ppt/notesSlides/notesSlide28.xml><?xml version="1.0" encoding="utf-8"?>
-<p:notes xmlns:a="http://schemas.openxmlformats.org/drawingml/2006/main" xmlns:r="http://schemas.openxmlformats.org/officeDocument/2006/relationships" xmlns:p="http://schemas.openxmlformats.org/presentationml/2006/main">
-  <p:cSld>
-    <p:spTree>
-      <p:nvGrpSpPr>
-        <p:cNvPr id="1" name=""/>
-        <p:cNvGrpSpPr/>
-        <p:nvPr/>
-      </p:nvGrpSpPr>
-      <p:grpSpPr>
-        <a:xfrm>
-          <a:off x="0" y="0"/>
-          <a:ext cx="0" cy="0"/>
-          <a:chOff x="0" y="0"/>
-          <a:chExt cx="0" cy="0"/>
-        </a:xfrm>
-      </p:grpSpPr>
-      <p:sp>
-        <p:nvSpPr>
-          <p:cNvPr id="2" name="Slide Image Placeholder 1"/>
-          <p:cNvSpPr>
-            <a:spLocks noGrp="1" noRot="1" noChangeAspect="1"/>
-          </p:cNvSpPr>
-          <p:nvPr>
-            <p:ph type="sldImg"/>
-          </p:nvPr>
-        </p:nvSpPr>
-        <p:spPr/>
-      </p:sp>
-      <p:sp>
-        <p:nvSpPr>
-          <p:cNvPr id="3" name="Notes Placeholder 2"/>
-          <p:cNvSpPr>
-            <a:spLocks noGrp="1"/>
-          </p:cNvSpPr>
-          <p:nvPr>
-            <p:ph type="body" idx="1"/>
-          </p:nvPr>
-        </p:nvSpPr>
-        <p:spPr/>
-        <p:txBody>
-          <a:bodyPr/>
-          <a:lstStyle/>
-          <a:p>
-            <a:r>
-              <a:rPr lang="en-US" dirty="0"/>
-              <a:t>SCRIPT: One command per brand. Explain the output path with the flavour folder. The obfuscate flags are cheap and worth it for an insurance app; keep the symbols folder per release.
-apksigner path differs per OS (on the slide). Version: pubspec version 1.0.0+1 → versionName 1.0.0, versionCode 1; Play requires a higher versionCode on every upload.
-DEMO: build alpha AAB on the Mac (takes a minute or two - start it before the slide), show the file, run apksigner verify.</a:t>
-            </a:r>
-            <a:endParaRPr lang="en-US" dirty="0"/>
-          </a:p>
-        </p:txBody>
-      </p:sp>
-      <p:sp>
-        <p:nvSpPr>
-          <p:cNvPr id="4" name="Slide Number Placeholder 3"/>
-          <p:cNvSpPr>
-            <a:spLocks noGrp="1"/>
-          </p:cNvSpPr>
-          <p:nvPr>
-            <p:ph type="sldNum" sz="quarter" idx="10"/>
-          </p:nvPr>
-        </p:nvSpPr>
-        <p:spPr/>
-        <p:txBody>
-          <a:bodyPr/>
-          <a:lstStyle/>
-          <a:p>
-            <a:fld id="{F7021451-1387-4CA6-816F-3879F97B5CBC}" type="slidenum">
-              <a:rPr lang="en-US"/>
-              <a:t>28</a:t>
-            </a:fld>
-            <a:endParaRPr lang="en-US"/>
-          </a:p>
-        </p:txBody>
-      </p:sp>
-    </p:spTree>
-    <p:extLst>
-      <p:ext uri="{BB962C8B-B14F-4D97-AF65-F5344CB8AC3E}">
-        <p14:creationId xmlns:p14="http://schemas.microsoft.com/office/powerpoint/2010/main" val="1024086991"/>
-      </p:ext>
-    </p:extLst>
-  </p:cSld>
-  <p:clrMapOvr>
-    <a:masterClrMapping/>
-  </p:clrMapOvr>
-</p:notes>
-</file>
-
-<file path=ppt/notesSlides/notesSlide29.xml><?xml version="1.0" encoding="utf-8"?>
-<p:notes xmlns:a="http://schemas.openxmlformats.org/drawingml/2006/main" xmlns:r="http://schemas.openxmlformats.org/officeDocument/2006/relationships" xmlns:p="http://schemas.openxmlformats.org/presentationml/2006/main">
-  <p:cSld>
-    <p:spTree>
-      <p:nvGrpSpPr>
-        <p:cNvPr id="1" name=""/>
-        <p:cNvGrpSpPr/>
-        <p:nvPr/>
-      </p:nvGrpSpPr>
-      <p:grpSpPr>
-        <a:xfrm>
-          <a:off x="0" y="0"/>
-          <a:ext cx="0" cy="0"/>
-          <a:chOff x="0" y="0"/>
-          <a:chExt cx="0" cy="0"/>
-        </a:xfrm>
-      </p:grpSpPr>
-      <p:sp>
-        <p:nvSpPr>
-          <p:cNvPr id="2" name="Slide Image Placeholder 1"/>
-          <p:cNvSpPr>
-            <a:spLocks noGrp="1" noRot="1" noChangeAspect="1"/>
-          </p:cNvSpPr>
-          <p:nvPr>
-            <p:ph type="sldImg"/>
-          </p:nvPr>
-        </p:nvSpPr>
-        <p:spPr/>
-      </p:sp>
-      <p:sp>
-        <p:nvSpPr>
-          <p:cNvPr id="3" name="Notes Placeholder 2"/>
-          <p:cNvSpPr>
-            <a:spLocks noGrp="1"/>
-          </p:cNvSpPr>
-          <p:nvPr>
-            <p:ph type="body" idx="1"/>
-          </p:nvPr>
-        </p:nvSpPr>
-        <p:spPr/>
-        <p:txBody>
-          <a:bodyPr/>
-          <a:lstStyle/>
-          <a:p>
-            <a:r>
-              <a:rPr lang="en-US" dirty="0"/>
-              <a:t>SCRIPT: Quick win. Both packages are dev dependencies and pure Dart CLIs - identical on Windows and Mac.
-Adaptive icon: background colour + foreground PNG with padding; without it Android crops your square icon into a circle.
-Splash: flutter_native_splash also handles the Android 12 splash API which otherwise shows a plain icon.</a:t>
-            </a:r>
-            <a:endParaRPr lang="en-US" dirty="0"/>
-          </a:p>
-        </p:txBody>
-      </p:sp>
-      <p:sp>
-        <p:nvSpPr>
-          <p:cNvPr id="4" name="Slide Number Placeholder 3"/>
-          <p:cNvSpPr>
-            <a:spLocks noGrp="1"/>
-          </p:cNvSpPr>
-          <p:nvPr>
-            <p:ph type="sldNum" sz="quarter" idx="10"/>
-          </p:nvPr>
-        </p:nvSpPr>
-        <p:spPr/>
-        <p:txBody>
-          <a:bodyPr/>
-          <a:lstStyle/>
-          <a:p>
-            <a:fld id="{F7021451-1387-4CA6-816F-3879F97B5CBC}" type="slidenum">
-              <a:rPr lang="en-US"/>
-              <a:t>29</a:t>
-            </a:fld>
-            <a:endParaRPr lang="en-US"/>
-          </a:p>
-        </p:txBody>
-      </p:sp>
-    </p:spTree>
-    <p:extLst>
-      <p:ext uri="{BB962C8B-B14F-4D97-AF65-F5344CB8AC3E}">
-        <p14:creationId xmlns:p14="http://schemas.microsoft.com/office/powerpoint/2010/main" val="1024086991"/>
-      </p:ext>
-    </p:extLst>
-  </p:cSld>
-  <p:clrMapOvr>
-    <a:masterClrMapping/>
-  </p:clrMapOvr>
-</p:notes>
-</file>
-
-<file path=ppt/notesSlides/notesSlide3.xml><?xml version="1.0" encoding="utf-8"?>
-<p:notes xmlns:a="http://schemas.openxmlformats.org/drawingml/2006/main" xmlns:r="http://schemas.openxmlformats.org/officeDocument/2006/relationships" xmlns:p="http://schemas.openxmlformats.org/presentationml/2006/main">
-  <p:cSld>
-    <p:spTree>
-      <p:nvGrpSpPr>
-        <p:cNvPr id="1" name=""/>
-        <p:cNvGrpSpPr/>
-        <p:nvPr/>
-      </p:nvGrpSpPr>
-      <p:grpSpPr>
-        <a:xfrm>
-          <a:off x="0" y="0"/>
-          <a:ext cx="0" cy="0"/>
-          <a:chOff x="0" y="0"/>
-          <a:chExt cx="0" cy="0"/>
-        </a:xfrm>
-      </p:grpSpPr>
-      <p:sp>
-        <p:nvSpPr>
-          <p:cNvPr id="2" name="Slide Image Placeholder 1"/>
-          <p:cNvSpPr>
-            <a:spLocks noGrp="1" noRot="1" noChangeAspect="1"/>
-          </p:cNvSpPr>
-          <p:nvPr>
-            <p:ph type="sldImg"/>
-          </p:nvPr>
-        </p:nvSpPr>
-        <p:spPr/>
-      </p:sp>
-      <p:sp>
-        <p:nvSpPr>
-          <p:cNvPr id="3" name="Notes Placeholder 2"/>
-          <p:cNvSpPr>
-            <a:spLocks noGrp="1"/>
-          </p:cNvSpPr>
-          <p:nvPr>
-            <p:ph type="body" idx="1"/>
-          </p:nvPr>
-        </p:nvSpPr>
-        <p:spPr/>
-        <p:txBody>
-          <a:bodyPr/>
-          <a:lstStyle/>
-          <a:p>
-            <a:r>
-              <a:rPr lang="en-US" dirty="0"/>
-              <a:t>SCRIPT: After the presenters. The pumpAndSettle trap is the one to burn in: the quote flow shows a spinner, so tests of it must pump(Duration) past the fake's delay, never pumpAndSettle.
-LIVE TEST: create test/capture_form_test.dart from their answers; run flutter test; watch it fail on a finder, fix, pass. Five minutes.</a:t>
-            </a:r>
-            <a:endParaRPr lang="en-US" dirty="0"/>
-          </a:p>
-        </p:txBody>
-      </p:sp>
-      <p:sp>
-        <p:nvSpPr>
-          <p:cNvPr id="4" name="Slide Number Placeholder 3"/>
-          <p:cNvSpPr>
-            <a:spLocks noGrp="1"/>
-          </p:cNvSpPr>
-          <p:nvPr>
-            <p:ph type="sldNum" sz="quarter" idx="10"/>
-          </p:nvPr>
-        </p:nvSpPr>
-        <p:spPr/>
-        <p:txBody>
-          <a:bodyPr/>
-          <a:lstStyle/>
-          <a:p>
-            <a:fld id="{F7021451-1387-4CA6-816F-3879F97B5CBC}" type="slidenum">
-              <a:rPr lang="en-US"/>
-              <a:t>3</a:t>
-            </a:fld>
-            <a:endParaRPr lang="en-US"/>
-          </a:p>
-        </p:txBody>
-      </p:sp>
-    </p:spTree>
-    <p:extLst>
-      <p:ext uri="{BB962C8B-B14F-4D97-AF65-F5344CB8AC3E}">
-        <p14:creationId xmlns:p14="http://schemas.microsoft.com/office/powerpoint/2010/main" val="1024086991"/>
-      </p:ext>
-    </p:extLst>
-  </p:cSld>
-  <p:clrMapOvr>
-    <a:masterClrMapping/>
-  </p:clrMapOvr>
-</p:notes>
-</file>
-
-<file path=ppt/notesSlides/notesSlide30.xml><?xml version="1.0" encoding="utf-8"?>
-<p:notes xmlns:a="http://schemas.openxmlformats.org/drawingml/2006/main" xmlns:r="http://schemas.openxmlformats.org/officeDocument/2006/relationships" xmlns:p="http://schemas.openxmlformats.org/presentationml/2006/main">
-  <p:cSld>
-    <p:spTree>
-      <p:nvGrpSpPr>
-        <p:cNvPr id="1" name=""/>
-        <p:cNvGrpSpPr/>
-        <p:nvPr/>
-      </p:nvGrpSpPr>
-      <p:grpSpPr>
-        <a:xfrm>
-          <a:off x="0" y="0"/>
-          <a:ext cx="0" cy="0"/>
-          <a:chOff x="0" y="0"/>
-          <a:chExt cx="0" cy="0"/>
-        </a:xfrm>
-      </p:grpSpPr>
-      <p:sp>
-        <p:nvSpPr>
-          <p:cNvPr id="2" name="Slide Image Placeholder 1"/>
-          <p:cNvSpPr>
-            <a:spLocks noGrp="1" noRot="1" noChangeAspect="1"/>
-          </p:cNvSpPr>
-          <p:nvPr>
-            <p:ph type="sldImg"/>
-          </p:nvPr>
-        </p:nvSpPr>
-        <p:spPr/>
-      </p:sp>
-      <p:sp>
-        <p:nvSpPr>
-          <p:cNvPr id="3" name="Notes Placeholder 2"/>
-          <p:cNvSpPr>
-            <a:spLocks noGrp="1"/>
-          </p:cNvSpPr>
-          <p:nvPr>
-            <p:ph type="body" idx="1"/>
-          </p:nvPr>
-        </p:nvSpPr>
-        <p:spPr/>
-        <p:txBody>
-          <a:bodyPr/>
-          <a:lstStyle/>
-          <a:p>
-            <a:r>
-              <a:rPr lang="en-US" dirty="0"/>
-              <a:t>SCRIPT: Walk the console live if the venue allows (Play Console → your test app), else the screenshots. The two things that stall first releases: the data safety form (must be consistent with the privacy policy and with what the app actually does) and app access (give a reviewer demo account if login exists).
-Multi-brand: each flavour has its own application id, so each brand is its own Play listing with its own screenshots and policy - plan the store assets per brand.
-Common rejections list is in the appendix; say the top three: data safety mismatch, no demo account, crash on a low-end device.</a:t>
-            </a:r>
-            <a:endParaRPr lang="en-US" dirty="0"/>
-          </a:p>
-        </p:txBody>
-      </p:sp>
-      <p:sp>
-        <p:nvSpPr>
-          <p:cNvPr id="4" name="Slide Number Placeholder 3"/>
-          <p:cNvSpPr>
-            <a:spLocks noGrp="1"/>
-          </p:cNvSpPr>
-          <p:nvPr>
-            <p:ph type="sldNum" sz="quarter" idx="10"/>
-          </p:nvPr>
-        </p:nvSpPr>
-        <p:spPr/>
-        <p:txBody>
-          <a:bodyPr/>
-          <a:lstStyle/>
-          <a:p>
-            <a:fld id="{F7021451-1387-4CA6-816F-3879F97B5CBC}" type="slidenum">
-              <a:rPr lang="en-US"/>
-              <a:t>30</a:t>
-            </a:fld>
-            <a:endParaRPr lang="en-US"/>
-          </a:p>
-        </p:txBody>
-      </p:sp>
-    </p:spTree>
-    <p:extLst>
-      <p:ext uri="{BB962C8B-B14F-4D97-AF65-F5344CB8AC3E}">
-        <p14:creationId xmlns:p14="http://schemas.microsoft.com/office/powerpoint/2010/main" val="1024086991"/>
-      </p:ext>
-    </p:extLst>
-  </p:cSld>
-  <p:clrMapOvr>
-    <a:masterClrMapping/>
-  </p:clrMapOvr>
-</p:notes>
-</file>
-
-<file path=ppt/notesSlides/notesSlide31.xml><?xml version="1.0" encoding="utf-8"?>
-<p:notes xmlns:a="http://schemas.openxmlformats.org/drawingml/2006/main" xmlns:r="http://schemas.openxmlformats.org/officeDocument/2006/relationships" xmlns:p="http://schemas.openxmlformats.org/presentationml/2006/main">
-  <p:cSld>
-    <p:spTree>
-      <p:nvGrpSpPr>
-        <p:cNvPr id="1" name=""/>
-        <p:cNvGrpSpPr/>
-        <p:nvPr/>
-      </p:nvGrpSpPr>
-      <p:grpSpPr>
-        <a:xfrm>
-          <a:off x="0" y="0"/>
-          <a:ext cx="0" cy="0"/>
-          <a:chOff x="0" y="0"/>
-          <a:chExt cx="0" cy="0"/>
-        </a:xfrm>
-      </p:grpSpPr>
-      <p:sp>
-        <p:nvSpPr>
-          <p:cNvPr id="2" name="Slide Image Placeholder 1"/>
-          <p:cNvSpPr>
-            <a:spLocks noGrp="1" noRot="1" noChangeAspect="1"/>
-          </p:cNvSpPr>
-          <p:nvPr>
-            <p:ph type="sldImg"/>
-          </p:nvPr>
-        </p:nvSpPr>
-        <p:spPr/>
-      </p:sp>
-      <p:sp>
-        <p:nvSpPr>
-          <p:cNvPr id="3" name="Notes Placeholder 2"/>
-          <p:cNvSpPr>
-            <a:spLocks noGrp="1"/>
-          </p:cNvSpPr>
-          <p:nvPr>
-            <p:ph type="body" idx="1"/>
-          </p:nvPr>
-        </p:nvSpPr>
-        <p:spPr/>
-        <p:txBody>
-          <a:bodyPr/>
-          <a:lstStyle/>
-          <a:p>
-            <a:r>
-              <a:rPr lang="en-US" dirty="0"/>
-              <a:t>SCRIPT: This is your Mac demo. Show: flutter build ipa (already run), Xcode → Organizer → the archive, Distribute App, then App Store Connect with the processed build in TestFlight. Ten minutes, and it is the most concrete answer the room will get all week to "how do we ship iOS from Windows" - the second half of that answer is the Codemagic slide.
-Your ThynkPay story goes here: what got rejected, what fixed it.
-Windows delegates: they cannot run step 4 locally. Their path is Codemagic or a Mac in the team; the repo still carries all iOS config so either works.</a:t>
-            </a:r>
-            <a:endParaRPr lang="en-US" dirty="0"/>
-          </a:p>
-        </p:txBody>
-      </p:sp>
-      <p:sp>
-        <p:nvSpPr>
-          <p:cNvPr id="4" name="Slide Number Placeholder 3"/>
-          <p:cNvSpPr>
-            <a:spLocks noGrp="1"/>
-          </p:cNvSpPr>
-          <p:nvPr>
-            <p:ph type="sldNum" sz="quarter" idx="10"/>
-          </p:nvPr>
-        </p:nvSpPr>
-        <p:spPr/>
-        <p:txBody>
-          <a:bodyPr/>
-          <a:lstStyle/>
-          <a:p>
-            <a:fld id="{F7021451-1387-4CA6-816F-3879F97B5CBC}" type="slidenum">
-              <a:rPr lang="en-US"/>
-              <a:t>31</a:t>
-            </a:fld>
-            <a:endParaRPr lang="en-US"/>
-          </a:p>
-        </p:txBody>
-      </p:sp>
-    </p:spTree>
-    <p:extLst>
-      <p:ext uri="{BB962C8B-B14F-4D97-AF65-F5344CB8AC3E}">
-        <p14:creationId xmlns:p14="http://schemas.microsoft.com/office/powerpoint/2010/main" val="1024086991"/>
-      </p:ext>
-    </p:extLst>
-  </p:cSld>
-  <p:clrMapOvr>
-    <a:masterClrMapping/>
-  </p:clrMapOvr>
-</p:notes>
-</file>
-
-<file path=ppt/notesSlides/notesSlide32.xml><?xml version="1.0" encoding="utf-8"?>
-<p:notes xmlns:a="http://schemas.openxmlformats.org/drawingml/2006/main" xmlns:r="http://schemas.openxmlformats.org/officeDocument/2006/relationships" xmlns:p="http://schemas.openxmlformats.org/presentationml/2006/main">
-  <p:cSld>
-    <p:spTree>
-      <p:nvGrpSpPr>
-        <p:cNvPr id="1" name=""/>
-        <p:cNvGrpSpPr/>
-        <p:nvPr/>
-      </p:nvGrpSpPr>
-      <p:grpSpPr>
-        <a:xfrm>
-          <a:off x="0" y="0"/>
-          <a:ext cx="0" cy="0"/>
-          <a:chOff x="0" y="0"/>
-          <a:chExt cx="0" cy="0"/>
-        </a:xfrm>
-      </p:grpSpPr>
-      <p:sp>
-        <p:nvSpPr>
-          <p:cNvPr id="2" name="Slide Image Placeholder 1"/>
-          <p:cNvSpPr>
-            <a:spLocks noGrp="1" noRot="1" noChangeAspect="1"/>
-          </p:cNvSpPr>
-          <p:nvPr>
-            <p:ph type="sldImg"/>
-          </p:nvPr>
-        </p:nvSpPr>
-        <p:spPr/>
-      </p:sp>
-      <p:sp>
-        <p:nvSpPr>
-          <p:cNvPr id="3" name="Notes Placeholder 2"/>
-          <p:cNvSpPr>
-            <a:spLocks noGrp="1"/>
-          </p:cNvSpPr>
-          <p:nvPr>
-            <p:ph type="body" idx="1"/>
-          </p:nvPr>
-        </p:nvSpPr>
-        <p:spPr/>
-        <p:txBody>
-          <a:bodyPr/>
-          <a:lstStyle/>
-          <a:p>
-            <a:r>
-              <a:rPr lang="en-US" dirty="0"/>
-              <a:t>SCRIPT: Read it top to bottom. subosito/flutter-action installs Flutter with caching; setup-java 17 for Gradle. The keystore comes from a base64 secret, decoded into android/app/ (relative storeFile paths resolve against android/app/ because that is where build.gradle.kts lives); key.properties is written from secrets. Artefacts are the AABs.
-Add a Play upload step later with r0adkll/upload-google-play or fastlane supply - mention, do not build.
-Integration tests in CI need an emulator: reactivecircus/android-emulator-runner (macos or ubuntu with KVM). Appendix E has the snippet.</a:t>
-            </a:r>
-            <a:endParaRPr lang="en-US" dirty="0"/>
-          </a:p>
-        </p:txBody>
-      </p:sp>
-      <p:sp>
-        <p:nvSpPr>
-          <p:cNvPr id="4" name="Slide Number Placeholder 3"/>
-          <p:cNvSpPr>
-            <a:spLocks noGrp="1"/>
-          </p:cNvSpPr>
-          <p:nvPr>
-            <p:ph type="sldNum" sz="quarter" idx="10"/>
-          </p:nvPr>
-        </p:nvSpPr>
-        <p:spPr/>
-        <p:txBody>
-          <a:bodyPr/>
-          <a:lstStyle/>
-          <a:p>
-            <a:fld id="{F7021451-1387-4CA6-816F-3879F97B5CBC}" type="slidenum">
-              <a:rPr lang="en-US"/>
-              <a:t>32</a:t>
-            </a:fld>
-            <a:endParaRPr lang="en-US"/>
-          </a:p>
-        </p:txBody>
-      </p:sp>
-    </p:spTree>
-    <p:extLst>
-      <p:ext uri="{BB962C8B-B14F-4D97-AF65-F5344CB8AC3E}">
-        <p14:creationId xmlns:p14="http://schemas.microsoft.com/office/powerpoint/2010/main" val="1024086991"/>
-      </p:ext>
-    </p:extLst>
-  </p:cSld>
-  <p:clrMapOvr>
-    <a:masterClrMapping/>
-  </p:clrMapOvr>
-</p:notes>
-</file>
-
-<file path=ppt/notesSlides/notesSlide33.xml><?xml version="1.0" encoding="utf-8"?>
-<p:notes xmlns:a="http://schemas.openxmlformats.org/drawingml/2006/main" xmlns:r="http://schemas.openxmlformats.org/officeDocument/2006/relationships" xmlns:p="http://schemas.openxmlformats.org/presentationml/2006/main">
-  <p:cSld>
-    <p:spTree>
-      <p:nvGrpSpPr>
-        <p:cNvPr id="1" name=""/>
-        <p:cNvGrpSpPr/>
-        <p:nvPr/>
-      </p:nvGrpSpPr>
-      <p:grpSpPr>
-        <a:xfrm>
-          <a:off x="0" y="0"/>
-          <a:ext cx="0" cy="0"/>
-          <a:chOff x="0" y="0"/>
-          <a:chExt cx="0" cy="0"/>
-        </a:xfrm>
-      </p:grpSpPr>
-      <p:sp>
-        <p:nvSpPr>
-          <p:cNvPr id="2" name="Slide Image Placeholder 1"/>
-          <p:cNvSpPr>
-            <a:spLocks noGrp="1" noRot="1" noChangeAspect="1"/>
-          </p:cNvSpPr>
-          <p:nvPr>
-            <p:ph type="sldImg"/>
-          </p:nvPr>
-        </p:nvSpPr>
-        <p:spPr/>
-      </p:sp>
-      <p:sp>
-        <p:nvSpPr>
-          <p:cNvPr id="3" name="Notes Placeholder 2"/>
-          <p:cNvSpPr>
-            <a:spLocks noGrp="1"/>
-          </p:cNvSpPr>
-          <p:nvPr>
-            <p:ph type="body" idx="1"/>
-          </p:nvPr>
-        </p:nvSpPr>
-        <p:spPr/>
-        <p:txBody>
-          <a:bodyPr/>
-          <a:lstStyle/>
-          <a:p>
-            <a:r>
-              <a:rPr lang="en-US" dirty="0"/>
-              <a:t>SCRIPT: Read it top to bottom. subosito/flutter-action installs Flutter with caching; setup-java 17 for Gradle. The keystore comes from a base64 secret, decoded into android/app/ (relative storeFile paths resolve against android/app/ because that is where build.gradle.kts lives); key.properties is written from secrets. Artefacts are the AABs.
-Add a Play upload step later with r0adkll/upload-google-play or fastlane supply - mention, do not build.
-Integration tests in CI need an emulator: reactivecircus/android-emulator-runner (macos or ubuntu with KVM). Appendix E has the snippet.</a:t>
-            </a:r>
-            <a:endParaRPr lang="en-US" dirty="0"/>
-          </a:p>
-        </p:txBody>
-      </p:sp>
-      <p:sp>
-        <p:nvSpPr>
-          <p:cNvPr id="4" name="Slide Number Placeholder 3"/>
-          <p:cNvSpPr>
-            <a:spLocks noGrp="1"/>
-          </p:cNvSpPr>
-          <p:nvPr>
-            <p:ph type="sldNum" sz="quarter" idx="10"/>
-          </p:nvPr>
-        </p:nvSpPr>
-        <p:spPr/>
-        <p:txBody>
-          <a:bodyPr/>
-          <a:lstStyle/>
-          <a:p>
-            <a:fld id="{F7021451-1387-4CA6-816F-3879F97B5CBC}" type="slidenum">
-              <a:rPr lang="en-US"/>
-              <a:t>33</a:t>
-            </a:fld>
-            <a:endParaRPr lang="en-US"/>
-          </a:p>
-        </p:txBody>
-      </p:sp>
-    </p:spTree>
-    <p:extLst>
-      <p:ext uri="{BB962C8B-B14F-4D97-AF65-F5344CB8AC3E}">
-        <p14:creationId xmlns:p14="http://schemas.microsoft.com/office/powerpoint/2010/main" val="1024086991"/>
-      </p:ext>
-    </p:extLst>
-  </p:cSld>
-  <p:clrMapOvr>
-    <a:masterClrMapping/>
-  </p:clrMapOvr>
-</p:notes>
-</file>
-
-<file path=ppt/notesSlides/notesSlide34.xml><?xml version="1.0" encoding="utf-8"?>
-<p:notes xmlns:a="http://schemas.openxmlformats.org/drawingml/2006/main" xmlns:r="http://schemas.openxmlformats.org/officeDocument/2006/relationships" xmlns:p="http://schemas.openxmlformats.org/presentationml/2006/main">
-  <p:cSld>
-    <p:spTree>
-      <p:nvGrpSpPr>
-        <p:cNvPr id="1" name=""/>
-        <p:cNvGrpSpPr/>
-        <p:nvPr/>
-      </p:nvGrpSpPr>
-      <p:grpSpPr>
-        <a:xfrm>
-          <a:off x="0" y="0"/>
-          <a:ext cx="0" cy="0"/>
-          <a:chOff x="0" y="0"/>
-          <a:chExt cx="0" cy="0"/>
-        </a:xfrm>
-      </p:grpSpPr>
-      <p:sp>
-        <p:nvSpPr>
-          <p:cNvPr id="2" name="Slide Image Placeholder 1"/>
-          <p:cNvSpPr>
-            <a:spLocks noGrp="1" noRot="1" noChangeAspect="1"/>
-          </p:cNvSpPr>
-          <p:nvPr>
-            <p:ph type="sldImg"/>
-          </p:nvPr>
-        </p:nvSpPr>
-        <p:spPr/>
-      </p:sp>
-      <p:sp>
-        <p:nvSpPr>
-          <p:cNvPr id="3" name="Notes Placeholder 2"/>
-          <p:cNvSpPr>
-            <a:spLocks noGrp="1"/>
-          </p:cNvSpPr>
-          <p:nvPr>
-            <p:ph type="body" idx="1"/>
-          </p:nvPr>
-        </p:nvSpPr>
-        <p:spPr/>
-        <p:txBody>
-          <a:bodyPr/>
-          <a:lstStyle/>
-          <a:p>
-            <a:r>
-              <a:rPr lang="en-US" dirty="0"/>
-              <a:t>SCRIPT: Both OS put the base64 on the clipboard; paste into the GitHub secret. Then STORE_PASSWORD and KEY_PASSWORD.
-Say the rotation rule. A senior dev will ask about git-secrets / pre-commit hooks - yes, add one (gitleaks) on the real project.</a:t>
-            </a:r>
-            <a:endParaRPr lang="en-US" dirty="0"/>
-          </a:p>
-        </p:txBody>
-      </p:sp>
-      <p:sp>
-        <p:nvSpPr>
-          <p:cNvPr id="4" name="Slide Number Placeholder 3"/>
-          <p:cNvSpPr>
-            <a:spLocks noGrp="1"/>
-          </p:cNvSpPr>
-          <p:nvPr>
-            <p:ph type="sldNum" sz="quarter" idx="10"/>
-          </p:nvPr>
-        </p:nvSpPr>
-        <p:spPr/>
-        <p:txBody>
-          <a:bodyPr/>
-          <a:lstStyle/>
-          <a:p>
-            <a:fld id="{F7021451-1387-4CA6-816F-3879F97B5CBC}" type="slidenum">
-              <a:rPr lang="en-US"/>
-              <a:t>34</a:t>
-            </a:fld>
-            <a:endParaRPr lang="en-US"/>
-          </a:p>
-        </p:txBody>
-      </p:sp>
-    </p:spTree>
-    <p:extLst>
-      <p:ext uri="{BB962C8B-B14F-4D97-AF65-F5344CB8AC3E}">
-        <p14:creationId xmlns:p14="http://schemas.microsoft.com/office/powerpoint/2010/main" val="1024086991"/>
-      </p:ext>
-    </p:extLst>
-  </p:cSld>
-  <p:clrMapOvr>
-    <a:masterClrMapping/>
-  </p:clrMapOvr>
-</p:notes>
-</file>
-
-<file path=ppt/notesSlides/notesSlide35.xml><?xml version="1.0" encoding="utf-8"?>
-<p:notes xmlns:a="http://schemas.openxmlformats.org/drawingml/2006/main" xmlns:r="http://schemas.openxmlformats.org/officeDocument/2006/relationships" xmlns:p="http://schemas.openxmlformats.org/presentationml/2006/main">
-  <p:cSld>
-    <p:spTree>
-      <p:nvGrpSpPr>
-        <p:cNvPr id="1" name=""/>
-        <p:cNvGrpSpPr/>
-        <p:nvPr/>
-      </p:nvGrpSpPr>
-      <p:grpSpPr>
-        <a:xfrm>
-          <a:off x="0" y="0"/>
-          <a:ext cx="0" cy="0"/>
-          <a:chOff x="0" y="0"/>
-          <a:chExt cx="0" cy="0"/>
-        </a:xfrm>
-      </p:grpSpPr>
-      <p:sp>
-        <p:nvSpPr>
-          <p:cNvPr id="2" name="Slide Image Placeholder 1"/>
-          <p:cNvSpPr>
-            <a:spLocks noGrp="1" noRot="1" noChangeAspect="1"/>
-          </p:cNvSpPr>
-          <p:nvPr>
-            <p:ph type="sldImg"/>
-          </p:nvPr>
-        </p:nvSpPr>
-        <p:spPr/>
-      </p:sp>
-      <p:sp>
-        <p:nvSpPr>
-          <p:cNvPr id="3" name="Notes Placeholder 2"/>
-          <p:cNvSpPr>
-            <a:spLocks noGrp="1"/>
-          </p:cNvSpPr>
-          <p:nvPr>
-            <p:ph type="body" idx="1"/>
-          </p:nvPr>
-        </p:nvSpPr>
-        <p:spPr/>
-        <p:txBody>
-          <a:bodyPr/>
-          <a:lstStyle/>
-          <a:p>
-            <a:r>
-              <a:rPr lang="en-US" dirty="0"/>
-              <a:t>SCRIPT: The answer to the Windows-room question. Codemagic (or GitHub Actions macos runners with fastlane match) builds iOS from Git. One-time setup: an App Store Connect API key stored in Codemagic, the bundle ids registered, and this YAML.
-Show your Codemagic dashboard if you set one up last night; otherwise walk the YAML.
-Free tier has limited macOS minutes; budget it for the client.</a:t>
-            </a:r>
-            <a:endParaRPr lang="en-US" dirty="0"/>
-          </a:p>
-        </p:txBody>
-      </p:sp>
-      <p:sp>
-        <p:nvSpPr>
-          <p:cNvPr id="4" name="Slide Number Placeholder 3"/>
-          <p:cNvSpPr>
-            <a:spLocks noGrp="1"/>
-          </p:cNvSpPr>
-          <p:nvPr>
-            <p:ph type="sldNum" sz="quarter" idx="10"/>
-          </p:nvPr>
-        </p:nvSpPr>
-        <p:spPr/>
-        <p:txBody>
-          <a:bodyPr/>
-          <a:lstStyle/>
-          <a:p>
-            <a:fld id="{F7021451-1387-4CA6-816F-3879F97B5CBC}" type="slidenum">
-              <a:rPr lang="en-US"/>
-              <a:t>35</a:t>
-            </a:fld>
-            <a:endParaRPr lang="en-US"/>
-          </a:p>
-        </p:txBody>
-      </p:sp>
-    </p:spTree>
-    <p:extLst>
-      <p:ext uri="{BB962C8B-B14F-4D97-AF65-F5344CB8AC3E}">
-        <p14:creationId xmlns:p14="http://schemas.microsoft.com/office/powerpoint/2010/main" val="1024086991"/>
-      </p:ext>
-    </p:extLst>
-  </p:cSld>
-  <p:clrMapOvr>
-    <a:masterClrMapping/>
-  </p:clrMapOvr>
-</p:notes>
-</file>
-
-<file path=ppt/notesSlides/notesSlide36.xml><?xml version="1.0" encoding="utf-8"?>
-<p:notes xmlns:a="http://schemas.openxmlformats.org/drawingml/2006/main" xmlns:r="http://schemas.openxmlformats.org/officeDocument/2006/relationships" xmlns:p="http://schemas.openxmlformats.org/presentationml/2006/main">
-  <p:cSld>
-    <p:spTree>
-      <p:nvGrpSpPr>
-        <p:cNvPr id="1" name=""/>
-        <p:cNvGrpSpPr/>
-        <p:nvPr/>
-      </p:nvGrpSpPr>
-      <p:grpSpPr>
-        <a:xfrm>
-          <a:off x="0" y="0"/>
-          <a:ext cx="0" cy="0"/>
-          <a:chOff x="0" y="0"/>
-          <a:chExt cx="0" cy="0"/>
-        </a:xfrm>
-      </p:grpSpPr>
-      <p:sp>
-        <p:nvSpPr>
-          <p:cNvPr id="2" name="Slide Image Placeholder 1"/>
-          <p:cNvSpPr>
-            <a:spLocks noGrp="1" noRot="1" noChangeAspect="1"/>
-          </p:cNvSpPr>
-          <p:nvPr>
-            <p:ph type="sldImg"/>
-          </p:nvPr>
-        </p:nvSpPr>
-        <p:spPr/>
-      </p:sp>
-      <p:sp>
-        <p:nvSpPr>
-          <p:cNvPr id="3" name="Notes Placeholder 2"/>
-          <p:cNvSpPr>
-            <a:spLocks noGrp="1"/>
-          </p:cNvSpPr>
-          <p:nvPr>
-            <p:ph type="body" idx="1"/>
-          </p:nvPr>
-        </p:nvSpPr>
-        <p:spPr/>
-        <p:txBody>
-          <a:bodyPr/>
-          <a:lstStyle/>
-          <a:p>
-            <a:r>
-              <a:rPr lang="en-US" dirty="0"/>
-              <a:t>SCRIPT: The answer to the Windows-room question. Codemagic (or GitHub Actions macos runners with fastlane match) builds iOS from Git. One-time setup: an App Store Connect API key stored in Codemagic, the bundle ids registered, and this YAML.
-Show your Codemagic dashboard if you set one up last night; otherwise walk the YAML.
-Free tier has limited macOS minutes; budget it for the client.</a:t>
-            </a:r>
-            <a:endParaRPr lang="en-US" dirty="0"/>
-          </a:p>
-        </p:txBody>
-      </p:sp>
-      <p:sp>
-        <p:nvSpPr>
-          <p:cNvPr id="4" name="Slide Number Placeholder 3"/>
-          <p:cNvSpPr>
-            <a:spLocks noGrp="1"/>
-          </p:cNvSpPr>
-          <p:nvPr>
-            <p:ph type="sldNum" sz="quarter" idx="10"/>
-          </p:nvPr>
-        </p:nvSpPr>
-        <p:spPr/>
-        <p:txBody>
-          <a:bodyPr/>
-          <a:lstStyle/>
-          <a:p>
-            <a:fld id="{F7021451-1387-4CA6-816F-3879F97B5CBC}" type="slidenum">
-              <a:rPr lang="en-US"/>
-              <a:t>36</a:t>
-            </a:fld>
-            <a:endParaRPr lang="en-US"/>
-          </a:p>
-        </p:txBody>
-      </p:sp>
-    </p:spTree>
-    <p:extLst>
-      <p:ext uri="{BB962C8B-B14F-4D97-AF65-F5344CB8AC3E}">
-        <p14:creationId xmlns:p14="http://schemas.microsoft.com/office/powerpoint/2010/main" val="1024086991"/>
-      </p:ext>
-    </p:extLst>
-  </p:cSld>
-  <p:clrMapOvr>
-    <a:masterClrMapping/>
-  </p:clrMapOvr>
-</p:notes>
-</file>
-
-<file path=ppt/notesSlides/notesSlide37.xml><?xml version="1.0" encoding="utf-8"?>
-<p:notes xmlns:a="http://schemas.openxmlformats.org/drawingml/2006/main" xmlns:r="http://schemas.openxmlformats.org/officeDocument/2006/relationships" xmlns:p="http://schemas.openxmlformats.org/presentationml/2006/main">
-  <p:cSld>
-    <p:spTree>
-      <p:nvGrpSpPr>
-        <p:cNvPr id="1" name=""/>
-        <p:cNvGrpSpPr/>
-        <p:nvPr/>
-      </p:nvGrpSpPr>
-      <p:grpSpPr>
-        <a:xfrm>
-          <a:off x="0" y="0"/>
-          <a:ext cx="0" cy="0"/>
-          <a:chOff x="0" y="0"/>
-          <a:chExt cx="0" cy="0"/>
-        </a:xfrm>
-      </p:grpSpPr>
-      <p:sp>
-        <p:nvSpPr>
-          <p:cNvPr id="2" name="Slide Image Placeholder 1"/>
-          <p:cNvSpPr>
-            <a:spLocks noGrp="1" noRot="1" noChangeAspect="1"/>
-          </p:cNvSpPr>
-          <p:nvPr>
-            <p:ph type="sldImg"/>
-          </p:nvPr>
-        </p:nvSpPr>
-        <p:spPr/>
-      </p:sp>
-      <p:sp>
-        <p:nvSpPr>
-          <p:cNvPr id="3" name="Notes Placeholder 2"/>
-          <p:cNvSpPr>
-            <a:spLocks noGrp="1"/>
-          </p:cNvSpPr>
-          <p:nvPr>
-            <p:ph type="body" idx="1"/>
-          </p:nvPr>
-        </p:nvSpPr>
-        <p:spPr/>
-        <p:txBody>
-          <a:bodyPr/>
-          <a:lstStyle/>
-          <a:p>
-            <a:r>
-              <a:rPr lang="en-US" dirty="0"/>
-              <a:t>RUN THE LAB: 45 min. The keystore + Gradle edit is where it breaks; keep Appendix D (Groovy) and the KTS slide on the second display.
-COMMON ERRORS: "Keystore file not found" → storeFile path wrong (Windows: double backslashes or forward slashes). "key.properties not found" in CI → the write step failed (heredoc indentation). Gradle "signingConfig release not found" → block placed outside android {}. GitHub Actions Java error → setup-java missing. "flutter: command not found" in CI → flutter-action step missing or wrong order.
-NO GITHUB ACCOUNT / NETWORK: do steps 1-3 only and pair with someone who has one for 4-6.
-SOLUTION: Appendix D/E, branch lab-5-3-solution (workflow file included; secrets obviously not).</a:t>
-            </a:r>
-            <a:endParaRPr lang="en-US" dirty="0"/>
-          </a:p>
-        </p:txBody>
-      </p:sp>
-      <p:sp>
-        <p:nvSpPr>
-          <p:cNvPr id="4" name="Slide Number Placeholder 3"/>
-          <p:cNvSpPr>
-            <a:spLocks noGrp="1"/>
-          </p:cNvSpPr>
-          <p:nvPr>
-            <p:ph type="sldNum" sz="quarter" idx="10"/>
-          </p:nvPr>
-        </p:nvSpPr>
-        <p:spPr/>
-        <p:txBody>
-          <a:bodyPr/>
-          <a:lstStyle/>
-          <a:p>
-            <a:fld id="{F7021451-1387-4CA6-816F-3879F97B5CBC}" type="slidenum">
-              <a:rPr lang="en-US"/>
-              <a:t>37</a:t>
-            </a:fld>
-            <a:endParaRPr lang="en-US"/>
-          </a:p>
-        </p:txBody>
-      </p:sp>
-    </p:spTree>
-    <p:extLst>
-      <p:ext uri="{BB962C8B-B14F-4D97-AF65-F5344CB8AC3E}">
-        <p14:creationId xmlns:p14="http://schemas.microsoft.com/office/powerpoint/2010/main" val="1024086991"/>
-      </p:ext>
-    </p:extLst>
-  </p:cSld>
-  <p:clrMapOvr>
-    <a:masterClrMapping/>
-  </p:clrMapOvr>
-</p:notes>
-</file>
-
-<file path=ppt/notesSlides/notesSlide38.xml><?xml version="1.0" encoding="utf-8"?>
-<p:notes xmlns:a="http://schemas.openxmlformats.org/drawingml/2006/main" xmlns:r="http://schemas.openxmlformats.org/officeDocument/2006/relationships" xmlns:p="http://schemas.openxmlformats.org/presentationml/2006/main">
-  <p:cSld>
-    <p:spTree>
-      <p:nvGrpSpPr>
-        <p:cNvPr id="1" name=""/>
-        <p:cNvGrpSpPr/>
-        <p:nvPr/>
-      </p:nvGrpSpPr>
-      <p:grpSpPr>
-        <a:xfrm>
-          <a:off x="0" y="0"/>
-          <a:ext cx="0" cy="0"/>
-          <a:chOff x="0" y="0"/>
-          <a:chExt cx="0" cy="0"/>
-        </a:xfrm>
-      </p:grpSpPr>
-      <p:sp>
-        <p:nvSpPr>
-          <p:cNvPr id="2" name="Slide Image Placeholder 1"/>
-          <p:cNvSpPr>
-            <a:spLocks noGrp="1" noRot="1" noChangeAspect="1"/>
-          </p:cNvSpPr>
-          <p:nvPr>
-            <p:ph type="sldImg"/>
-          </p:nvPr>
-        </p:nvSpPr>
-        <p:spPr/>
-      </p:sp>
-      <p:sp>
-        <p:nvSpPr>
-          <p:cNvPr id="3" name="Notes Placeholder 2"/>
-          <p:cNvSpPr>
-            <a:spLocks noGrp="1"/>
-          </p:cNvSpPr>
-          <p:nvPr>
-            <p:ph type="body" idx="1"/>
-          </p:nvPr>
-        </p:nvSpPr>
-        <p:spPr/>
-        <p:txBody>
-          <a:bodyPr/>
-          <a:lstStyle/>
-          <a:p>
-            <a:r>
-              <a:rPr lang="en-US" dirty="0"/>
-              <a:t>SCRIPT: Fifteen minutes of practices, then the room's project on the whiteboard for the rest. This is the hour they will remember.</a:t>
-            </a:r>
-            <a:endParaRPr lang="en-US" dirty="0"/>
-          </a:p>
-        </p:txBody>
-      </p:sp>
-      <p:sp>
-        <p:nvSpPr>
-          <p:cNvPr id="4" name="Slide Number Placeholder 3"/>
-          <p:cNvSpPr>
-            <a:spLocks noGrp="1"/>
-          </p:cNvSpPr>
-          <p:nvPr>
-            <p:ph type="sldNum" sz="quarter" idx="10"/>
-          </p:nvPr>
-        </p:nvSpPr>
-        <p:spPr/>
-        <p:txBody>
-          <a:bodyPr/>
-          <a:lstStyle/>
-          <a:p>
-            <a:fld id="{F7021451-1387-4CA6-816F-3879F97B5CBC}" type="slidenum">
-              <a:rPr lang="en-US"/>
-              <a:t>38</a:t>
-            </a:fld>
-            <a:endParaRPr lang="en-US"/>
-          </a:p>
-        </p:txBody>
-      </p:sp>
-    </p:spTree>
-    <p:extLst>
-      <p:ext uri="{BB962C8B-B14F-4D97-AF65-F5344CB8AC3E}">
-        <p14:creationId xmlns:p14="http://schemas.microsoft.com/office/powerpoint/2010/main" val="1024086991"/>
-      </p:ext>
-    </p:extLst>
-  </p:cSld>
-  <p:clrMapOvr>
-    <a:masterClrMapping/>
-  </p:clrMapOvr>
-</p:notes>
-</file>
-
-<file path=ppt/notesSlides/notesSlide39.xml><?xml version="1.0" encoding="utf-8"?>
-<p:notes xmlns:a="http://schemas.openxmlformats.org/drawingml/2006/main" xmlns:r="http://schemas.openxmlformats.org/officeDocument/2006/relationships" xmlns:p="http://schemas.openxmlformats.org/presentationml/2006/main">
-  <p:cSld>
-    <p:spTree>
-      <p:nvGrpSpPr>
-        <p:cNvPr id="1" name=""/>
-        <p:cNvGrpSpPr/>
-        <p:nvPr/>
-      </p:nvGrpSpPr>
-      <p:grpSpPr>
-        <a:xfrm>
-          <a:off x="0" y="0"/>
-          <a:ext cx="0" cy="0"/>
-          <a:chOff x="0" y="0"/>
-          <a:chExt cx="0" cy="0"/>
-        </a:xfrm>
-      </p:grpSpPr>
-      <p:sp>
-        <p:nvSpPr>
-          <p:cNvPr id="2" name="Slide Image Placeholder 1"/>
-          <p:cNvSpPr>
-            <a:spLocks noGrp="1" noRot="1" noChangeAspect="1"/>
-          </p:cNvSpPr>
-          <p:nvPr>
-            <p:ph type="sldImg"/>
-          </p:nvPr>
-        </p:nvSpPr>
-        <p:spPr/>
-      </p:sp>
-      <p:sp>
-        <p:nvSpPr>
-          <p:cNvPr id="3" name="Notes Placeholder 2"/>
-          <p:cNvSpPr>
-            <a:spLocks noGrp="1"/>
-          </p:cNvSpPr>
-          <p:nvPr>
-            <p:ph type="body" idx="1"/>
-          </p:nvPr>
-        </p:nvSpPr>
-        <p:spPr/>
-        <p:txBody>
-          <a:bodyPr/>
-          <a:lstStyle/>
-          <a:p>
-            <a:r>
-              <a:rPr lang="en-US" dirty="0"/>
-              <a:t>SCRIPT: Four checks: every icon-only control has a tooltip/label; every image has a semanticLabel or is excluded; the form survives 200% text scaling (SingleChildScrollView, no fixed heights); brand seeds pass contrast (check primaryContainer/onPrimaryContainer for both brands).
-DEMO: DevTools → "Show semantics" overlay on the capture screen; then set the emulator font size to largest (Settings → Display → Font size) and scroll the form.
-TalkBack via adb: the command on the slide turns it on; turn it off with the same command and value "" or from Settings, or the emulator becomes hard to drive.</a:t>
-            </a:r>
-            <a:endParaRPr lang="en-US" dirty="0"/>
-          </a:p>
-        </p:txBody>
-      </p:sp>
-      <p:sp>
-        <p:nvSpPr>
-          <p:cNvPr id="4" name="Slide Number Placeholder 3"/>
-          <p:cNvSpPr>
-            <a:spLocks noGrp="1"/>
-          </p:cNvSpPr>
-          <p:nvPr>
-            <p:ph type="sldNum" sz="quarter" idx="10"/>
-          </p:nvPr>
-        </p:nvSpPr>
-        <p:spPr/>
-        <p:txBody>
-          <a:bodyPr/>
-          <a:lstStyle/>
-          <a:p>
-            <a:fld id="{F7021451-1387-4CA6-816F-3879F97B5CBC}" type="slidenum">
-              <a:rPr lang="en-US"/>
-              <a:t>39</a:t>
-            </a:fld>
-            <a:endParaRPr lang="en-US"/>
-          </a:p>
-        </p:txBody>
-      </p:sp>
-    </p:spTree>
-    <p:extLst>
-      <p:ext uri="{BB962C8B-B14F-4D97-AF65-F5344CB8AC3E}">
-        <p14:creationId xmlns:p14="http://schemas.microsoft.com/office/powerpoint/2010/main" val="1024086991"/>
-      </p:ext>
-    </p:extLst>
-  </p:cSld>
-  <p:clrMapOvr>
-    <a:masterClrMapping/>
-  </p:clrMapOvr>
-</p:notes>
-</file>
-
-<file path=ppt/notesSlides/notesSlide4.xml><?xml version="1.0" encoding="utf-8"?>
-<p:notes xmlns:a="http://schemas.openxmlformats.org/drawingml/2006/main" xmlns:r="http://schemas.openxmlformats.org/officeDocument/2006/relationships" xmlns:p="http://schemas.openxmlformats.org/presentationml/2006/main">
-  <p:cSld>
-    <p:spTree>
-      <p:nvGrpSpPr>
-        <p:cNvPr id="1" name=""/>
-        <p:cNvGrpSpPr/>
-        <p:nvPr/>
-      </p:nvGrpSpPr>
-      <p:grpSpPr>
-        <a:xfrm>
-          <a:off x="0" y="0"/>
-          <a:ext cx="0" cy="0"/>
-          <a:chOff x="0" y="0"/>
-          <a:chExt cx="0" cy="0"/>
-        </a:xfrm>
-      </p:grpSpPr>
-      <p:sp>
-        <p:nvSpPr>
-          <p:cNvPr id="2" name="Slide Image Placeholder 1"/>
-          <p:cNvSpPr>
-            <a:spLocks noGrp="1" noRot="1" noChangeAspect="1"/>
-          </p:cNvSpPr>
-          <p:nvPr>
-            <p:ph type="sldImg"/>
-          </p:nvPr>
-        </p:nvSpPr>
-        <p:spPr/>
-      </p:sp>
-      <p:sp>
-        <p:nvSpPr>
-          <p:cNvPr id="3" name="Notes Placeholder 2"/>
-          <p:cNvSpPr>
-            <a:spLocks noGrp="1"/>
-          </p:cNvSpPr>
-          <p:nvPr>
-            <p:ph type="body" idx="1"/>
-          </p:nvPr>
-        </p:nvSpPr>
-        <p:spPr/>
-        <p:txBody>
-          <a:bodyPr/>
-          <a:lstStyle/>
-          <a:p>
-            <a:r>
-              <a:rPr lang="en-US" dirty="0"/>
-              <a:t>SCRIPT: Survey average 2.8, wide spread. Keep it practical: three files, three commands, one rule about layers.</a:t>
-            </a:r>
-            <a:endParaRPr lang="en-US" dirty="0"/>
-          </a:p>
-        </p:txBody>
-      </p:sp>
-      <p:sp>
-        <p:nvSpPr>
-          <p:cNvPr id="4" name="Slide Number Placeholder 3"/>
-          <p:cNvSpPr>
-            <a:spLocks noGrp="1"/>
-          </p:cNvSpPr>
-          <p:nvPr>
-            <p:ph type="sldNum" sz="quarter" idx="10"/>
-          </p:nvPr>
-        </p:nvSpPr>
-        <p:spPr/>
-        <p:txBody>
-          <a:bodyPr/>
-          <a:lstStyle/>
-          <a:p>
-            <a:fld id="{F7021451-1387-4CA6-816F-3879F97B5CBC}" type="slidenum">
-              <a:rPr lang="en-US"/>
-              <a:t>4</a:t>
-            </a:fld>
-            <a:endParaRPr lang="en-US"/>
-          </a:p>
-        </p:txBody>
-      </p:sp>
-    </p:spTree>
-    <p:extLst>
-      <p:ext uri="{BB962C8B-B14F-4D97-AF65-F5344CB8AC3E}">
-        <p14:creationId xmlns:p14="http://schemas.microsoft.com/office/powerpoint/2010/main" val="1024086991"/>
-      </p:ext>
-    </p:extLst>
-  </p:cSld>
-  <p:clrMapOvr>
-    <a:masterClrMapping/>
-  </p:clrMapOvr>
-</p:notes>
-</file>
-
-<file path=ppt/notesSlides/notesSlide40.xml><?xml version="1.0" encoding="utf-8"?>
-<p:notes xmlns:a="http://schemas.openxmlformats.org/drawingml/2006/main" xmlns:r="http://schemas.openxmlformats.org/officeDocument/2006/relationships" xmlns:p="http://schemas.openxmlformats.org/presentationml/2006/main">
-  <p:cSld>
-    <p:spTree>
-      <p:nvGrpSpPr>
-        <p:cNvPr id="1" name=""/>
-        <p:cNvGrpSpPr/>
-        <p:nvPr/>
-      </p:nvGrpSpPr>
-      <p:grpSpPr>
-        <a:xfrm>
-          <a:off x="0" y="0"/>
-          <a:ext cx="0" cy="0"/>
-          <a:chOff x="0" y="0"/>
-          <a:chExt cx="0" cy="0"/>
-        </a:xfrm>
-      </p:grpSpPr>
-      <p:sp>
-        <p:nvSpPr>
-          <p:cNvPr id="2" name="Slide Image Placeholder 1"/>
-          <p:cNvSpPr>
-            <a:spLocks noGrp="1" noRot="1" noChangeAspect="1"/>
-          </p:cNvSpPr>
-          <p:nvPr>
-            <p:ph type="sldImg"/>
-          </p:nvPr>
-        </p:nvSpPr>
-        <p:spPr/>
-      </p:sp>
-      <p:sp>
-        <p:nvSpPr>
-          <p:cNvPr id="3" name="Notes Placeholder 2"/>
-          <p:cNvSpPr>
-            <a:spLocks noGrp="1"/>
-          </p:cNvSpPr>
-          <p:nvPr>
-            <p:ph type="body" idx="1"/>
-          </p:nvPr>
-        </p:nvSpPr>
-        <p:spPr/>
-        <p:txBody>
-          <a:bodyPr/>
-          <a:lstStyle/>
-          <a:p>
-            <a:r>
-              <a:rPr lang="en-US" dirty="0"/>
-              <a:t>SCRIPT: Turn these on in week one of the real project, not week ten; retrofitting lints on a large codebase is painful. dart fix --apply handles most of the mechanical ones.
-custom_lint runs as a separate command: dart run custom_lint. Add it to CI after flutter analyze.
-require_trailing_commas: makes dart format produce readable widget trees - the single most useful style lint for Flutter.</a:t>
-            </a:r>
-            <a:endParaRPr lang="en-US" dirty="0"/>
-          </a:p>
-        </p:txBody>
-      </p:sp>
-      <p:sp>
-        <p:nvSpPr>
-          <p:cNvPr id="4" name="Slide Number Placeholder 3"/>
-          <p:cNvSpPr>
-            <a:spLocks noGrp="1"/>
-          </p:cNvSpPr>
-          <p:nvPr>
-            <p:ph type="sldNum" sz="quarter" idx="10"/>
-          </p:nvPr>
-        </p:nvSpPr>
-        <p:spPr/>
-        <p:txBody>
-          <a:bodyPr/>
-          <a:lstStyle/>
-          <a:p>
-            <a:fld id="{F7021451-1387-4CA6-816F-3879F97B5CBC}" type="slidenum">
-              <a:rPr lang="en-US"/>
-              <a:t>40</a:t>
-            </a:fld>
-            <a:endParaRPr lang="en-US"/>
-          </a:p>
-        </p:txBody>
-      </p:sp>
-    </p:spTree>
-    <p:extLst>
-      <p:ext uri="{BB962C8B-B14F-4D97-AF65-F5344CB8AC3E}">
-        <p14:creationId xmlns:p14="http://schemas.microsoft.com/office/powerpoint/2010/main" val="1024086991"/>
-      </p:ext>
-    </p:extLst>
-  </p:cSld>
-  <p:clrMapOvr>
-    <a:masterClrMapping/>
-  </p:clrMapOvr>
-</p:notes>
-</file>
-
-<file path=ppt/notesSlides/notesSlide41.xml><?xml version="1.0" encoding="utf-8"?>
-<p:notes xmlns:a="http://schemas.openxmlformats.org/drawingml/2006/main" xmlns:r="http://schemas.openxmlformats.org/officeDocument/2006/relationships" xmlns:p="http://schemas.openxmlformats.org/presentationml/2006/main">
-  <p:cSld>
-    <p:spTree>
-      <p:nvGrpSpPr>
-        <p:cNvPr id="1" name=""/>
-        <p:cNvGrpSpPr/>
-        <p:nvPr/>
-      </p:nvGrpSpPr>
-      <p:grpSpPr>
-        <a:xfrm>
-          <a:off x="0" y="0"/>
-          <a:ext cx="0" cy="0"/>
-          <a:chOff x="0" y="0"/>
-          <a:chExt cx="0" cy="0"/>
-        </a:xfrm>
-      </p:grpSpPr>
-      <p:sp>
-        <p:nvSpPr>
-          <p:cNvPr id="2" name="Slide Image Placeholder 1"/>
-          <p:cNvSpPr>
-            <a:spLocks noGrp="1" noRot="1" noChangeAspect="1"/>
-          </p:cNvSpPr>
-          <p:nvPr>
-            <p:ph type="sldImg"/>
-          </p:nvPr>
-        </p:nvSpPr>
-        <p:spPr/>
-      </p:sp>
-      <p:sp>
-        <p:nvSpPr>
-          <p:cNvPr id="3" name="Notes Placeholder 2"/>
-          <p:cNvSpPr>
-            <a:spLocks noGrp="1"/>
-          </p:cNvSpPr>
-          <p:nvPr>
-            <p:ph type="body" idx="1"/>
-          </p:nvPr>
-        </p:nvSpPr>
-        <p:spPr/>
-        <p:txBody>
-          <a:bodyPr/>
-          <a:lstStyle/>
-          <a:p>
-            <a:r>
-              <a:rPr lang="en-US" dirty="0"/>
-              <a:t>SCRIPT: Ten lines, thirty seconds each. Demo item 3 if time: DevTools → Inspector → Track widget rebuilds while toggling brand; show the count on the header vs the whole tree before/after select.
-Item 8 answers the "is Flutter smooth on low-end Android" question: Impeller removed shader-compile jank; a Go device with 2 GB RAM still needs item 4-6 discipline.</a:t>
-            </a:r>
-            <a:endParaRPr lang="en-US" dirty="0"/>
-          </a:p>
-        </p:txBody>
-      </p:sp>
-      <p:sp>
-        <p:nvSpPr>
-          <p:cNvPr id="4" name="Slide Number Placeholder 3"/>
-          <p:cNvSpPr>
-            <a:spLocks noGrp="1"/>
-          </p:cNvSpPr>
-          <p:nvPr>
-            <p:ph type="sldNum" sz="quarter" idx="10"/>
-          </p:nvPr>
-        </p:nvSpPr>
-        <p:spPr/>
-        <p:txBody>
-          <a:bodyPr/>
-          <a:lstStyle/>
-          <a:p>
-            <a:fld id="{F7021451-1387-4CA6-816F-3879F97B5CBC}" type="slidenum">
-              <a:rPr lang="en-US"/>
-              <a:t>41</a:t>
-            </a:fld>
-            <a:endParaRPr lang="en-US"/>
-          </a:p>
-        </p:txBody>
-      </p:sp>
-    </p:spTree>
-    <p:extLst>
-      <p:ext uri="{BB962C8B-B14F-4D97-AF65-F5344CB8AC3E}">
-        <p14:creationId xmlns:p14="http://schemas.microsoft.com/office/powerpoint/2010/main" val="1024086991"/>
-      </p:ext>
-    </p:extLst>
-  </p:cSld>
-  <p:clrMapOvr>
-    <a:masterClrMapping/>
-  </p:clrMapOvr>
-</p:notes>
-</file>
-
-<file path=ppt/notesSlides/notesSlide42.xml><?xml version="1.0" encoding="utf-8"?>
-<p:notes xmlns:a="http://schemas.openxmlformats.org/drawingml/2006/main" xmlns:r="http://schemas.openxmlformats.org/officeDocument/2006/relationships" xmlns:p="http://schemas.openxmlformats.org/presentationml/2006/main">
-  <p:cSld>
-    <p:spTree>
-      <p:nvGrpSpPr>
-        <p:cNvPr id="1" name=""/>
-        <p:cNvGrpSpPr/>
-        <p:nvPr/>
-      </p:nvGrpSpPr>
-      <p:grpSpPr>
-        <a:xfrm>
-          <a:off x="0" y="0"/>
-          <a:ext cx="0" cy="0"/>
-          <a:chOff x="0" y="0"/>
-          <a:chExt cx="0" cy="0"/>
-        </a:xfrm>
-      </p:grpSpPr>
-      <p:sp>
-        <p:nvSpPr>
-          <p:cNvPr id="2" name="Slide Image Placeholder 1"/>
-          <p:cNvSpPr>
-            <a:spLocks noGrp="1" noRot="1" noChangeAspect="1"/>
-          </p:cNvSpPr>
-          <p:nvPr>
-            <p:ph type="sldImg"/>
-          </p:nvPr>
-        </p:nvSpPr>
-        <p:spPr/>
-      </p:sp>
-      <p:sp>
-        <p:nvSpPr>
-          <p:cNvPr id="3" name="Notes Placeholder 2"/>
-          <p:cNvSpPr>
-            <a:spLocks noGrp="1"/>
-          </p:cNvSpPr>
-          <p:nvPr>
-            <p:ph type="body" idx="1"/>
-          </p:nvPr>
-        </p:nvSpPr>
-        <p:spPr/>
-        <p:txBody>
-          <a:bodyPr/>
-          <a:lstStyle/>
-          <a:p>
-            <a:r>
-              <a:rPr lang="en-US" dirty="0"/>
-              <a:t>SCRIPT: This is the course repo at lab-5-3-solution. Recommend they clone it as the template for the insurance app: rename the package (change_app_package_name package or manual), delete the quote feature, keep core and the pipeline.
-The domain/ rule (no Flutter imports) is the one that keeps pricing logic testable in plain Dart forever.</a:t>
-            </a:r>
-            <a:endParaRPr lang="en-US" dirty="0"/>
-          </a:p>
-        </p:txBody>
-      </p:sp>
-      <p:sp>
-        <p:nvSpPr>
-          <p:cNvPr id="4" name="Slide Number Placeholder 3"/>
-          <p:cNvSpPr>
-            <a:spLocks noGrp="1"/>
-          </p:cNvSpPr>
-          <p:nvPr>
-            <p:ph type="sldNum" sz="quarter" idx="10"/>
-          </p:nvPr>
-        </p:nvSpPr>
-        <p:spPr/>
-        <p:txBody>
-          <a:bodyPr/>
-          <a:lstStyle/>
-          <a:p>
-            <a:fld id="{F7021451-1387-4CA6-816F-3879F97B5CBC}" type="slidenum">
-              <a:rPr lang="en-US"/>
-              <a:t>42</a:t>
-            </a:fld>
-            <a:endParaRPr lang="en-US"/>
-          </a:p>
-        </p:txBody>
-      </p:sp>
-    </p:spTree>
-    <p:extLst>
-      <p:ext uri="{BB962C8B-B14F-4D97-AF65-F5344CB8AC3E}">
-        <p14:creationId xmlns:p14="http://schemas.microsoft.com/office/powerpoint/2010/main" val="1024086991"/>
-      </p:ext>
-    </p:extLst>
-  </p:cSld>
-  <p:clrMapOvr>
-    <a:masterClrMapping/>
-  </p:clrMapOvr>
-</p:notes>
-</file>
-
-<file path=ppt/notesSlides/notesSlide43.xml><?xml version="1.0" encoding="utf-8"?>
-<p:notes xmlns:a="http://schemas.openxmlformats.org/drawingml/2006/main" xmlns:r="http://schemas.openxmlformats.org/officeDocument/2006/relationships" xmlns:p="http://schemas.openxmlformats.org/presentationml/2006/main">
-  <p:cSld>
-    <p:spTree>
-      <p:nvGrpSpPr>
-        <p:cNvPr id="1" name=""/>
-        <p:cNvGrpSpPr/>
-        <p:nvPr/>
-      </p:nvGrpSpPr>
-      <p:grpSpPr>
-        <a:xfrm>
-          <a:off x="0" y="0"/>
-          <a:ext cx="0" cy="0"/>
-          <a:chOff x="0" y="0"/>
-          <a:chExt cx="0" cy="0"/>
-        </a:xfrm>
-      </p:grpSpPr>
-      <p:sp>
-        <p:nvSpPr>
-          <p:cNvPr id="2" name="Slide Image Placeholder 1"/>
-          <p:cNvSpPr>
-            <a:spLocks noGrp="1" noRot="1" noChangeAspect="1"/>
-          </p:cNvSpPr>
-          <p:nvPr>
-            <p:ph type="sldImg"/>
-          </p:nvPr>
-        </p:nvSpPr>
-        <p:spPr/>
-      </p:sp>
-      <p:sp>
-        <p:nvSpPr>
-          <p:cNvPr id="3" name="Notes Placeholder 2"/>
-          <p:cNvSpPr>
-            <a:spLocks noGrp="1"/>
-          </p:cNvSpPr>
-          <p:nvPr>
-            <p:ph type="body" idx="1"/>
-          </p:nvPr>
-        </p:nvSpPr>
-        <p:spPr/>
-        <p:txBody>
-          <a:bodyPr/>
-          <a:lstStyle/>
-          <a:p>
-            <a:r>
-              <a:rPr lang="en-US" dirty="0"/>
-              <a:t>SCRIPT: Read the ten pairs quickly; each is a slide from this week. Ask the room which one they broke most often. It is usually "watch in build, read in callbacks" or the mounted check.</a:t>
-            </a:r>
-            <a:endParaRPr lang="en-US" dirty="0"/>
-          </a:p>
-        </p:txBody>
-      </p:sp>
-      <p:sp>
-        <p:nvSpPr>
-          <p:cNvPr id="4" name="Slide Number Placeholder 3"/>
-          <p:cNvSpPr>
-            <a:spLocks noGrp="1"/>
-          </p:cNvSpPr>
-          <p:nvPr>
-            <p:ph type="sldNum" sz="quarter" idx="10"/>
-          </p:nvPr>
-        </p:nvSpPr>
-        <p:spPr/>
-        <p:txBody>
-          <a:bodyPr/>
-          <a:lstStyle/>
-          <a:p>
-            <a:fld id="{F7021451-1387-4CA6-816F-3879F97B5CBC}" type="slidenum">
-              <a:rPr lang="en-US"/>
-              <a:t>43</a:t>
-            </a:fld>
-            <a:endParaRPr lang="en-US"/>
-          </a:p>
-        </p:txBody>
-      </p:sp>
-    </p:spTree>
-    <p:extLst>
-      <p:ext uri="{BB962C8B-B14F-4D97-AF65-F5344CB8AC3E}">
-        <p14:creationId xmlns:p14="http://schemas.microsoft.com/office/powerpoint/2010/main" val="1024086991"/>
-      </p:ext>
-    </p:extLst>
-  </p:cSld>
-  <p:clrMapOvr>
-    <a:masterClrMapping/>
-  </p:clrMapOvr>
-</p:notes>
-</file>
-
-<file path=ppt/notesSlides/notesSlide44.xml><?xml version="1.0" encoding="utf-8"?>
-<p:notes xmlns:a="http://schemas.openxmlformats.org/drawingml/2006/main" xmlns:r="http://schemas.openxmlformats.org/officeDocument/2006/relationships" xmlns:p="http://schemas.openxmlformats.org/presentationml/2006/main">
-  <p:cSld>
-    <p:spTree>
-      <p:nvGrpSpPr>
-        <p:cNvPr id="1" name=""/>
-        <p:cNvGrpSpPr/>
-        <p:nvPr/>
-      </p:nvGrpSpPr>
-      <p:grpSpPr>
-        <a:xfrm>
-          <a:off x="0" y="0"/>
-          <a:ext cx="0" cy="0"/>
-          <a:chOff x="0" y="0"/>
-          <a:chExt cx="0" cy="0"/>
-        </a:xfrm>
-      </p:grpSpPr>
-      <p:sp>
-        <p:nvSpPr>
-          <p:cNvPr id="2" name="Slide Image Placeholder 1"/>
-          <p:cNvSpPr>
-            <a:spLocks noGrp="1" noRot="1" noChangeAspect="1"/>
-          </p:cNvSpPr>
-          <p:nvPr>
-            <p:ph type="sldImg"/>
-          </p:nvPr>
-        </p:nvSpPr>
-        <p:spPr/>
-      </p:sp>
-      <p:sp>
-        <p:nvSpPr>
-          <p:cNvPr id="3" name="Notes Placeholder 2"/>
-          <p:cNvSpPr>
-            <a:spLocks noGrp="1"/>
-          </p:cNvSpPr>
-          <p:nvPr>
-            <p:ph type="body" idx="1"/>
-          </p:nvPr>
-        </p:nvSpPr>
-        <p:spPr/>
-        <p:txBody>
-          <a:bodyPr/>
-          <a:lstStyle/>
-          <a:p>
-            <a:r>
-              <a:rPr lang="en-US" dirty="0"/>
-              <a:t>WHY: the client stated accessibility as a requirement; this activity turns a vague requirement into a definition of done the team wrote themselves.
-EXPECTED: Q1 typically: semantic labels on icon buttons/images, text scaling to 200%, contrast 4.5:1, touch targets 48 dp, focus order; test via widget-test semantics matchers, manual TalkBack, DevTools overlay. Q2 expensive work or object creation in build (e.g. building the brands map or formatters each build), missing const. Q3 AnimatedOpacity/FadeTransition or opacity on the child's colour - Opacity forces an offscreen buffer. Q4 open; accept any reasoned answer.</a:t>
-            </a:r>
-            <a:endParaRPr lang="en-US" dirty="0"/>
-          </a:p>
-        </p:txBody>
-      </p:sp>
-      <p:sp>
-        <p:nvSpPr>
-          <p:cNvPr id="4" name="Slide Number Placeholder 3"/>
-          <p:cNvSpPr>
-            <a:spLocks noGrp="1"/>
-          </p:cNvSpPr>
-          <p:nvPr>
-            <p:ph type="sldNum" sz="quarter" idx="10"/>
-          </p:nvPr>
-        </p:nvSpPr>
-        <p:spPr/>
-        <p:txBody>
-          <a:bodyPr/>
-          <a:lstStyle/>
-          <a:p>
-            <a:fld id="{F7021451-1387-4CA6-816F-3879F97B5CBC}" type="slidenum">
-              <a:rPr lang="en-US"/>
-              <a:t>44</a:t>
-            </a:fld>
-            <a:endParaRPr lang="en-US"/>
-          </a:p>
-        </p:txBody>
-      </p:sp>
-    </p:spTree>
-    <p:extLst>
-      <p:ext uri="{BB962C8B-B14F-4D97-AF65-F5344CB8AC3E}">
-        <p14:creationId xmlns:p14="http://schemas.microsoft.com/office/powerpoint/2010/main" val="1024086991"/>
-      </p:ext>
-    </p:extLst>
-  </p:cSld>
-  <p:clrMapOvr>
-    <a:masterClrMapping/>
-  </p:clrMapOvr>
-</p:notes>
-</file>
-
-<file path=ppt/notesSlides/notesSlide45.xml><?xml version="1.0" encoding="utf-8"?>
-<p:notes xmlns:a="http://schemas.openxmlformats.org/drawingml/2006/main" xmlns:r="http://schemas.openxmlformats.org/officeDocument/2006/relationships" xmlns:p="http://schemas.openxmlformats.org/presentationml/2006/main">
-  <p:cSld>
-    <p:spTree>
-      <p:nvGrpSpPr>
-        <p:cNvPr id="1" name=""/>
-        <p:cNvGrpSpPr/>
-        <p:nvPr/>
-      </p:nvGrpSpPr>
-      <p:grpSpPr>
-        <a:xfrm>
-          <a:off x="0" y="0"/>
-          <a:ext cx="0" cy="0"/>
-          <a:chOff x="0" y="0"/>
-          <a:chExt cx="0" cy="0"/>
-        </a:xfrm>
-      </p:grpSpPr>
-      <p:sp>
-        <p:nvSpPr>
-          <p:cNvPr id="2" name="Slide Image Placeholder 1"/>
-          <p:cNvSpPr>
-            <a:spLocks noGrp="1" noRot="1" noChangeAspect="1"/>
-          </p:cNvSpPr>
-          <p:nvPr>
-            <p:ph type="sldImg"/>
-          </p:nvPr>
-        </p:nvSpPr>
-        <p:spPr/>
-      </p:sp>
-      <p:sp>
-        <p:nvSpPr>
-          <p:cNvPr id="3" name="Notes Placeholder 2"/>
-          <p:cNvSpPr>
-            <a:spLocks noGrp="1"/>
-          </p:cNvSpPr>
-          <p:nvPr>
-            <p:ph type="body" idx="1"/>
-          </p:nvPr>
-        </p:nvSpPr>
-        <p:spPr/>
-        <p:txBody>
-          <a:bodyPr/>
-          <a:lstStyle/>
-          <a:p>
-            <a:r>
-              <a:rPr lang="en-US" dirty="0"/>
-              <a:t>SCRIPT: Facilitate, do not lecture. Ten questions; let the two people closest to the project answer; draw the architecture as they talk. Map each answer to something from this week: brands → flavours + BrandTheme; forms → Day 2 + Form.io stretch (Appendix F); audit → ProviderObserver/Bloc; offline → SQLite cache; release → Day 5 pipeline; OTA → Shorebird.
-FORM.IO: Appendix F has the WebView bridge; show it if they ask.
-SHOREBIRD: code push for Dart changes without a store release; allowed by both stores for Dart-only patches; paid beyond the free tier. Mention, do not demo.
-Photograph the whiteboard. Send it with the slides.</a:t>
-            </a:r>
-            <a:endParaRPr lang="en-US" dirty="0"/>
-          </a:p>
-        </p:txBody>
-      </p:sp>
-      <p:sp>
-        <p:nvSpPr>
-          <p:cNvPr id="4" name="Slide Number Placeholder 3"/>
-          <p:cNvSpPr>
-            <a:spLocks noGrp="1"/>
-          </p:cNvSpPr>
-          <p:nvPr>
-            <p:ph type="sldNum" sz="quarter" idx="10"/>
-          </p:nvPr>
-        </p:nvSpPr>
-        <p:spPr/>
-        <p:txBody>
-          <a:bodyPr/>
-          <a:lstStyle/>
-          <a:p>
-            <a:fld id="{F7021451-1387-4CA6-816F-3879F97B5CBC}" type="slidenum">
-              <a:rPr lang="en-US"/>
-              <a:t>45</a:t>
-            </a:fld>
-            <a:endParaRPr lang="en-US"/>
-          </a:p>
-        </p:txBody>
-      </p:sp>
-    </p:spTree>
-    <p:extLst>
-      <p:ext uri="{BB962C8B-B14F-4D97-AF65-F5344CB8AC3E}">
-        <p14:creationId xmlns:p14="http://schemas.microsoft.com/office/powerpoint/2010/main" val="1024086991"/>
-      </p:ext>
-    </p:extLst>
-  </p:cSld>
-  <p:clrMapOvr>
-    <a:masterClrMapping/>
-  </p:clrMapOvr>
-</p:notes>
-</file>
-
-<file path=ppt/notesSlides/notesSlide46.xml><?xml version="1.0" encoding="utf-8"?>
-<p:notes xmlns:a="http://schemas.openxmlformats.org/drawingml/2006/main" xmlns:r="http://schemas.openxmlformats.org/officeDocument/2006/relationships" xmlns:p="http://schemas.openxmlformats.org/presentationml/2006/main">
-  <p:cSld>
-    <p:spTree>
-      <p:nvGrpSpPr>
-        <p:cNvPr id="1" name=""/>
-        <p:cNvGrpSpPr/>
-        <p:nvPr/>
-      </p:nvGrpSpPr>
-      <p:grpSpPr>
-        <a:xfrm>
-          <a:off x="0" y="0"/>
-          <a:ext cx="0" cy="0"/>
-          <a:chOff x="0" y="0"/>
-          <a:chExt cx="0" cy="0"/>
-        </a:xfrm>
-      </p:grpSpPr>
-      <p:sp>
-        <p:nvSpPr>
-          <p:cNvPr id="2" name="Slide Image Placeholder 1"/>
-          <p:cNvSpPr>
-            <a:spLocks noGrp="1" noRot="1" noChangeAspect="1"/>
-          </p:cNvSpPr>
-          <p:nvPr>
-            <p:ph type="sldImg"/>
-          </p:nvPr>
-        </p:nvSpPr>
-        <p:spPr/>
-      </p:sp>
-      <p:sp>
-        <p:nvSpPr>
-          <p:cNvPr id="3" name="Notes Placeholder 2"/>
-          <p:cNvSpPr>
-            <a:spLocks noGrp="1"/>
-          </p:cNvSpPr>
-          <p:nvPr>
-            <p:ph type="body" idx="1"/>
-          </p:nvPr>
-        </p:nvSpPr>
-        <p:spPr/>
-        <p:txBody>
-          <a:bodyPr/>
-          <a:lstStyle/>
-          <a:p>
-            <a:r>
-              <a:rPr lang="en-US" dirty="0"/>
-              <a:t>SCRIPT: Two minutes. Then the feedback form (Metrics That Matter link) and the whiteboard photo sent to everyone.
-PRESENTER: after class, push the final lab-5-3-solution with everything the room changed live; send the repo link, the five decks, the whiteboard photo, and the reading list. Note what to change for the next delivery while it is fresh.</a:t>
-            </a:r>
-            <a:endParaRPr lang="en-US" dirty="0"/>
-          </a:p>
-        </p:txBody>
-      </p:sp>
-      <p:sp>
-        <p:nvSpPr>
-          <p:cNvPr id="4" name="Slide Number Placeholder 3"/>
-          <p:cNvSpPr>
-            <a:spLocks noGrp="1"/>
-          </p:cNvSpPr>
-          <p:nvPr>
-            <p:ph type="sldNum" sz="quarter" idx="10"/>
-          </p:nvPr>
-        </p:nvSpPr>
-        <p:spPr/>
-        <p:txBody>
-          <a:bodyPr/>
-          <a:lstStyle/>
-          <a:p>
-            <a:fld id="{F7021451-1387-4CA6-816F-3879F97B5CBC}" type="slidenum">
-              <a:rPr lang="en-US"/>
-              <a:t>46</a:t>
-            </a:fld>
-            <a:endParaRPr lang="en-US"/>
-          </a:p>
-        </p:txBody>
-      </p:sp>
-    </p:spTree>
-    <p:extLst>
-      <p:ext uri="{BB962C8B-B14F-4D97-AF65-F5344CB8AC3E}">
-        <p14:creationId xmlns:p14="http://schemas.microsoft.com/office/powerpoint/2010/main" val="1024086991"/>
-      </p:ext>
-    </p:extLst>
-  </p:cSld>
-  <p:clrMapOvr>
-    <a:masterClrMapping/>
-  </p:clrMapOvr>
-</p:notes>
-</file>
-
-<file path=ppt/notesSlides/notesSlide47.xml><?xml version="1.0" encoding="utf-8"?>
-<p:notes xmlns:a="http://schemas.openxmlformats.org/drawingml/2006/main" xmlns:r="http://schemas.openxmlformats.org/officeDocument/2006/relationships" xmlns:p="http://schemas.openxmlformats.org/presentationml/2006/main">
-  <p:cSld>
-    <p:spTree>
-      <p:nvGrpSpPr>
-        <p:cNvPr id="1" name=""/>
-        <p:cNvGrpSpPr/>
-        <p:nvPr/>
-      </p:nvGrpSpPr>
-      <p:grpSpPr>
-        <a:xfrm>
-          <a:off x="0" y="0"/>
-          <a:ext cx="0" cy="0"/>
-          <a:chOff x="0" y="0"/>
-          <a:chExt cx="0" cy="0"/>
-        </a:xfrm>
-      </p:grpSpPr>
-      <p:sp>
-        <p:nvSpPr>
-          <p:cNvPr id="2" name="Slide Image Placeholder 1"/>
-          <p:cNvSpPr>
-            <a:spLocks noGrp="1" noRot="1" noChangeAspect="1"/>
-          </p:cNvSpPr>
-          <p:nvPr>
-            <p:ph type="sldImg"/>
-          </p:nvPr>
-        </p:nvSpPr>
-        <p:spPr/>
-      </p:sp>
-      <p:sp>
-        <p:nvSpPr>
-          <p:cNvPr id="3" name="Notes Placeholder 2"/>
-          <p:cNvSpPr>
-            <a:spLocks noGrp="1"/>
-          </p:cNvSpPr>
-          <p:nvPr>
-            <p:ph type="body" idx="1"/>
-          </p:nvPr>
-        </p:nvSpPr>
-        <p:spPr/>
-        <p:txBody>
-          <a:bodyPr/>
-          <a:lstStyle/>
-          <a:p>
-            <a:r>
-              <a:rPr lang="en-US" dirty="0"/>
-              <a:t>PRESENTER. This is the day you are strongest - you have shipped to the App Store and nobody in the room has shipped anything. Lean on that.
-CAPTURE SCREENSHOTS BEFORE MONDAY: Play Console (create app, internal testing, data safety form) and App Store Connect (TestFlight, version page, review notes). Venue networks block consoles more often than you expect, and a live console that will not load in front of twenty people is the worst ten minutes of the week.
-PROTECT THE CLINIC. It is the hour they will rate highest on the feedback form. If release runs long, cut the Codemagic detail - it is in the appendix and the YAML is in the repo.
-IF A LAB FAILS ENTIRELY: the reference repo has every artefact - signed AAB, green pipeline, iOS archive. Show yours. They leave with the knowledge and the repo either way.</a:t>
-            </a:r>
-            <a:endParaRPr lang="en-US" dirty="0"/>
-          </a:p>
-        </p:txBody>
-      </p:sp>
-      <p:sp>
-        <p:nvSpPr>
-          <p:cNvPr id="4" name="Slide Number Placeholder 3"/>
-          <p:cNvSpPr>
-            <a:spLocks noGrp="1"/>
-          </p:cNvSpPr>
-          <p:nvPr>
-            <p:ph type="sldNum" sz="quarter" idx="10"/>
-          </p:nvPr>
-        </p:nvSpPr>
-        <p:spPr/>
-        <p:txBody>
-          <a:bodyPr/>
-          <a:lstStyle/>
-          <a:p>
-            <a:fld id="{F7021451-1387-4CA6-816F-3879F97B5CBC}" type="slidenum">
-              <a:rPr lang="en-US"/>
-              <a:t>47</a:t>
-            </a:fld>
-            <a:endParaRPr lang="en-US"/>
-          </a:p>
-        </p:txBody>
-      </p:sp>
-    </p:spTree>
-    <p:extLst>
-      <p:ext uri="{BB962C8B-B14F-4D97-AF65-F5344CB8AC3E}">
-        <p14:creationId xmlns:p14="http://schemas.microsoft.com/office/powerpoint/2010/main" val="1024086991"/>
-      </p:ext>
-    </p:extLst>
-  </p:cSld>
-  <p:clrMapOvr>
-    <a:masterClrMapping/>
-  </p:clrMapOvr>
-</p:notes>
-</file>
-
-<file path=ppt/notesSlides/notesSlide48.xml><?xml version="1.0" encoding="utf-8"?>
-<p:notes xmlns:a="http://schemas.openxmlformats.org/drawingml/2006/main" xmlns:r="http://schemas.openxmlformats.org/officeDocument/2006/relationships" xmlns:p="http://schemas.openxmlformats.org/presentationml/2006/main">
-  <p:cSld>
-    <p:spTree>
-      <p:nvGrpSpPr>
-        <p:cNvPr id="1" name=""/>
-        <p:cNvGrpSpPr/>
-        <p:nvPr/>
-      </p:nvGrpSpPr>
-      <p:grpSpPr>
-        <a:xfrm>
-          <a:off x="0" y="0"/>
-          <a:ext cx="0" cy="0"/>
-          <a:chOff x="0" y="0"/>
-          <a:chExt cx="0" cy="0"/>
-        </a:xfrm>
-      </p:grpSpPr>
-      <p:sp>
-        <p:nvSpPr>
-          <p:cNvPr id="2" name="Slide Image Placeholder 1"/>
-          <p:cNvSpPr>
-            <a:spLocks noGrp="1" noRot="1" noChangeAspect="1"/>
-          </p:cNvSpPr>
-          <p:nvPr>
-            <p:ph type="sldImg"/>
-          </p:nvPr>
-        </p:nvSpPr>
-        <p:spPr/>
-      </p:sp>
-      <p:sp>
-        <p:nvSpPr>
-          <p:cNvPr id="3" name="Notes Placeholder 2"/>
-          <p:cNvSpPr>
-            <a:spLocks noGrp="1"/>
-          </p:cNvSpPr>
-          <p:nvPr>
-            <p:ph type="body" idx="1"/>
-          </p:nvPr>
-        </p:nvSpPr>
-        <p:spPr/>
-        <p:txBody>
-          <a:bodyPr/>
-          <a:lstStyle/>
-          <a:p>
-            <a:r>
-              <a:rPr lang="en-US" dirty="0"/>
-              <a:t>Appendix.</a:t>
-            </a:r>
-            <a:endParaRPr lang="en-US" dirty="0"/>
-          </a:p>
-        </p:txBody>
-      </p:sp>
-      <p:sp>
-        <p:nvSpPr>
-          <p:cNvPr id="4" name="Slide Number Placeholder 3"/>
-          <p:cNvSpPr>
-            <a:spLocks noGrp="1"/>
-          </p:cNvSpPr>
-          <p:nvPr>
-            <p:ph type="sldNum" sz="quarter" idx="10"/>
-          </p:nvPr>
-        </p:nvSpPr>
-        <p:spPr/>
-        <p:txBody>
-          <a:bodyPr/>
-          <a:lstStyle/>
-          <a:p>
-            <a:fld id="{F7021451-1387-4CA6-816F-3879F97B5CBC}" type="slidenum">
-              <a:rPr lang="en-US"/>
-              <a:t>48</a:t>
-            </a:fld>
-            <a:endParaRPr lang="en-US"/>
-          </a:p>
-        </p:txBody>
-      </p:sp>
-    </p:spTree>
-    <p:extLst>
-      <p:ext uri="{BB962C8B-B14F-4D97-AF65-F5344CB8AC3E}">
-        <p14:creationId xmlns:p14="http://schemas.microsoft.com/office/powerpoint/2010/main" val="1024086991"/>
-      </p:ext>
-    </p:extLst>
-  </p:cSld>
-  <p:clrMapOvr>
-    <a:masterClrMapping/>
-  </p:clrMapOvr>
-</p:notes>
-</file>
-
-<file path=ppt/notesSlides/notesSlide49.xml><?xml version="1.0" encoding="utf-8"?>
-<p:notes xmlns:a="http://schemas.openxmlformats.org/drawingml/2006/main" xmlns:r="http://schemas.openxmlformats.org/officeDocument/2006/relationships" xmlns:p="http://schemas.openxmlformats.org/presentationml/2006/main">
-  <p:cSld>
-    <p:spTree>
-      <p:nvGrpSpPr>
-        <p:cNvPr id="1" name=""/>
-        <p:cNvGrpSpPr/>
-        <p:nvPr/>
-      </p:nvGrpSpPr>
-      <p:grpSpPr>
-        <a:xfrm>
-          <a:off x="0" y="0"/>
-          <a:ext cx="0" cy="0"/>
-          <a:chOff x="0" y="0"/>
-          <a:chExt cx="0" cy="0"/>
-        </a:xfrm>
-      </p:grpSpPr>
-      <p:sp>
-        <p:nvSpPr>
-          <p:cNvPr id="2" name="Slide Image Placeholder 1"/>
-          <p:cNvSpPr>
-            <a:spLocks noGrp="1" noRot="1" noChangeAspect="1"/>
-          </p:cNvSpPr>
-          <p:nvPr>
-            <p:ph type="sldImg"/>
-          </p:nvPr>
-        </p:nvSpPr>
-        <p:spPr/>
-      </p:sp>
-      <p:sp>
-        <p:nvSpPr>
-          <p:cNvPr id="3" name="Notes Placeholder 2"/>
-          <p:cNvSpPr>
-            <a:spLocks noGrp="1"/>
-          </p:cNvSpPr>
-          <p:nvPr>
-            <p:ph type="body" idx="1"/>
-          </p:nvPr>
-        </p:nvSpPr>
-        <p:spPr/>
-        <p:txBody>
-          <a:bodyPr/>
-          <a:lstStyle/>
-          <a:p>
-            <a:r>
-              <a:rPr lang="en-US" dirty="0"/>
-              <a:t>Solution. Unit, mocktail and integration tests are on the module slides.</a:t>
-            </a:r>
-            <a:endParaRPr lang="en-US" dirty="0"/>
-          </a:p>
-        </p:txBody>
-      </p:sp>
-      <p:sp>
-        <p:nvSpPr>
-          <p:cNvPr id="4" name="Slide Number Placeholder 3"/>
-          <p:cNvSpPr>
-            <a:spLocks noGrp="1"/>
-          </p:cNvSpPr>
-          <p:nvPr>
-            <p:ph type="sldNum" sz="quarter" idx="10"/>
-          </p:nvPr>
-        </p:nvSpPr>
-        <p:spPr/>
-        <p:txBody>
-          <a:bodyPr/>
-          <a:lstStyle/>
-          <a:p>
-            <a:fld id="{F7021451-1387-4CA6-816F-3879F97B5CBC}" type="slidenum">
-              <a:rPr lang="en-US"/>
-              <a:t>49</a:t>
-            </a:fld>
-            <a:endParaRPr lang="en-US"/>
-          </a:p>
-        </p:txBody>
-      </p:sp>
-    </p:spTree>
-    <p:extLst>
-      <p:ext uri="{BB962C8B-B14F-4D97-AF65-F5344CB8AC3E}">
-        <p14:creationId xmlns:p14="http://schemas.microsoft.com/office/powerpoint/2010/main" val="1024086991"/>
-      </p:ext>
-    </p:extLst>
-  </p:cSld>
-  <p:clrMapOvr>
-    <a:masterClrMapping/>
-  </p:clrMapOvr>
-</p:notes>
-</file>
-
-<file path=ppt/notesSlides/notesSlide5.xml><?xml version="1.0" encoding="utf-8"?>
-<p:notes xmlns:a="http://schemas.openxmlformats.org/drawingml/2006/main" xmlns:r="http://schemas.openxmlformats.org/officeDocument/2006/relationships" xmlns:p="http://schemas.openxmlformats.org/presentationml/2006/main">
-  <p:cSld>
-    <p:spTree>
-      <p:nvGrpSpPr>
-        <p:cNvPr id="1" name=""/>
-        <p:cNvGrpSpPr/>
-        <p:nvPr/>
-      </p:nvGrpSpPr>
-      <p:grpSpPr>
-        <a:xfrm>
-          <a:off x="0" y="0"/>
-          <a:ext cx="0" cy="0"/>
-          <a:chOff x="0" y="0"/>
-          <a:chExt cx="0" cy="0"/>
-        </a:xfrm>
-      </p:grpSpPr>
-      <p:sp>
-        <p:nvSpPr>
-          <p:cNvPr id="2" name="Slide Image Placeholder 1"/>
-          <p:cNvSpPr>
-            <a:spLocks noGrp="1" noRot="1" noChangeAspect="1"/>
-          </p:cNvSpPr>
-          <p:nvPr>
-            <p:ph type="sldImg"/>
-          </p:nvPr>
-        </p:nvSpPr>
-        <p:spPr/>
-      </p:sp>
-      <p:sp>
-        <p:nvSpPr>
-          <p:cNvPr id="3" name="Notes Placeholder 2"/>
-          <p:cNvSpPr>
-            <a:spLocks noGrp="1"/>
-          </p:cNvSpPr>
-          <p:nvPr>
-            <p:ph type="body" idx="1"/>
-          </p:nvPr>
-        </p:nvSpPr>
-        <p:spPr/>
-        <p:txBody>
-          <a:bodyPr/>
-          <a:lstStyle/>
-          <a:p>
-            <a:r>
-              <a:rPr lang="en-US" dirty="0"/>
-              <a:t>SCRIPT: Ten seconds per line. The insurance-specific message: pricing rules are unit tests; the regulator does not care about widget coverage, they care that a 24-year-old is loaded 50%.
-Golden tests: mention matchesGoldenFile for per-brand snapshots; they are brittle across platforms (font rendering differs Mac vs Windows vs Linux CI) - run goldens on one OS only, usually CI.</a:t>
-            </a:r>
-            <a:endParaRPr lang="en-US" dirty="0"/>
-          </a:p>
-        </p:txBody>
-      </p:sp>
-      <p:sp>
-        <p:nvSpPr>
-          <p:cNvPr id="4" name="Slide Number Placeholder 3"/>
-          <p:cNvSpPr>
-            <a:spLocks noGrp="1"/>
-          </p:cNvSpPr>
-          <p:nvPr>
-            <p:ph type="sldNum" sz="quarter" idx="10"/>
-          </p:nvPr>
-        </p:nvSpPr>
-        <p:spPr/>
-        <p:txBody>
-          <a:bodyPr/>
-          <a:lstStyle/>
-          <a:p>
-            <a:fld id="{F7021451-1387-4CA6-816F-3879F97B5CBC}" type="slidenum">
-              <a:rPr lang="en-US"/>
-              <a:t>5</a:t>
-            </a:fld>
-            <a:endParaRPr lang="en-US"/>
-          </a:p>
-        </p:txBody>
-      </p:sp>
-    </p:spTree>
-    <p:extLst>
-      <p:ext uri="{BB962C8B-B14F-4D97-AF65-F5344CB8AC3E}">
-        <p14:creationId xmlns:p14="http://schemas.microsoft.com/office/powerpoint/2010/main" val="1024086991"/>
-      </p:ext>
-    </p:extLst>
-  </p:cSld>
-  <p:clrMapOvr>
-    <a:masterClrMapping/>
-  </p:clrMapOvr>
-</p:notes>
-</file>
-
-<file path=ppt/notesSlides/notesSlide50.xml><?xml version="1.0" encoding="utf-8"?>
-<p:notes xmlns:a="http://schemas.openxmlformats.org/drawingml/2006/main" xmlns:r="http://schemas.openxmlformats.org/officeDocument/2006/relationships" xmlns:p="http://schemas.openxmlformats.org/presentationml/2006/main">
-  <p:cSld>
-    <p:spTree>
-      <p:nvGrpSpPr>
-        <p:cNvPr id="1" name=""/>
-        <p:cNvGrpSpPr/>
-        <p:nvPr/>
-      </p:nvGrpSpPr>
-      <p:grpSpPr>
-        <a:xfrm>
-          <a:off x="0" y="0"/>
-          <a:ext cx="0" cy="0"/>
-          <a:chOff x="0" y="0"/>
-          <a:chExt cx="0" cy="0"/>
-        </a:xfrm>
-      </p:grpSpPr>
-      <p:sp>
-        <p:nvSpPr>
-          <p:cNvPr id="2" name="Slide Image Placeholder 1"/>
-          <p:cNvSpPr>
-            <a:spLocks noGrp="1" noRot="1" noChangeAspect="1"/>
-          </p:cNvSpPr>
-          <p:nvPr>
-            <p:ph type="sldImg"/>
-          </p:nvPr>
-        </p:nvSpPr>
-        <p:spPr/>
-      </p:sp>
-      <p:sp>
-        <p:nvSpPr>
-          <p:cNvPr id="3" name="Notes Placeholder 2"/>
-          <p:cNvSpPr>
-            <a:spLocks noGrp="1"/>
-          </p:cNvSpPr>
-          <p:nvPr>
-            <p:ph type="body" idx="1"/>
-          </p:nvPr>
-        </p:nvSpPr>
-        <p:spPr/>
-        <p:txBody>
-          <a:bodyPr/>
-          <a:lstStyle/>
-          <a:p>
-            <a:r>
-              <a:rPr lang="en-US" dirty="0"/>
-              <a:t>Solution. Unit, mocktail and integration tests are on the module slides.</a:t>
-            </a:r>
-            <a:endParaRPr lang="en-US" dirty="0"/>
-          </a:p>
-        </p:txBody>
-      </p:sp>
-      <p:sp>
-        <p:nvSpPr>
-          <p:cNvPr id="4" name="Slide Number Placeholder 3"/>
-          <p:cNvSpPr>
-            <a:spLocks noGrp="1"/>
-          </p:cNvSpPr>
-          <p:nvPr>
-            <p:ph type="sldNum" sz="quarter" idx="10"/>
-          </p:nvPr>
-        </p:nvSpPr>
-        <p:spPr/>
-        <p:txBody>
-          <a:bodyPr/>
-          <a:lstStyle/>
-          <a:p>
-            <a:fld id="{F7021451-1387-4CA6-816F-3879F97B5CBC}" type="slidenum">
-              <a:rPr lang="en-US"/>
-              <a:t>50</a:t>
-            </a:fld>
-            <a:endParaRPr lang="en-US"/>
-          </a:p>
-        </p:txBody>
-      </p:sp>
-    </p:spTree>
-    <p:extLst>
-      <p:ext uri="{BB962C8B-B14F-4D97-AF65-F5344CB8AC3E}">
-        <p14:creationId xmlns:p14="http://schemas.microsoft.com/office/powerpoint/2010/main" val="1024086991"/>
-      </p:ext>
-    </p:extLst>
-  </p:cSld>
-  <p:clrMapOvr>
-    <a:masterClrMapping/>
-  </p:clrMapOvr>
-</p:notes>
-</file>
-
-<file path=ppt/notesSlides/notesSlide51.xml><?xml version="1.0" encoding="utf-8"?>
-<p:notes xmlns:a="http://schemas.openxmlformats.org/drawingml/2006/main" xmlns:r="http://schemas.openxmlformats.org/officeDocument/2006/relationships" xmlns:p="http://schemas.openxmlformats.org/presentationml/2006/main">
-  <p:cSld>
-    <p:spTree>
-      <p:nvGrpSpPr>
-        <p:cNvPr id="1" name=""/>
-        <p:cNvGrpSpPr/>
-        <p:nvPr/>
-      </p:nvGrpSpPr>
-      <p:grpSpPr>
-        <a:xfrm>
-          <a:off x="0" y="0"/>
-          <a:ext cx="0" cy="0"/>
-          <a:chOff x="0" y="0"/>
-          <a:chExt cx="0" cy="0"/>
-        </a:xfrm>
-      </p:grpSpPr>
-      <p:sp>
-        <p:nvSpPr>
-          <p:cNvPr id="2" name="Slide Image Placeholder 1"/>
-          <p:cNvSpPr>
-            <a:spLocks noGrp="1" noRot="1" noChangeAspect="1"/>
-          </p:cNvSpPr>
-          <p:nvPr>
-            <p:ph type="sldImg"/>
-          </p:nvPr>
-        </p:nvSpPr>
-        <p:spPr/>
-      </p:sp>
-      <p:sp>
-        <p:nvSpPr>
-          <p:cNvPr id="3" name="Notes Placeholder 2"/>
-          <p:cNvSpPr>
-            <a:spLocks noGrp="1"/>
-          </p:cNvSpPr>
-          <p:nvPr>
-            <p:ph type="body" idx="1"/>
-          </p:nvPr>
-        </p:nvSpPr>
-        <p:spPr/>
-        <p:txBody>
-          <a:bodyPr/>
-          <a:lstStyle/>
-          <a:p>
-            <a:r>
-              <a:rPr lang="en-US" dirty="0"/>
-              <a:t>Solution reference.</a:t>
-            </a:r>
-            <a:endParaRPr lang="en-US" dirty="0"/>
-          </a:p>
-        </p:txBody>
-      </p:sp>
-      <p:sp>
-        <p:nvSpPr>
-          <p:cNvPr id="4" name="Slide Number Placeholder 3"/>
-          <p:cNvSpPr>
-            <a:spLocks noGrp="1"/>
-          </p:cNvSpPr>
-          <p:nvPr>
-            <p:ph type="sldNum" sz="quarter" idx="10"/>
-          </p:nvPr>
-        </p:nvSpPr>
-        <p:spPr/>
-        <p:txBody>
-          <a:bodyPr/>
-          <a:lstStyle/>
-          <a:p>
-            <a:fld id="{F7021451-1387-4CA6-816F-3879F97B5CBC}" type="slidenum">
-              <a:rPr lang="en-US"/>
-              <a:t>51</a:t>
-            </a:fld>
-            <a:endParaRPr lang="en-US"/>
-          </a:p>
-        </p:txBody>
-      </p:sp>
-    </p:spTree>
-    <p:extLst>
-      <p:ext uri="{BB962C8B-B14F-4D97-AF65-F5344CB8AC3E}">
-        <p14:creationId xmlns:p14="http://schemas.microsoft.com/office/powerpoint/2010/main" val="1024086991"/>
-      </p:ext>
-    </p:extLst>
-  </p:cSld>
-  <p:clrMapOvr>
-    <a:masterClrMapping/>
-  </p:clrMapOvr>
-</p:notes>
-</file>
-
-<file path=ppt/notesSlides/notesSlide52.xml><?xml version="1.0" encoding="utf-8"?>
-<p:notes xmlns:a="http://schemas.openxmlformats.org/drawingml/2006/main" xmlns:r="http://schemas.openxmlformats.org/officeDocument/2006/relationships" xmlns:p="http://schemas.openxmlformats.org/presentationml/2006/main">
-  <p:cSld>
-    <p:spTree>
-      <p:nvGrpSpPr>
-        <p:cNvPr id="1" name=""/>
-        <p:cNvGrpSpPr/>
-        <p:nvPr/>
-      </p:nvGrpSpPr>
-      <p:grpSpPr>
-        <a:xfrm>
-          <a:off x="0" y="0"/>
-          <a:ext cx="0" cy="0"/>
-          <a:chOff x="0" y="0"/>
-          <a:chExt cx="0" cy="0"/>
-        </a:xfrm>
-      </p:grpSpPr>
-      <p:sp>
-        <p:nvSpPr>
-          <p:cNvPr id="2" name="Slide Image Placeholder 1"/>
-          <p:cNvSpPr>
-            <a:spLocks noGrp="1" noRot="1" noChangeAspect="1"/>
-          </p:cNvSpPr>
-          <p:nvPr>
-            <p:ph type="sldImg"/>
-          </p:nvPr>
-        </p:nvSpPr>
-        <p:spPr/>
-      </p:sp>
-      <p:sp>
-        <p:nvSpPr>
-          <p:cNvPr id="3" name="Notes Placeholder 2"/>
-          <p:cNvSpPr>
-            <a:spLocks noGrp="1"/>
-          </p:cNvSpPr>
-          <p:nvPr>
-            <p:ph type="body" idx="1"/>
-          </p:nvPr>
-        </p:nvSpPr>
-        <p:spPr/>
-        <p:txBody>
-          <a:bodyPr/>
-          <a:lstStyle/>
-          <a:p>
-            <a:r>
-              <a:rPr lang="en-US" dirty="0"/>
-              <a:t>Your demo script.</a:t>
-            </a:r>
-            <a:endParaRPr lang="en-US" dirty="0"/>
-          </a:p>
-        </p:txBody>
-      </p:sp>
-      <p:sp>
-        <p:nvSpPr>
-          <p:cNvPr id="4" name="Slide Number Placeholder 3"/>
-          <p:cNvSpPr>
-            <a:spLocks noGrp="1"/>
-          </p:cNvSpPr>
-          <p:nvPr>
-            <p:ph type="sldNum" sz="quarter" idx="10"/>
-          </p:nvPr>
-        </p:nvSpPr>
-        <p:spPr/>
-        <p:txBody>
-          <a:bodyPr/>
-          <a:lstStyle/>
-          <a:p>
-            <a:fld id="{F7021451-1387-4CA6-816F-3879F97B5CBC}" type="slidenum">
-              <a:rPr lang="en-US"/>
-              <a:t>52</a:t>
-            </a:fld>
-            <a:endParaRPr lang="en-US"/>
-          </a:p>
-        </p:txBody>
-      </p:sp>
-    </p:spTree>
-    <p:extLst>
-      <p:ext uri="{BB962C8B-B14F-4D97-AF65-F5344CB8AC3E}">
-        <p14:creationId xmlns:p14="http://schemas.microsoft.com/office/powerpoint/2010/main" val="1024086991"/>
-      </p:ext>
-    </p:extLst>
-  </p:cSld>
-  <p:clrMapOvr>
-    <a:masterClrMapping/>
-  </p:clrMapOvr>
-</p:notes>
-</file>
-
-<file path=ppt/notesSlides/notesSlide53.xml><?xml version="1.0" encoding="utf-8"?>
-<p:notes xmlns:a="http://schemas.openxmlformats.org/drawingml/2006/main" xmlns:r="http://schemas.openxmlformats.org/officeDocument/2006/relationships" xmlns:p="http://schemas.openxmlformats.org/presentationml/2006/main">
-  <p:cSld>
-    <p:spTree>
-      <p:nvGrpSpPr>
-        <p:cNvPr id="1" name=""/>
-        <p:cNvGrpSpPr/>
-        <p:nvPr/>
-      </p:nvGrpSpPr>
-      <p:grpSpPr>
-        <a:xfrm>
-          <a:off x="0" y="0"/>
-          <a:ext cx="0" cy="0"/>
-          <a:chOff x="0" y="0"/>
-          <a:chExt cx="0" cy="0"/>
-        </a:xfrm>
-      </p:grpSpPr>
-      <p:sp>
-        <p:nvSpPr>
-          <p:cNvPr id="2" name="Slide Image Placeholder 1"/>
-          <p:cNvSpPr>
-            <a:spLocks noGrp="1" noRot="1" noChangeAspect="1"/>
-          </p:cNvSpPr>
-          <p:nvPr>
-            <p:ph type="sldImg"/>
-          </p:nvPr>
-        </p:nvSpPr>
-        <p:spPr/>
-      </p:sp>
-      <p:sp>
-        <p:nvSpPr>
-          <p:cNvPr id="3" name="Notes Placeholder 2"/>
-          <p:cNvSpPr>
-            <a:spLocks noGrp="1"/>
-          </p:cNvSpPr>
-          <p:nvPr>
-            <p:ph type="body" idx="1"/>
-          </p:nvPr>
-        </p:nvSpPr>
-        <p:spPr/>
-        <p:txBody>
-          <a:bodyPr/>
-          <a:lstStyle/>
-          <a:p>
-            <a:r>
-              <a:rPr lang="en-US" dirty="0"/>
-              <a:t>For delegates whose project still uses the Groovy DSL.</a:t>
-            </a:r>
-            <a:endParaRPr lang="en-US" dirty="0"/>
-          </a:p>
-        </p:txBody>
-      </p:sp>
-      <p:sp>
-        <p:nvSpPr>
-          <p:cNvPr id="4" name="Slide Number Placeholder 3"/>
-          <p:cNvSpPr>
-            <a:spLocks noGrp="1"/>
-          </p:cNvSpPr>
-          <p:nvPr>
-            <p:ph type="sldNum" sz="quarter" idx="10"/>
-          </p:nvPr>
-        </p:nvSpPr>
-        <p:spPr/>
-        <p:txBody>
-          <a:bodyPr/>
-          <a:lstStyle/>
-          <a:p>
-            <a:fld id="{F7021451-1387-4CA6-816F-3879F97B5CBC}" type="slidenum">
-              <a:rPr lang="en-US"/>
-              <a:t>53</a:t>
-            </a:fld>
-            <a:endParaRPr lang="en-US"/>
-          </a:p>
-        </p:txBody>
-      </p:sp>
-    </p:spTree>
-    <p:extLst>
-      <p:ext uri="{BB962C8B-B14F-4D97-AF65-F5344CB8AC3E}">
-        <p14:creationId xmlns:p14="http://schemas.microsoft.com/office/powerpoint/2010/main" val="1024086991"/>
-      </p:ext>
-    </p:extLst>
-  </p:cSld>
-  <p:clrMapOvr>
-    <a:masterClrMapping/>
-  </p:clrMapOvr>
-</p:notes>
-</file>
-
-<file path=ppt/notesSlides/notesSlide54.xml><?xml version="1.0" encoding="utf-8"?>
-<p:notes xmlns:a="http://schemas.openxmlformats.org/drawingml/2006/main" xmlns:r="http://schemas.openxmlformats.org/officeDocument/2006/relationships" xmlns:p="http://schemas.openxmlformats.org/presentationml/2006/main">
-  <p:cSld>
-    <p:spTree>
-      <p:nvGrpSpPr>
-        <p:cNvPr id="1" name=""/>
-        <p:cNvGrpSpPr/>
-        <p:nvPr/>
-      </p:nvGrpSpPr>
-      <p:grpSpPr>
-        <a:xfrm>
-          <a:off x="0" y="0"/>
-          <a:ext cx="0" cy="0"/>
-          <a:chOff x="0" y="0"/>
-          <a:chExt cx="0" cy="0"/>
-        </a:xfrm>
-      </p:grpSpPr>
-      <p:sp>
-        <p:nvSpPr>
-          <p:cNvPr id="2" name="Slide Image Placeholder 1"/>
-          <p:cNvSpPr>
-            <a:spLocks noGrp="1" noRot="1" noChangeAspect="1"/>
-          </p:cNvSpPr>
-          <p:nvPr>
-            <p:ph type="sldImg"/>
-          </p:nvPr>
-        </p:nvSpPr>
-        <p:spPr/>
-      </p:sp>
-      <p:sp>
-        <p:nvSpPr>
-          <p:cNvPr id="3" name="Notes Placeholder 2"/>
-          <p:cNvSpPr>
-            <a:spLocks noGrp="1"/>
-          </p:cNvSpPr>
-          <p:nvPr>
-            <p:ph type="body" idx="1"/>
-          </p:nvPr>
-        </p:nvSpPr>
-        <p:spPr/>
-        <p:txBody>
-          <a:bodyPr/>
-          <a:lstStyle/>
-          <a:p>
-            <a:r>
-              <a:rPr lang="en-US" dirty="0"/>
-              <a:t>For delegates whose project still uses the Groovy DSL.</a:t>
-            </a:r>
-            <a:endParaRPr lang="en-US" dirty="0"/>
-          </a:p>
-        </p:txBody>
-      </p:sp>
-      <p:sp>
-        <p:nvSpPr>
-          <p:cNvPr id="4" name="Slide Number Placeholder 3"/>
-          <p:cNvSpPr>
-            <a:spLocks noGrp="1"/>
-          </p:cNvSpPr>
-          <p:nvPr>
-            <p:ph type="sldNum" sz="quarter" idx="10"/>
-          </p:nvPr>
-        </p:nvSpPr>
-        <p:spPr/>
-        <p:txBody>
-          <a:bodyPr/>
-          <a:lstStyle/>
-          <a:p>
-            <a:fld id="{F7021451-1387-4CA6-816F-3879F97B5CBC}" type="slidenum">
-              <a:rPr lang="en-US"/>
-              <a:t>54</a:t>
-            </a:fld>
-            <a:endParaRPr lang="en-US"/>
-          </a:p>
-        </p:txBody>
-      </p:sp>
-    </p:spTree>
-    <p:extLst>
-      <p:ext uri="{BB962C8B-B14F-4D97-AF65-F5344CB8AC3E}">
-        <p14:creationId xmlns:p14="http://schemas.microsoft.com/office/powerpoint/2010/main" val="1024086991"/>
-      </p:ext>
-    </p:extLst>
-  </p:cSld>
-  <p:clrMapOvr>
-    <a:masterClrMapping/>
-  </p:clrMapOvr>
-</p:notes>
-</file>
-
-<file path=ppt/notesSlides/notesSlide55.xml><?xml version="1.0" encoding="utf-8"?>
-<p:notes xmlns:a="http://schemas.openxmlformats.org/drawingml/2006/main" xmlns:r="http://schemas.openxmlformats.org/officeDocument/2006/relationships" xmlns:p="http://schemas.openxmlformats.org/presentationml/2006/main">
-  <p:cSld>
-    <p:spTree>
-      <p:nvGrpSpPr>
-        <p:cNvPr id="1" name=""/>
-        <p:cNvGrpSpPr/>
-        <p:nvPr/>
-      </p:nvGrpSpPr>
-      <p:grpSpPr>
-        <a:xfrm>
-          <a:off x="0" y="0"/>
-          <a:ext cx="0" cy="0"/>
-          <a:chOff x="0" y="0"/>
-          <a:chExt cx="0" cy="0"/>
-        </a:xfrm>
-      </p:grpSpPr>
-      <p:sp>
-        <p:nvSpPr>
-          <p:cNvPr id="2" name="Slide Image Placeholder 1"/>
-          <p:cNvSpPr>
-            <a:spLocks noGrp="1" noRot="1" noChangeAspect="1"/>
-          </p:cNvSpPr>
-          <p:nvPr>
-            <p:ph type="sldImg"/>
-          </p:nvPr>
-        </p:nvSpPr>
-        <p:spPr/>
-      </p:sp>
-      <p:sp>
-        <p:nvSpPr>
-          <p:cNvPr id="3" name="Notes Placeholder 2"/>
-          <p:cNvSpPr>
-            <a:spLocks noGrp="1"/>
-          </p:cNvSpPr>
-          <p:nvPr>
-            <p:ph type="body" idx="1"/>
-          </p:nvPr>
-        </p:nvSpPr>
-        <p:spPr/>
-        <p:txBody>
-          <a:bodyPr/>
-          <a:lstStyle/>
-          <a:p>
-            <a:r>
-              <a:rPr lang="en-US" dirty="0"/>
-              <a:t>Reference. The Play upload needs a Google Cloud service account linked in Play Console → Users and permissions.</a:t>
-            </a:r>
-            <a:endParaRPr lang="en-US" dirty="0"/>
-          </a:p>
-        </p:txBody>
-      </p:sp>
-      <p:sp>
-        <p:nvSpPr>
-          <p:cNvPr id="4" name="Slide Number Placeholder 3"/>
-          <p:cNvSpPr>
-            <a:spLocks noGrp="1"/>
-          </p:cNvSpPr>
-          <p:nvPr>
-            <p:ph type="sldNum" sz="quarter" idx="10"/>
-          </p:nvPr>
-        </p:nvSpPr>
-        <p:spPr/>
-        <p:txBody>
-          <a:bodyPr/>
-          <a:lstStyle/>
-          <a:p>
-            <a:fld id="{F7021451-1387-4CA6-816F-3879F97B5CBC}" type="slidenum">
-              <a:rPr lang="en-US"/>
-              <a:t>55</a:t>
-            </a:fld>
-            <a:endParaRPr lang="en-US"/>
-          </a:p>
-        </p:txBody>
-      </p:sp>
-    </p:spTree>
-    <p:extLst>
-      <p:ext uri="{BB962C8B-B14F-4D97-AF65-F5344CB8AC3E}">
-        <p14:creationId xmlns:p14="http://schemas.microsoft.com/office/powerpoint/2010/main" val="1024086991"/>
-      </p:ext>
-    </p:extLst>
-  </p:cSld>
-  <p:clrMapOvr>
-    <a:masterClrMapping/>
-  </p:clrMapOvr>
-</p:notes>
-</file>
-
-<file path=ppt/notesSlides/notesSlide56.xml><?xml version="1.0" encoding="utf-8"?>
-<p:notes xmlns:a="http://schemas.openxmlformats.org/drawingml/2006/main" xmlns:r="http://schemas.openxmlformats.org/officeDocument/2006/relationships" xmlns:p="http://schemas.openxmlformats.org/presentationml/2006/main">
-  <p:cSld>
-    <p:spTree>
-      <p:nvGrpSpPr>
-        <p:cNvPr id="1" name=""/>
-        <p:cNvGrpSpPr/>
-        <p:nvPr/>
-      </p:nvGrpSpPr>
-      <p:grpSpPr>
-        <a:xfrm>
-          <a:off x="0" y="0"/>
-          <a:ext cx="0" cy="0"/>
-          <a:chOff x="0" y="0"/>
-          <a:chExt cx="0" cy="0"/>
-        </a:xfrm>
-      </p:grpSpPr>
-      <p:sp>
-        <p:nvSpPr>
-          <p:cNvPr id="2" name="Slide Image Placeholder 1"/>
-          <p:cNvSpPr>
-            <a:spLocks noGrp="1" noRot="1" noChangeAspect="1"/>
-          </p:cNvSpPr>
-          <p:nvPr>
-            <p:ph type="sldImg"/>
-          </p:nvPr>
-        </p:nvSpPr>
-        <p:spPr/>
-      </p:sp>
-      <p:sp>
-        <p:nvSpPr>
-          <p:cNvPr id="3" name="Notes Placeholder 2"/>
-          <p:cNvSpPr>
-            <a:spLocks noGrp="1"/>
-          </p:cNvSpPr>
-          <p:nvPr>
-            <p:ph type="body" idx="1"/>
-          </p:nvPr>
-        </p:nvSpPr>
-        <p:spPr/>
-        <p:txBody>
-          <a:bodyPr/>
-          <a:lstStyle/>
-          <a:p>
-            <a:r>
-              <a:rPr lang="en-US" dirty="0"/>
-              <a:t>For the delegates who raised Form.io. Demo-level only.</a:t>
-            </a:r>
-            <a:endParaRPr lang="en-US" dirty="0"/>
-          </a:p>
-        </p:txBody>
-      </p:sp>
-      <p:sp>
-        <p:nvSpPr>
-          <p:cNvPr id="4" name="Slide Number Placeholder 3"/>
-          <p:cNvSpPr>
-            <a:spLocks noGrp="1"/>
-          </p:cNvSpPr>
-          <p:nvPr>
-            <p:ph type="sldNum" sz="quarter" idx="10"/>
-          </p:nvPr>
-        </p:nvSpPr>
-        <p:spPr/>
-        <p:txBody>
-          <a:bodyPr/>
-          <a:lstStyle/>
-          <a:p>
-            <a:fld id="{F7021451-1387-4CA6-816F-3879F97B5CBC}" type="slidenum">
-              <a:rPr lang="en-US"/>
-              <a:t>56</a:t>
-            </a:fld>
-            <a:endParaRPr lang="en-US"/>
-          </a:p>
-        </p:txBody>
-      </p:sp>
-    </p:spTree>
-    <p:extLst>
-      <p:ext uri="{BB962C8B-B14F-4D97-AF65-F5344CB8AC3E}">
-        <p14:creationId xmlns:p14="http://schemas.microsoft.com/office/powerpoint/2010/main" val="1024086991"/>
-      </p:ext>
-    </p:extLst>
-  </p:cSld>
-  <p:clrMapOvr>
-    <a:masterClrMapping/>
-  </p:clrMapOvr>
-</p:notes>
-</file>
-
-<file path=ppt/notesSlides/notesSlide57.xml><?xml version="1.0" encoding="utf-8"?>
-<p:notes xmlns:a="http://schemas.openxmlformats.org/drawingml/2006/main" xmlns:r="http://schemas.openxmlformats.org/officeDocument/2006/relationships" xmlns:p="http://schemas.openxmlformats.org/presentationml/2006/main">
-  <p:cSld>
-    <p:spTree>
-      <p:nvGrpSpPr>
-        <p:cNvPr id="1" name=""/>
-        <p:cNvGrpSpPr/>
-        <p:nvPr/>
-      </p:nvGrpSpPr>
-      <p:grpSpPr>
-        <a:xfrm>
-          <a:off x="0" y="0"/>
-          <a:ext cx="0" cy="0"/>
-          <a:chOff x="0" y="0"/>
-          <a:chExt cx="0" cy="0"/>
-        </a:xfrm>
-      </p:grpSpPr>
-      <p:sp>
-        <p:nvSpPr>
-          <p:cNvPr id="2" name="Slide Image Placeholder 1"/>
-          <p:cNvSpPr>
-            <a:spLocks noGrp="1" noRot="1" noChangeAspect="1"/>
-          </p:cNvSpPr>
-          <p:nvPr>
-            <p:ph type="sldImg"/>
-          </p:nvPr>
-        </p:nvSpPr>
-        <p:spPr/>
-      </p:sp>
-      <p:sp>
-        <p:nvSpPr>
-          <p:cNvPr id="3" name="Notes Placeholder 2"/>
-          <p:cNvSpPr>
-            <a:spLocks noGrp="1"/>
-          </p:cNvSpPr>
-          <p:nvPr>
-            <p:ph type="body" idx="1"/>
-          </p:nvPr>
-        </p:nvSpPr>
-        <p:spPr/>
-        <p:txBody>
-          <a:bodyPr/>
-          <a:lstStyle/>
-          <a:p>
-            <a:r>
-              <a:rPr lang="en-US" dirty="0"/>
-              <a:t>Second display during labs.</a:t>
-            </a:r>
-            <a:endParaRPr lang="en-US" dirty="0"/>
-          </a:p>
-        </p:txBody>
-      </p:sp>
-      <p:sp>
-        <p:nvSpPr>
-          <p:cNvPr id="4" name="Slide Number Placeholder 3"/>
-          <p:cNvSpPr>
-            <a:spLocks noGrp="1"/>
-          </p:cNvSpPr>
-          <p:nvPr>
-            <p:ph type="sldNum" sz="quarter" idx="10"/>
-          </p:nvPr>
-        </p:nvSpPr>
-        <p:spPr/>
-        <p:txBody>
-          <a:bodyPr/>
-          <a:lstStyle/>
-          <a:p>
-            <a:fld id="{F7021451-1387-4CA6-816F-3879F97B5CBC}" type="slidenum">
-              <a:rPr lang="en-US"/>
-              <a:t>57</a:t>
-            </a:fld>
-            <a:endParaRPr lang="en-US"/>
-          </a:p>
-        </p:txBody>
-      </p:sp>
-    </p:spTree>
-    <p:extLst>
-      <p:ext uri="{BB962C8B-B14F-4D97-AF65-F5344CB8AC3E}">
-        <p14:creationId xmlns:p14="http://schemas.microsoft.com/office/powerpoint/2010/main" val="1024086991"/>
-      </p:ext>
-    </p:extLst>
-  </p:cSld>
-  <p:clrMapOvr>
-    <a:masterClrMapping/>
-  </p:clrMapOvr>
-</p:notes>
-</file>
-
-<file path=ppt/notesSlides/notesSlide58.xml><?xml version="1.0" encoding="utf-8"?>
-<p:notes xmlns:a="http://schemas.openxmlformats.org/drawingml/2006/main" xmlns:r="http://schemas.openxmlformats.org/officeDocument/2006/relationships" xmlns:p="http://schemas.openxmlformats.org/presentationml/2006/main">
-  <p:cSld>
-    <p:spTree>
-      <p:nvGrpSpPr>
-        <p:cNvPr id="1" name=""/>
-        <p:cNvGrpSpPr/>
-        <p:nvPr/>
-      </p:nvGrpSpPr>
-      <p:grpSpPr>
-        <a:xfrm>
-          <a:off x="0" y="0"/>
-          <a:ext cx="0" cy="0"/>
-          <a:chOff x="0" y="0"/>
-          <a:chExt cx="0" cy="0"/>
-        </a:xfrm>
-      </p:grpSpPr>
-      <p:sp>
-        <p:nvSpPr>
-          <p:cNvPr id="2" name="Slide Image Placeholder 1"/>
-          <p:cNvSpPr>
-            <a:spLocks noGrp="1" noRot="1" noChangeAspect="1"/>
-          </p:cNvSpPr>
-          <p:nvPr>
-            <p:ph type="sldImg"/>
-          </p:nvPr>
-        </p:nvSpPr>
-        <p:spPr/>
-      </p:sp>
-      <p:sp>
-        <p:nvSpPr>
-          <p:cNvPr id="3" name="Notes Placeholder 2"/>
-          <p:cNvSpPr>
-            <a:spLocks noGrp="1"/>
-          </p:cNvSpPr>
-          <p:nvPr>
-            <p:ph type="body" idx="1"/>
-          </p:nvPr>
-        </p:nvSpPr>
-        <p:spPr/>
-        <p:txBody>
-          <a:bodyPr/>
-          <a:lstStyle/>
-          <a:p>
-            <a:r>
-              <a:rPr lang="en-US" dirty="0"/>
-              <a:t>Replace the repo placeholder.</a:t>
-            </a:r>
-            <a:endParaRPr lang="en-US" dirty="0"/>
-          </a:p>
-        </p:txBody>
-      </p:sp>
-      <p:sp>
-        <p:nvSpPr>
-          <p:cNvPr id="4" name="Slide Number Placeholder 3"/>
-          <p:cNvSpPr>
-            <a:spLocks noGrp="1"/>
-          </p:cNvSpPr>
-          <p:nvPr>
-            <p:ph type="sldNum" sz="quarter" idx="10"/>
-          </p:nvPr>
-        </p:nvSpPr>
-        <p:spPr/>
-        <p:txBody>
-          <a:bodyPr/>
-          <a:lstStyle/>
-          <a:p>
-            <a:fld id="{F7021451-1387-4CA6-816F-3879F97B5CBC}" type="slidenum">
-              <a:rPr lang="en-US"/>
-              <a:t>58</a:t>
-            </a:fld>
-            <a:endParaRPr lang="en-US"/>
-          </a:p>
-        </p:txBody>
-      </p:sp>
-    </p:spTree>
-    <p:extLst>
-      <p:ext uri="{BB962C8B-B14F-4D97-AF65-F5344CB8AC3E}">
-        <p14:creationId xmlns:p14="http://schemas.microsoft.com/office/powerpoint/2010/main" val="1024086991"/>
-      </p:ext>
-    </p:extLst>
-  </p:cSld>
-  <p:clrMapOvr>
-    <a:masterClrMapping/>
-  </p:clrMapOvr>
-</p:notes>
-</file>
-
-<file path=ppt/notesSlides/notesSlide6.xml><?xml version="1.0" encoding="utf-8"?>
-<p:notes xmlns:a="http://schemas.openxmlformats.org/drawingml/2006/main" xmlns:r="http://schemas.openxmlformats.org/officeDocument/2006/relationships" xmlns:p="http://schemas.openxmlformats.org/presentationml/2006/main">
-  <p:cSld>
-    <p:spTree>
-      <p:nvGrpSpPr>
-        <p:cNvPr id="1" name=""/>
-        <p:cNvGrpSpPr/>
-        <p:nvPr/>
-      </p:nvGrpSpPr>
-      <p:grpSpPr>
-        <a:xfrm>
-          <a:off x="0" y="0"/>
-          <a:ext cx="0" cy="0"/>
-          <a:chOff x="0" y="0"/>
-          <a:chExt cx="0" cy="0"/>
-        </a:xfrm>
-      </p:grpSpPr>
-      <p:sp>
-        <p:nvSpPr>
-          <p:cNvPr id="2" name="Slide Image Placeholder 1"/>
-          <p:cNvSpPr>
-            <a:spLocks noGrp="1" noRot="1" noChangeAspect="1"/>
-          </p:cNvSpPr>
-          <p:nvPr>
-            <p:ph type="sldImg"/>
-          </p:nvPr>
-        </p:nvSpPr>
-        <p:spPr/>
-      </p:sp>
-      <p:sp>
-        <p:nvSpPr>
-          <p:cNvPr id="3" name="Notes Placeholder 2"/>
-          <p:cNvSpPr>
-            <a:spLocks noGrp="1"/>
-          </p:cNvSpPr>
-          <p:nvPr>
-            <p:ph type="body" idx="1"/>
-          </p:nvPr>
-        </p:nvSpPr>
-        <p:spPr/>
-        <p:txBody>
-          <a:bodyPr/>
-          <a:lstStyle/>
-          <a:p>
-            <a:r>
-              <a:rPr lang="en-US" dirty="0"/>
-              <a:t>SCRIPT: Pure Dart, no Flutter. Runs in milliseconds. Show flutter test with one failing assertion first (change 1500 to 1400) so they see the diff output, then fix.
-Both OS identical. VS Code: the Run/Debug code-lens above each test; Flutter extension shows a test tree in the sidebar.
-Coverage on Windows: lcov.info is produced; to view HTML you need lcov (choco install lcov) or use VS Code Coverage Gutters extension. On Mac: brew install lcov; genhtml coverage/lcov.info -o coverage/html.</a:t>
-            </a:r>
-            <a:endParaRPr lang="en-US" dirty="0"/>
-          </a:p>
-        </p:txBody>
-      </p:sp>
-      <p:sp>
-        <p:nvSpPr>
-          <p:cNvPr id="4" name="Slide Number Placeholder 3"/>
-          <p:cNvSpPr>
-            <a:spLocks noGrp="1"/>
-          </p:cNvSpPr>
-          <p:nvPr>
-            <p:ph type="sldNum" sz="quarter" idx="10"/>
-          </p:nvPr>
-        </p:nvSpPr>
-        <p:spPr/>
-        <p:txBody>
-          <a:bodyPr/>
-          <a:lstStyle/>
-          <a:p>
-            <a:fld id="{F7021451-1387-4CA6-816F-3879F97B5CBC}" type="slidenum">
-              <a:rPr lang="en-US"/>
-              <a:t>6</a:t>
-            </a:fld>
-            <a:endParaRPr lang="en-US"/>
-          </a:p>
-        </p:txBody>
-      </p:sp>
-    </p:spTree>
-    <p:extLst>
-      <p:ext uri="{BB962C8B-B14F-4D97-AF65-F5344CB8AC3E}">
-        <p14:creationId xmlns:p14="http://schemas.microsoft.com/office/powerpoint/2010/main" val="1024086991"/>
-      </p:ext>
-    </p:extLst>
-  </p:cSld>
-  <p:clrMapOvr>
-    <a:masterClrMapping/>
-  </p:clrMapOvr>
-</p:notes>
-</file>
-
-<file path=ppt/notesSlides/notesSlide7.xml><?xml version="1.0" encoding="utf-8"?>
-<p:notes xmlns:a="http://schemas.openxmlformats.org/drawingml/2006/main" xmlns:r="http://schemas.openxmlformats.org/officeDocument/2006/relationships" xmlns:p="http://schemas.openxmlformats.org/presentationml/2006/main">
-  <p:cSld>
-    <p:spTree>
-      <p:nvGrpSpPr>
-        <p:cNvPr id="1" name=""/>
-        <p:cNvGrpSpPr/>
-        <p:nvPr/>
-      </p:nvGrpSpPr>
-      <p:grpSpPr>
-        <a:xfrm>
-          <a:off x="0" y="0"/>
-          <a:ext cx="0" cy="0"/>
-          <a:chOff x="0" y="0"/>
-          <a:chExt cx="0" cy="0"/>
-        </a:xfrm>
-      </p:grpSpPr>
-      <p:sp>
-        <p:nvSpPr>
-          <p:cNvPr id="2" name="Slide Image Placeholder 1"/>
-          <p:cNvSpPr>
-            <a:spLocks noGrp="1" noRot="1" noChangeAspect="1"/>
-          </p:cNvSpPr>
-          <p:nvPr>
-            <p:ph type="sldImg"/>
-          </p:nvPr>
-        </p:nvSpPr>
-        <p:spPr/>
-      </p:sp>
-      <p:sp>
-        <p:nvSpPr>
-          <p:cNvPr id="3" name="Notes Placeholder 2"/>
-          <p:cNvSpPr>
-            <a:spLocks noGrp="1"/>
-          </p:cNvSpPr>
-          <p:nvPr>
-            <p:ph type="body" idx="1"/>
-          </p:nvPr>
-        </p:nvSpPr>
-        <p:spPr/>
-        <p:txBody>
-          <a:bodyPr/>
-          <a:lstStyle/>
-          <a:p>
-            <a:r>
-              <a:rPr lang="en-US" dirty="0"/>
-              <a:t>SCRIPT: Pure Dart, no Flutter. Runs in milliseconds. Show flutter test with one failing assertion first (change 1500 to 1400) so they see the diff output, then fix.
-Both OS identical. VS Code: the Run/Debug code-lens above each test; Flutter extension shows a test tree in the sidebar.
-Coverage on Windows: lcov.info is produced; to view HTML you need lcov (choco install lcov) or use VS Code Coverage Gutters extension. On Mac: brew install lcov; genhtml coverage/lcov.info -o coverage/html.</a:t>
-            </a:r>
-            <a:endParaRPr lang="en-US" dirty="0"/>
-          </a:p>
-        </p:txBody>
-      </p:sp>
-      <p:sp>
-        <p:nvSpPr>
-          <p:cNvPr id="4" name="Slide Number Placeholder 3"/>
-          <p:cNvSpPr>
-            <a:spLocks noGrp="1"/>
-          </p:cNvSpPr>
-          <p:nvPr>
-            <p:ph type="sldNum" sz="quarter" idx="10"/>
-          </p:nvPr>
-        </p:nvSpPr>
-        <p:spPr/>
-        <p:txBody>
-          <a:bodyPr/>
-          <a:lstStyle/>
-          <a:p>
-            <a:fld id="{F7021451-1387-4CA6-816F-3879F97B5CBC}" type="slidenum">
-              <a:rPr lang="en-US"/>
-              <a:t>7</a:t>
-            </a:fld>
-            <a:endParaRPr lang="en-US"/>
-          </a:p>
-        </p:txBody>
-      </p:sp>
-    </p:spTree>
-    <p:extLst>
-      <p:ext uri="{BB962C8B-B14F-4D97-AF65-F5344CB8AC3E}">
-        <p14:creationId xmlns:p14="http://schemas.microsoft.com/office/powerpoint/2010/main" val="1024086991"/>
-      </p:ext>
-    </p:extLst>
-  </p:cSld>
-  <p:clrMapOvr>
-    <a:masterClrMapping/>
-  </p:clrMapOvr>
-</p:notes>
-</file>
-
-<file path=ppt/notesSlides/notesSlide8.xml><?xml version="1.0" encoding="utf-8"?>
-<p:notes xmlns:a="http://schemas.openxmlformats.org/drawingml/2006/main" xmlns:r="http://schemas.openxmlformats.org/officeDocument/2006/relationships" xmlns:p="http://schemas.openxmlformats.org/presentationml/2006/main">
-  <p:cSld>
-    <p:spTree>
-      <p:nvGrpSpPr>
-        <p:cNvPr id="1" name=""/>
-        <p:cNvGrpSpPr/>
-        <p:nvPr/>
-      </p:nvGrpSpPr>
-      <p:grpSpPr>
-        <a:xfrm>
-          <a:off x="0" y="0"/>
-          <a:ext cx="0" cy="0"/>
-          <a:chOff x="0" y="0"/>
-          <a:chExt cx="0" cy="0"/>
-        </a:xfrm>
-      </p:grpSpPr>
-      <p:sp>
-        <p:nvSpPr>
-          <p:cNvPr id="2" name="Slide Image Placeholder 1"/>
-          <p:cNvSpPr>
-            <a:spLocks noGrp="1" noRot="1" noChangeAspect="1"/>
-          </p:cNvSpPr>
-          <p:nvPr>
-            <p:ph type="sldImg"/>
-          </p:nvPr>
-        </p:nvSpPr>
-        <p:spPr/>
-      </p:sp>
-      <p:sp>
-        <p:nvSpPr>
-          <p:cNvPr id="3" name="Notes Placeholder 2"/>
-          <p:cNvSpPr>
-            <a:spLocks noGrp="1"/>
-          </p:cNvSpPr>
-          <p:nvPr>
-            <p:ph type="body" idx="1"/>
-          </p:nvPr>
-        </p:nvSpPr>
-        <p:spPr/>
-        <p:txBody>
-          <a:bodyPr/>
-          <a:lstStyle/>
-          <a:p>
-            <a:r>
-              <a:rPr lang="en-US" dirty="0"/>
-              <a:t>SCRIPT: Yesterday's ProviderContainer test with a mock instead of the fake: now you can force a failure, a timeout, or verify the call count. mocktail over mockito because no build_runner step.
-registerFallbackValue: the error "Bad state: A test tried to use any or captureAny on a parameter of type QuoteRequest" means you forgot it. Put it in setUpAll.
-Add the request constant from Day 3's test above main(); it is omitted here for space.</a:t>
-            </a:r>
-            <a:endParaRPr lang="en-US" dirty="0"/>
-          </a:p>
-        </p:txBody>
-      </p:sp>
-      <p:sp>
-        <p:nvSpPr>
-          <p:cNvPr id="4" name="Slide Number Placeholder 3"/>
-          <p:cNvSpPr>
-            <a:spLocks noGrp="1"/>
-          </p:cNvSpPr>
-          <p:nvPr>
-            <p:ph type="sldNum" sz="quarter" idx="10"/>
-          </p:nvPr>
-        </p:nvSpPr>
-        <p:spPr/>
-        <p:txBody>
-          <a:bodyPr/>
-          <a:lstStyle/>
-          <a:p>
-            <a:fld id="{F7021451-1387-4CA6-816F-3879F97B5CBC}" type="slidenum">
-              <a:rPr lang="en-US"/>
-              <a:t>8</a:t>
-            </a:fld>
-            <a:endParaRPr lang="en-US"/>
-          </a:p>
-        </p:txBody>
-      </p:sp>
-    </p:spTree>
-    <p:extLst>
-      <p:ext uri="{BB962C8B-B14F-4D97-AF65-F5344CB8AC3E}">
-        <p14:creationId xmlns:p14="http://schemas.microsoft.com/office/powerpoint/2010/main" val="1024086991"/>
-      </p:ext>
-    </p:extLst>
-  </p:cSld>
-  <p:clrMapOvr>
-    <a:masterClrMapping/>
-  </p:clrMapOvr>
-</p:notes>
-</file>
-
-<file path=ppt/notesSlides/notesSlide9.xml><?xml version="1.0" encoding="utf-8"?>
-<p:notes xmlns:a="http://schemas.openxmlformats.org/drawingml/2006/main" xmlns:r="http://schemas.openxmlformats.org/officeDocument/2006/relationships" xmlns:p="http://schemas.openxmlformats.org/presentationml/2006/main">
-  <p:cSld>
-    <p:spTree>
-      <p:nvGrpSpPr>
-        <p:cNvPr id="1" name=""/>
-        <p:cNvGrpSpPr/>
-        <p:nvPr/>
-      </p:nvGrpSpPr>
-      <p:grpSpPr>
-        <a:xfrm>
-          <a:off x="0" y="0"/>
-          <a:ext cx="0" cy="0"/>
-          <a:chOff x="0" y="0"/>
-          <a:chExt cx="0" cy="0"/>
-        </a:xfrm>
-      </p:grpSpPr>
-      <p:sp>
-        <p:nvSpPr>
-          <p:cNvPr id="2" name="Slide Image Placeholder 1"/>
-          <p:cNvSpPr>
-            <a:spLocks noGrp="1" noRot="1" noChangeAspect="1"/>
-          </p:cNvSpPr>
-          <p:nvPr>
-            <p:ph type="sldImg"/>
-          </p:nvPr>
-        </p:nvSpPr>
-        <p:spPr/>
-      </p:sp>
-      <p:sp>
-        <p:nvSpPr>
-          <p:cNvPr id="3" name="Notes Placeholder 2"/>
-          <p:cNvSpPr>
-            <a:spLocks noGrp="1"/>
-          </p:cNvSpPr>
-          <p:nvPr>
-            <p:ph type="body" idx="1"/>
-          </p:nvPr>
-        </p:nvSpPr>
-        <p:spPr/>
-        <p:txBody>
-          <a:bodyPr/>
-          <a:lstStyle/>
-          <a:p>
-            <a:r>
-              <a:rPr lang="en-US" dirty="0"/>
-              <a:t>SCRIPT: Yesterday's ProviderContainer test with a mock instead of the fake: now you can force a failure, a timeout, or verify the call count. mocktail over mockito because no build_runner step.
-registerFallbackValue: the error "Bad state: A test tried to use any or captureAny on a parameter of type QuoteRequest" means you forgot it. Put it in setUpAll.
-Add the request constant from Day 3's test above main(); it is omitted here for space.</a:t>
-            </a:r>
-            <a:endParaRPr lang="en-US" dirty="0"/>
-          </a:p>
-        </p:txBody>
-      </p:sp>
-      <p:sp>
-        <p:nvSpPr>
-          <p:cNvPr id="4" name="Slide Number Placeholder 3"/>
-          <p:cNvSpPr>
-            <a:spLocks noGrp="1"/>
-          </p:cNvSpPr>
-          <p:nvPr>
-            <p:ph type="sldNum" sz="quarter" idx="10"/>
-          </p:nvPr>
-        </p:nvSpPr>
-        <p:spPr/>
-        <p:txBody>
-          <a:bodyPr/>
-          <a:lstStyle/>
-          <a:p>
-            <a:fld id="{F7021451-1387-4CA6-816F-3879F97B5CBC}" type="slidenum">
-              <a:rPr lang="en-US"/>
-              <a:t>9</a:t>
-            </a:fld>
-            <a:endParaRPr lang="en-US"/>
-          </a:p>
-        </p:txBody>
-      </p:sp>
-    </p:spTree>
-    <p:extLst>
-      <p:ext uri="{BB962C8B-B14F-4D97-AF65-F5344CB8AC3E}">
-        <p14:creationId xmlns:p14="http://schemas.microsoft.com/office/powerpoint/2010/main" val="1024086991"/>
-      </p:ext>
-    </p:extLst>
-  </p:cSld>
-  <p:clrMapOvr>
-    <a:masterClrMapping/>
-  </p:clrMapOvr>
-</p:notes>
 </file>
 
 <file path=ppt/slideLayouts/slideLayout1.xml><?xml version="1.0" encoding="utf-8"?>
@@ -6007,297 +820,297 @@
 </file>
 
 <file path=ppt/slides/slide1.xml><?xml version="1.0" encoding="utf-8"?>
-<p:sld xmlns:a="http://schemas.openxmlformats.org/drawingml/2006/main" xmlns:r="http://schemas.openxmlformats.org/officeDocument/2006/relationships" xmlns:p="http://schemas.openxmlformats.org/presentationml/2006/main">
-  <p:cSld name="Slide 1">
-    <p:bg>
-      <p:bgPr>
-        <a:solidFill>
-          <a:srgbClr val="0B2545"/>
-        </a:solidFill>
-      </p:bgPr>
-    </p:bg>
-    <p:spTree>
-      <p:nvGrpSpPr>
-        <p:cNvPr id="1" name=""/>
-        <p:cNvGrpSpPr/>
-        <p:nvPr/>
-      </p:nvGrpSpPr>
-      <p:grpSpPr>
-        <a:xfrm>
-          <a:off x="0" y="0"/>
-          <a:ext cx="0" cy="0"/>
-          <a:chOff x="0" y="0"/>
-          <a:chExt cx="0" cy="0"/>
-        </a:xfrm>
-      </p:grpSpPr>
-      <p:sp>
-        <p:nvSpPr>
-          <p:cNvPr id="2" name="Shape 0"/>
-          <p:cNvSpPr/>
-          <p:nvPr/>
-        </p:nvSpPr>
-        <p:spPr>
-          <a:xfrm>
-            <a:off x="9262872" y="-1463040"/>
-            <a:ext cx="4754880" cy="4754880"/>
-          </a:xfrm>
-          <a:prstGeom prst="ellipse">
-            <a:avLst/>
-          </a:prstGeom>
-          <a:solidFill>
-            <a:srgbClr val="13315C"/>
-          </a:solidFill>
-          <a:ln w="12700">
-            <a:solidFill>
-              <a:srgbClr val="13315C"/>
-            </a:solidFill>
-            <a:prstDash val="solid"/>
-          </a:ln>
-        </p:spPr>
-      </p:sp>
-      <p:sp>
-        <p:nvSpPr>
-          <p:cNvPr id="3" name="Shape 1"/>
-          <p:cNvSpPr/>
-          <p:nvPr/>
-        </p:nvSpPr>
-        <p:spPr>
-          <a:xfrm>
-            <a:off x="10543032" y="4480560"/>
-            <a:ext cx="3108960" cy="3108960"/>
-          </a:xfrm>
-          <a:prstGeom prst="ellipse">
-            <a:avLst/>
-          </a:prstGeom>
-          <a:solidFill>
-            <a:srgbClr val="C9A227"/>
-          </a:solidFill>
-          <a:ln w="12700">
-            <a:solidFill>
-              <a:srgbClr val="C9A227"/>
-            </a:solidFill>
-            <a:prstDash val="solid"/>
-          </a:ln>
-        </p:spPr>
-      </p:sp>
-      <p:sp>
-        <p:nvSpPr>
-          <p:cNvPr id="4" name="Text 2"/>
-          <p:cNvSpPr txBox="1"/>
-          <p:nvPr/>
-        </p:nvSpPr>
-        <p:spPr>
-          <a:xfrm>
-            <a:off x="548640" y="731520"/>
-            <a:ext cx="7315200" cy="365760"/>
-          </a:xfrm>
-          <a:prstGeom prst="rect">
-            <a:avLst/>
-          </a:prstGeom>
-          <a:noFill/>
-          <a:ln/>
-        </p:spPr>
-        <p:txBody>
-          <a:bodyPr wrap="square" lIns="0" tIns="0" rIns="0" bIns="0" rtlCol="0" anchor="ctr"/>
-          <a:lstStyle/>
-          <a:p>
-            <a:pPr indent="0" marL="0">
-              <a:buNone/>
-            </a:pPr>
-            <a:r>
-              <a:rPr lang="en-US" sz="1200" spc="400" kern="0" dirty="0">
-                <a:solidFill>
-                  <a:srgbClr val="E3C766"/>
-                </a:solidFill>
-                <a:latin typeface="Calibri" pitchFamily="34" charset="0"/>
-                <a:ea typeface="Calibri" pitchFamily="34" charset="-122"/>
-                <a:cs typeface="Calibri" pitchFamily="34" charset="-120"/>
-              </a:rPr>
-              <a:t>MO INTEGRATIONS  ·  TECHNICAL TRAINING</a:t>
-            </a:r>
-            <a:endParaRPr lang="en-US" sz="1200" dirty="0"/>
-          </a:p>
-        </p:txBody>
-      </p:sp>
-      <p:sp>
-        <p:nvSpPr>
-          <p:cNvPr id="5" name="Text 3"/>
-          <p:cNvSpPr txBox="1"/>
-          <p:nvPr/>
-        </p:nvSpPr>
-        <p:spPr>
-          <a:xfrm>
-            <a:off x="548640" y="1371600"/>
-            <a:ext cx="8229600" cy="548640"/>
-          </a:xfrm>
-          <a:prstGeom prst="rect">
-            <a:avLst/>
-          </a:prstGeom>
-          <a:noFill/>
-          <a:ln/>
-        </p:spPr>
-        <p:txBody>
-          <a:bodyPr wrap="square" lIns="0" tIns="0" rIns="0" bIns="0" rtlCol="0" anchor="ctr"/>
-          <a:lstStyle/>
-          <a:p>
-            <a:pPr indent="0" marL="0">
-              <a:buNone/>
-            </a:pPr>
-            <a:r>
-              <a:rPr lang="en-US" sz="1800" dirty="0">
-                <a:solidFill>
-                  <a:srgbClr val="D7DEE8"/>
-                </a:solidFill>
-                <a:latin typeface="Calibri" pitchFamily="34" charset="0"/>
-                <a:ea typeface="Calibri" pitchFamily="34" charset="-122"/>
-                <a:cs typeface="Calibri" pitchFamily="34" charset="-120"/>
-              </a:rPr>
-              <a:t>Flutter Mobile Application Development · 5-Day Programme</a:t>
-            </a:r>
-            <a:endParaRPr lang="en-US" sz="1800" dirty="0"/>
-          </a:p>
-        </p:txBody>
-      </p:sp>
-      <p:sp>
-        <p:nvSpPr>
-          <p:cNvPr id="6" name="Text 4"/>
-          <p:cNvSpPr txBox="1"/>
-          <p:nvPr/>
-        </p:nvSpPr>
-        <p:spPr>
-          <a:xfrm>
-            <a:off x="548640" y="2103120"/>
-            <a:ext cx="8686800" cy="1463040"/>
-          </a:xfrm>
-          <a:prstGeom prst="rect">
-            <a:avLst/>
-          </a:prstGeom>
-          <a:noFill/>
-          <a:ln/>
-        </p:spPr>
-        <p:txBody>
-          <a:bodyPr wrap="square" lIns="0" tIns="0" rIns="0" bIns="0" rtlCol="0" anchor="t"/>
-          <a:lstStyle/>
-          <a:p>
-            <a:pPr indent="0" marL="0">
-              <a:buNone/>
-            </a:pPr>
-            <a:r>
-              <a:rPr lang="en-US" sz="4800" b="1" dirty="0">
-                <a:solidFill>
-                  <a:srgbClr val="FFFFFF"/>
-                </a:solidFill>
-                <a:latin typeface="Calibri" pitchFamily="34" charset="0"/>
-                <a:ea typeface="Calibri" pitchFamily="34" charset="-122"/>
-                <a:cs typeface="Calibri" pitchFamily="34" charset="-120"/>
-              </a:rPr>
-              <a:t>Day 5</a:t>
-            </a:r>
-            <a:endParaRPr lang="en-US" sz="4800" dirty="0"/>
-          </a:p>
-          <a:p>
-            <a:pPr indent="0" marL="0">
-              <a:buNone/>
-            </a:pPr>
-            <a:r>
-              <a:rPr lang="en-US" sz="4800" b="1" dirty="0">
-                <a:solidFill>
-                  <a:srgbClr val="FFFFFF"/>
-                </a:solidFill>
-                <a:latin typeface="Calibri" pitchFamily="34" charset="0"/>
-                <a:ea typeface="Calibri" pitchFamily="34" charset="-122"/>
-                <a:cs typeface="Calibri" pitchFamily="34" charset="-120"/>
-              </a:rPr>
-              <a:t>Testing, CI/CD &amp; Shipping</a:t>
-            </a:r>
-            <a:endParaRPr lang="en-US" sz="4800" dirty="0"/>
-          </a:p>
-        </p:txBody>
-      </p:sp>
-      <p:sp>
-        <p:nvSpPr>
-          <p:cNvPr id="7" name="Text 5"/>
-          <p:cNvSpPr txBox="1"/>
-          <p:nvPr/>
-        </p:nvSpPr>
-        <p:spPr>
-          <a:xfrm>
-            <a:off x="548640" y="3657600"/>
-            <a:ext cx="8229600" cy="731520"/>
-          </a:xfrm>
-          <a:prstGeom prst="rect">
-            <a:avLst/>
-          </a:prstGeom>
-          <a:noFill/>
-          <a:ln/>
-        </p:spPr>
-        <p:txBody>
-          <a:bodyPr wrap="square" lIns="0" tIns="0" rIns="0" bIns="0" rtlCol="0" anchor="ctr"/>
-          <a:lstStyle/>
-          <a:p>
-            <a:pPr indent="0" marL="0">
-              <a:buNone/>
-            </a:pPr>
-            <a:r>
-              <a:rPr lang="en-US" sz="2000" dirty="0">
-                <a:solidFill>
-                  <a:srgbClr val="E3C766"/>
-                </a:solidFill>
-                <a:latin typeface="Calibri" pitchFamily="34" charset="0"/>
-                <a:ea typeface="Calibri" pitchFamily="34" charset="-122"/>
-                <a:cs typeface="Calibri" pitchFamily="34" charset="-120"/>
-              </a:rPr>
-              <a:t>Tests · Build flavours &amp; white-label · Signing &amp; store release · CI · Best practices &amp; project clinic</a:t>
-            </a:r>
-            <a:endParaRPr lang="en-US" sz="2000" dirty="0"/>
-          </a:p>
-        </p:txBody>
-      </p:sp>
-      <p:sp>
-        <p:nvSpPr>
-          <p:cNvPr id="8" name="Text 6"/>
-          <p:cNvSpPr txBox="1"/>
-          <p:nvPr/>
-        </p:nvSpPr>
-        <p:spPr>
-          <a:xfrm>
-            <a:off x="548640" y="5760720"/>
-            <a:ext cx="8229600" cy="457200"/>
-          </a:xfrm>
-          <a:prstGeom prst="rect">
-            <a:avLst/>
-          </a:prstGeom>
-          <a:noFill/>
-          <a:ln/>
-        </p:spPr>
-        <p:txBody>
-          <a:bodyPr wrap="square" lIns="0" tIns="0" rIns="0" bIns="0" rtlCol="0" anchor="ctr"/>
-          <a:lstStyle/>
-          <a:p>
-            <a:pPr indent="0" marL="0">
-              <a:buNone/>
-            </a:pPr>
-            <a:r>
-              <a:rPr lang="en-US" sz="1200" dirty="0">
-                <a:solidFill>
-                  <a:srgbClr val="AAB6C4"/>
-                </a:solidFill>
-                <a:latin typeface="Calibri" pitchFamily="34" charset="0"/>
-                <a:ea typeface="Calibri" pitchFamily="34" charset="-122"/>
-                <a:cs typeface="Calibri" pitchFamily="34" charset="-120"/>
-              </a:rPr>
-              <a:t>Nobody has shipped yet - the day that closes the biggest gap (publishing 1.6)  ·  Instructor: Clynton Botterill</a:t>
-            </a:r>
-            <a:endParaRPr lang="en-US" sz="1200" dirty="0"/>
-          </a:p>
-        </p:txBody>
-      </p:sp>
-    </p:spTree>
-  </p:cSld>
-  <p:clrMapOvr>
-    <a:masterClrMapping/>
-  </p:clrMapOvr>
-</p:sld>
+<ns0:sld xmlns:ns0="http://schemas.openxmlformats.org/presentationml/2006/main" xmlns:ns1="http://schemas.openxmlformats.org/drawingml/2006/main">
+  <ns0:cSld name="Slide 1">
+    <ns0:bg>
+      <ns0:bgPr>
+        <ns1:solidFill>
+          <ns1:srgbClr val="0B2545"/>
+        </ns1:solidFill>
+      </ns0:bgPr>
+    </ns0:bg>
+    <ns0:spTree>
+      <ns0:nvGrpSpPr>
+        <ns0:cNvPr id="1" name=""/>
+        <ns0:cNvGrpSpPr/>
+        <ns0:nvPr/>
+      </ns0:nvGrpSpPr>
+      <ns0:grpSpPr>
+        <ns1:xfrm>
+          <ns1:off x="0" y="0"/>
+          <ns1:ext cx="0" cy="0"/>
+          <ns1:chOff x="0" y="0"/>
+          <ns1:chExt cx="0" cy="0"/>
+        </ns1:xfrm>
+      </ns0:grpSpPr>
+      <ns0:sp>
+        <ns0:nvSpPr>
+          <ns0:cNvPr id="2" name="Shape 0"/>
+          <ns0:cNvSpPr/>
+          <ns0:nvPr/>
+        </ns0:nvSpPr>
+        <ns0:spPr>
+          <ns1:xfrm>
+            <ns1:off x="9262872" y="-1463040"/>
+            <ns1:ext cx="4754880" cy="4754880"/>
+          </ns1:xfrm>
+          <ns1:prstGeom prst="ellipse">
+            <ns1:avLst/>
+          </ns1:prstGeom>
+          <ns1:solidFill>
+            <ns1:srgbClr val="13315C"/>
+          </ns1:solidFill>
+          <ns1:ln w="12700">
+            <ns1:solidFill>
+              <ns1:srgbClr val="13315C"/>
+            </ns1:solidFill>
+            <ns1:prstDash val="solid"/>
+          </ns1:ln>
+        </ns0:spPr>
+      </ns0:sp>
+      <ns0:sp>
+        <ns0:nvSpPr>
+          <ns0:cNvPr id="3" name="Shape 1"/>
+          <ns0:cNvSpPr/>
+          <ns0:nvPr/>
+        </ns0:nvSpPr>
+        <ns0:spPr>
+          <ns1:xfrm>
+            <ns1:off x="10543032" y="4480560"/>
+            <ns1:ext cx="3108960" cy="3108960"/>
+          </ns1:xfrm>
+          <ns1:prstGeom prst="ellipse">
+            <ns1:avLst/>
+          </ns1:prstGeom>
+          <ns1:solidFill>
+            <ns1:srgbClr val="C9A227"/>
+          </ns1:solidFill>
+          <ns1:ln w="12700">
+            <ns1:solidFill>
+              <ns1:srgbClr val="C9A227"/>
+            </ns1:solidFill>
+            <ns1:prstDash val="solid"/>
+          </ns1:ln>
+        </ns0:spPr>
+      </ns0:sp>
+      <ns0:sp>
+        <ns0:nvSpPr>
+          <ns0:cNvPr id="4" name="Text 2"/>
+          <ns0:cNvSpPr txBox="1"/>
+          <ns0:nvPr/>
+        </ns0:nvSpPr>
+        <ns0:spPr>
+          <ns1:xfrm>
+            <ns1:off x="548640" y="731520"/>
+            <ns1:ext cx="7315200" cy="365760"/>
+          </ns1:xfrm>
+          <ns1:prstGeom prst="rect">
+            <ns1:avLst/>
+          </ns1:prstGeom>
+          <ns1:noFill/>
+          <ns1:ln/>
+        </ns0:spPr>
+        <ns0:txBody>
+          <ns1:bodyPr wrap="square" lIns="0" tIns="0" rIns="0" bIns="0" rtlCol="0" anchor="ctr"/>
+          <ns1:lstStyle/>
+          <ns1:p>
+            <ns1:pPr indent="0" marL="0">
+              <ns1:buNone/>
+            </ns1:pPr>
+            <ns1:r>
+              <ns1:rPr lang="en-US" sz="1200" spc="400" kern="0" dirty="0">
+                <ns1:solidFill>
+                  <ns1:srgbClr val="E3C766"/>
+                </ns1:solidFill>
+                <ns1:latin typeface="Calibri" pitchFamily="34" charset="0"/>
+                <ns1:ea typeface="Calibri" pitchFamily="34" charset="-122"/>
+                <ns1:cs typeface="Calibri" pitchFamily="34" charset="-120"/>
+              </ns1:rPr>
+              <ns1:t>MO INTEGRATIONS  ·  TECHNICAL TRAINING</ns1:t>
+            </ns1:r>
+            <ns1:endParaRPr lang="en-US" sz="1200" dirty="0"/>
+          </ns1:p>
+        </ns0:txBody>
+      </ns0:sp>
+      <ns0:sp>
+        <ns0:nvSpPr>
+          <ns0:cNvPr id="5" name="Text 3"/>
+          <ns0:cNvSpPr txBox="1"/>
+          <ns0:nvPr/>
+        </ns0:nvSpPr>
+        <ns0:spPr>
+          <ns1:xfrm>
+            <ns1:off x="548640" y="1371600"/>
+            <ns1:ext cx="8229600" cy="548640"/>
+          </ns1:xfrm>
+          <ns1:prstGeom prst="rect">
+            <ns1:avLst/>
+          </ns1:prstGeom>
+          <ns1:noFill/>
+          <ns1:ln/>
+        </ns0:spPr>
+        <ns0:txBody>
+          <ns1:bodyPr wrap="square" lIns="0" tIns="0" rIns="0" bIns="0" rtlCol="0" anchor="ctr"/>
+          <ns1:lstStyle/>
+          <ns1:p>
+            <ns1:pPr indent="0" marL="0">
+              <ns1:buNone/>
+            </ns1:pPr>
+            <ns1:r>
+              <ns1:rPr lang="en-US" sz="1800" dirty="0">
+                <ns1:solidFill>
+                  <ns1:srgbClr val="D7DEE8"/>
+                </ns1:solidFill>
+                <ns1:latin typeface="Calibri" pitchFamily="34" charset="0"/>
+                <ns1:ea typeface="Calibri" pitchFamily="34" charset="-122"/>
+                <ns1:cs typeface="Calibri" pitchFamily="34" charset="-120"/>
+              </ns1:rPr>
+              <ns1:t>Flutter Mobile Application Development · 5-Day Programme</ns1:t>
+            </ns1:r>
+            <ns1:endParaRPr lang="en-US" sz="1800" dirty="0"/>
+          </ns1:p>
+        </ns0:txBody>
+      </ns0:sp>
+      <ns0:sp>
+        <ns0:nvSpPr>
+          <ns0:cNvPr id="6" name="Text 4"/>
+          <ns0:cNvSpPr txBox="1"/>
+          <ns0:nvPr/>
+        </ns0:nvSpPr>
+        <ns0:spPr>
+          <ns1:xfrm>
+            <ns1:off x="548640" y="2103120"/>
+            <ns1:ext cx="8686800" cy="1463040"/>
+          </ns1:xfrm>
+          <ns1:prstGeom prst="rect">
+            <ns1:avLst/>
+          </ns1:prstGeom>
+          <ns1:noFill/>
+          <ns1:ln/>
+        </ns0:spPr>
+        <ns0:txBody>
+          <ns1:bodyPr wrap="square" lIns="0" tIns="0" rIns="0" bIns="0" rtlCol="0" anchor="t"/>
+          <ns1:lstStyle/>
+          <ns1:p>
+            <ns1:pPr indent="0" marL="0">
+              <ns1:buNone/>
+            </ns1:pPr>
+            <ns1:r>
+              <ns1:rPr lang="en-US" sz="4800" b="1" dirty="0">
+                <ns1:solidFill>
+                  <ns1:srgbClr val="FFFFFF"/>
+                </ns1:solidFill>
+                <ns1:latin typeface="Calibri" pitchFamily="34" charset="0"/>
+                <ns1:ea typeface="Calibri" pitchFamily="34" charset="-122"/>
+                <ns1:cs typeface="Calibri" pitchFamily="34" charset="-120"/>
+              </ns1:rPr>
+              <ns1:t>Day 5</ns1:t>
+            </ns1:r>
+            <ns1:endParaRPr lang="en-US" sz="4800" dirty="0"/>
+          </ns1:p>
+          <ns1:p>
+            <ns1:pPr indent="0" marL="0">
+              <ns1:buNone/>
+            </ns1:pPr>
+            <ns1:r>
+              <ns1:rPr lang="en-US" sz="4800" b="1" dirty="0">
+                <ns1:solidFill>
+                  <ns1:srgbClr val="FFFFFF"/>
+                </ns1:solidFill>
+                <ns1:latin typeface="Calibri" pitchFamily="34" charset="0"/>
+                <ns1:ea typeface="Calibri" pitchFamily="34" charset="-122"/>
+                <ns1:cs typeface="Calibri" pitchFamily="34" charset="-120"/>
+              </ns1:rPr>
+              <ns1:t>Testing, CI/CD &amp; Shipping</ns1:t>
+            </ns1:r>
+            <ns1:endParaRPr lang="en-US" sz="4800" dirty="0"/>
+          </ns1:p>
+        </ns0:txBody>
+      </ns0:sp>
+      <ns0:sp>
+        <ns0:nvSpPr>
+          <ns0:cNvPr id="7" name="Text 5"/>
+          <ns0:cNvSpPr txBox="1"/>
+          <ns0:nvPr/>
+        </ns0:nvSpPr>
+        <ns0:spPr>
+          <ns1:xfrm>
+            <ns1:off x="548640" y="3657600"/>
+            <ns1:ext cx="8229600" cy="731520"/>
+          </ns1:xfrm>
+          <ns1:prstGeom prst="rect">
+            <ns1:avLst/>
+          </ns1:prstGeom>
+          <ns1:noFill/>
+          <ns1:ln/>
+        </ns0:spPr>
+        <ns0:txBody>
+          <ns1:bodyPr wrap="square" lIns="0" tIns="0" rIns="0" bIns="0" rtlCol="0" anchor="ctr"/>
+          <ns1:lstStyle/>
+          <ns1:p>
+            <ns1:pPr indent="0" marL="0">
+              <ns1:buNone/>
+            </ns1:pPr>
+            <ns1:r>
+              <ns1:rPr lang="en-US" sz="2000" dirty="0">
+                <ns1:solidFill>
+                  <ns1:srgbClr val="E3C766"/>
+                </ns1:solidFill>
+                <ns1:latin typeface="Calibri" pitchFamily="34" charset="0"/>
+                <ns1:ea typeface="Calibri" pitchFamily="34" charset="-122"/>
+                <ns1:cs typeface="Calibri" pitchFamily="34" charset="-120"/>
+              </ns1:rPr>
+              <ns1:t>Tests · Build flavours &amp; white-label · Signing &amp; store release · CI · Best practices &amp; project clinic</ns1:t>
+            </ns1:r>
+            <ns1:endParaRPr lang="en-US" sz="2000" dirty="0"/>
+          </ns1:p>
+        </ns0:txBody>
+      </ns0:sp>
+      <ns0:sp>
+        <ns0:nvSpPr>
+          <ns0:cNvPr id="8" name="Text 6"/>
+          <ns0:cNvSpPr txBox="1"/>
+          <ns0:nvPr/>
+        </ns0:nvSpPr>
+        <ns0:spPr>
+          <ns1:xfrm>
+            <ns1:off x="548640" y="5760720"/>
+            <ns1:ext cx="8229600" cy="457200"/>
+          </ns1:xfrm>
+          <ns1:prstGeom prst="rect">
+            <ns1:avLst/>
+          </ns1:prstGeom>
+          <ns1:noFill/>
+          <ns1:ln/>
+        </ns0:spPr>
+        <ns0:txBody>
+          <ns1:bodyPr wrap="square" lIns="0" tIns="0" rIns="0" bIns="0" rtlCol="0" anchor="ctr"/>
+          <ns1:lstStyle/>
+          <ns1:p>
+            <ns1:pPr indent="0" marL="0">
+              <ns1:buNone/>
+            </ns1:pPr>
+            <ns1:r>
+              <ns1:rPr lang="en-US" sz="1200" dirty="0">
+                <ns1:solidFill>
+                  <ns1:srgbClr val="AAB6C4"/>
+                </ns1:solidFill>
+                <ns1:latin typeface="Calibri" pitchFamily="34" charset="0"/>
+                <ns1:ea typeface="Calibri" pitchFamily="34" charset="-122"/>
+                <ns1:cs typeface="Calibri" pitchFamily="34" charset="-120"/>
+              </ns1:rPr>
+              <ns1:t>Testing, flavours, signing and the store  ·  Instructor: Clynton Botterill</ns1:t>
+            </ns1:r>
+            <ns1:endParaRPr lang="en-US" sz="1200" dirty="0"/>
+          </ns1:p>
+        </ns0:txBody>
+      </ns0:sp>
+    </ns0:spTree>
+  </ns0:cSld>
+  <ns0:clrMapOvr>
+    <ns1:masterClrMapping/>
+  </ns0:clrMapOvr>
+</ns0:sld>
 </file>
 
 <file path=ppt/slides/slide10.xml><?xml version="1.0" encoding="utf-8"?>
@@ -34115,1289 +28928,6 @@
                 <a:cs typeface="Calibri" pitchFamily="34" charset="-120"/>
               </a:rPr>
               <a:t>45</a:t>
-            </a:r>
-            <a:endParaRPr lang="en-US" sz="900" dirty="0"/>
-          </a:p>
-        </p:txBody>
-      </p:sp>
-    </p:spTree>
-  </p:cSld>
-  <p:clrMapOvr>
-    <a:masterClrMapping/>
-  </p:clrMapOvr>
-</p:sld>
-</file>
-
-<file path=ppt/slides/slide47.xml><?xml version="1.0" encoding="utf-8"?>
-<p:sld xmlns:a="http://schemas.openxmlformats.org/drawingml/2006/main" xmlns:r="http://schemas.openxmlformats.org/officeDocument/2006/relationships" xmlns:p="http://schemas.openxmlformats.org/presentationml/2006/main">
-  <p:cSld name="Slide 47">
-    <p:bg>
-      <p:bgPr>
-        <a:solidFill>
-          <a:srgbClr val="FFFFFF"/>
-        </a:solidFill>
-      </p:bgPr>
-    </p:bg>
-    <p:spTree>
-      <p:nvGrpSpPr>
-        <p:cNvPr id="1" name=""/>
-        <p:cNvGrpSpPr/>
-        <p:nvPr/>
-      </p:nvGrpSpPr>
-      <p:grpSpPr>
-        <a:xfrm>
-          <a:off x="0" y="0"/>
-          <a:ext cx="0" cy="0"/>
-          <a:chOff x="0" y="0"/>
-          <a:chExt cx="0" cy="0"/>
-        </a:xfrm>
-      </p:grpSpPr>
-      <p:sp>
-        <p:nvSpPr>
-          <p:cNvPr id="2" name="Text 0"/>
-          <p:cNvSpPr txBox="1"/>
-          <p:nvPr/>
-        </p:nvSpPr>
-        <p:spPr>
-          <a:xfrm>
-            <a:off x="548640" y="365760"/>
-            <a:ext cx="11091672" cy="731520"/>
-          </a:xfrm>
-          <a:prstGeom prst="rect">
-            <a:avLst/>
-          </a:prstGeom>
-          <a:noFill/>
-          <a:ln/>
-        </p:spPr>
-        <p:txBody>
-          <a:bodyPr wrap="square" lIns="0" tIns="0" rIns="0" bIns="0" rtlCol="0" anchor="ctr"/>
-          <a:lstStyle/>
-          <a:p>
-            <a:pPr indent="0" marL="0">
-              <a:buNone/>
-            </a:pPr>
-            <a:r>
-              <a:rPr lang="en-US" sz="3000" b="1" dirty="0">
-                <a:solidFill>
-                  <a:srgbClr val="0B2545"/>
-                </a:solidFill>
-                <a:latin typeface="Calibri" pitchFamily="34" charset="0"/>
-                <a:ea typeface="Calibri" pitchFamily="34" charset="-122"/>
-                <a:cs typeface="Calibri" pitchFamily="34" charset="-120"/>
-              </a:rPr>
-              <a:t>PLAN B · When it breaks in class</a:t>
-            </a:r>
-            <a:endParaRPr lang="en-US" sz="3000" dirty="0"/>
-          </a:p>
-        </p:txBody>
-      </p:sp>
-      <p:graphicFrame>
-        <p:nvGraphicFramePr>
-          <p:cNvPr id="48" name="Table 0"/>
-          <p:cNvGraphicFramePr>
-            <a:graphicFrameLocks noGrp="1"/>
-          </p:cNvGraphicFramePr>
-          <p:nvPr>
-            <p:extLst>
-              <p:ext uri="{D42A27DB-BD31-4B8C-83A1-F6EECF244321}">
-                <p14:modId xmlns:p14="http://schemas.microsoft.com/office/powerpoint/2010/main" val="1579011935"/>
-              </p:ext>
-            </p:extLst>
-          </p:nvPr>
-        </p:nvGraphicFramePr>
-        <p:xfrm>
-          <a:off x="548640" y="1325880"/>
-          <a:ext cx="11091672" cy="914400"/>
-        </p:xfrm>
-        <a:graphic>
-          <a:graphicData uri="http://schemas.openxmlformats.org/drawingml/2006/table">
-            <a:tbl>
-              <a:tblPr/>
-              <a:tblGrid>
-                <a:gridCol w="3993002"/>
-                <a:gridCol w="7098670"/>
-              </a:tblGrid>
-              <a:tr h="0">
-                <a:tc>
-                  <a:txBody>
-                    <a:bodyPr/>
-                    <a:lstStyle/>
-                    <a:p>
-                      <a:pPr indent="0" marL="0">
-                        <a:buNone/>
-                      </a:pPr>
-                      <a:r>
-                        <a:rPr lang="en-US" sz="1050" b="1" dirty="0">
-                          <a:solidFill>
-                            <a:srgbClr val="FFFFFF"/>
-                          </a:solidFill>
-                          <a:latin typeface="Calibri" pitchFamily="34" charset="0"/>
-                          <a:ea typeface="Calibri" pitchFamily="34" charset="-122"/>
-                          <a:cs typeface="Calibri" pitchFamily="34" charset="-120"/>
-                        </a:rPr>
-                        <a:t>If this happens</a:t>
-                      </a:r>
-                      <a:endParaRPr lang="en-US" sz="1050" dirty="0">
-                        <a:latin typeface="Calibri" charset="0"/>
-                        <a:ea typeface="Calibri" charset="0"/>
-                        <a:cs typeface="Calibri" charset="0"/>
-                      </a:endParaRPr>
-                    </a:p>
-                  </a:txBody>
-                  <a:tcPr marL="54864" marR="54864" marT="54864" marB="54864" anchor="ctr">
-                    <a:lnL w="6350" cap="flat" cmpd="sng" algn="ctr">
-                      <a:solidFill>
-                        <a:srgbClr val="D9DEE3"/>
-                      </a:solidFill>
-                      <a:prstDash val="solid"/>
-                      <a:round/>
-                      <a:headEnd type="none" w="med" len="med"/>
-                      <a:tailEnd type="none" w="med" len="med"/>
-                    </a:lnL>
-                    <a:lnR w="6350" cap="flat" cmpd="sng" algn="ctr">
-                      <a:solidFill>
-                        <a:srgbClr val="D9DEE3"/>
-                      </a:solidFill>
-                      <a:prstDash val="solid"/>
-                      <a:round/>
-                      <a:headEnd type="none" w="med" len="med"/>
-                      <a:tailEnd type="none" w="med" len="med"/>
-                    </a:lnR>
-                    <a:lnT w="6350" cap="flat" cmpd="sng" algn="ctr">
-                      <a:solidFill>
-                        <a:srgbClr val="D9DEE3"/>
-                      </a:solidFill>
-                      <a:prstDash val="solid"/>
-                      <a:round/>
-                      <a:headEnd type="none" w="med" len="med"/>
-                      <a:tailEnd type="none" w="med" len="med"/>
-                    </a:lnT>
-                    <a:lnB w="6350" cap="flat" cmpd="sng" algn="ctr">
-                      <a:solidFill>
-                        <a:srgbClr val="D9DEE3"/>
-                      </a:solidFill>
-                      <a:prstDash val="solid"/>
-                      <a:round/>
-                      <a:headEnd type="none" w="med" len="med"/>
-                      <a:tailEnd type="none" w="med" len="med"/>
-                    </a:lnB>
-                    <a:solidFill>
-                      <a:srgbClr val="0B2545"/>
-                    </a:solidFill>
-                  </a:tcPr>
-                </a:tc>
-                <a:tc>
-                  <a:txBody>
-                    <a:bodyPr/>
-                    <a:lstStyle/>
-                    <a:p>
-                      <a:pPr indent="0" marL="0">
-                        <a:buNone/>
-                      </a:pPr>
-                      <a:r>
-                        <a:rPr lang="en-US" sz="1050" b="1" dirty="0">
-                          <a:solidFill>
-                            <a:srgbClr val="FFFFFF"/>
-                          </a:solidFill>
-                          <a:latin typeface="Calibri" pitchFamily="34" charset="0"/>
-                          <a:ea typeface="Calibri" pitchFamily="34" charset="-122"/>
-                          <a:cs typeface="Calibri" pitchFamily="34" charset="-120"/>
-                        </a:rPr>
-                        <a:t>Do this instead</a:t>
-                      </a:r>
-                      <a:endParaRPr lang="en-US" sz="1050" dirty="0">
-                        <a:latin typeface="Calibri" charset="0"/>
-                        <a:ea typeface="Calibri" charset="0"/>
-                        <a:cs typeface="Calibri" charset="0"/>
-                      </a:endParaRPr>
-                    </a:p>
-                  </a:txBody>
-                  <a:tcPr marL="54864" marR="54864" marT="54864" marB="54864" anchor="ctr">
-                    <a:lnL w="6350" cap="flat" cmpd="sng" algn="ctr">
-                      <a:solidFill>
-                        <a:srgbClr val="D9DEE3"/>
-                      </a:solidFill>
-                      <a:prstDash val="solid"/>
-                      <a:round/>
-                      <a:headEnd type="none" w="med" len="med"/>
-                      <a:tailEnd type="none" w="med" len="med"/>
-                    </a:lnL>
-                    <a:lnR w="6350" cap="flat" cmpd="sng" algn="ctr">
-                      <a:solidFill>
-                        <a:srgbClr val="D9DEE3"/>
-                      </a:solidFill>
-                      <a:prstDash val="solid"/>
-                      <a:round/>
-                      <a:headEnd type="none" w="med" len="med"/>
-                      <a:tailEnd type="none" w="med" len="med"/>
-                    </a:lnR>
-                    <a:lnT w="6350" cap="flat" cmpd="sng" algn="ctr">
-                      <a:solidFill>
-                        <a:srgbClr val="D9DEE3"/>
-                      </a:solidFill>
-                      <a:prstDash val="solid"/>
-                      <a:round/>
-                      <a:headEnd type="none" w="med" len="med"/>
-                      <a:tailEnd type="none" w="med" len="med"/>
-                    </a:lnT>
-                    <a:lnB w="6350" cap="flat" cmpd="sng" algn="ctr">
-                      <a:solidFill>
-                        <a:srgbClr val="D9DEE3"/>
-                      </a:solidFill>
-                      <a:prstDash val="solid"/>
-                      <a:round/>
-                      <a:headEnd type="none" w="med" len="med"/>
-                      <a:tailEnd type="none" w="med" len="med"/>
-                    </a:lnB>
-                    <a:solidFill>
-                      <a:srgbClr val="0B2545"/>
-                    </a:solidFill>
-                  </a:tcPr>
-                </a:tc>
-              </a:tr>
-              <a:tr h="0">
-                <a:tc>
-                  <a:txBody>
-                    <a:bodyPr/>
-                    <a:lstStyle/>
-                    <a:p>
-                      <a:pPr indent="0" marL="0">
-                        <a:buNone/>
-                      </a:pPr>
-                      <a:r>
-                        <a:rPr lang="en-US" sz="1050" b="1" dirty="0">
-                          <a:solidFill>
-                            <a:srgbClr val="1F2933"/>
-                          </a:solidFill>
-                          <a:latin typeface="Calibri" pitchFamily="34" charset="0"/>
-                          <a:ea typeface="Calibri" pitchFamily="34" charset="-122"/>
-                          <a:cs typeface="Calibri" pitchFamily="34" charset="-120"/>
-                        </a:rPr>
-                        <a:t>GitHub blocked, or a delegate has no account</a:t>
-                      </a:r>
-                      <a:endParaRPr lang="en-US" sz="1050" dirty="0">
-                        <a:latin typeface="Calibri" charset="0"/>
-                        <a:ea typeface="Calibri" charset="0"/>
-                        <a:cs typeface="Calibri" charset="0"/>
-                      </a:endParaRPr>
-                    </a:p>
-                  </a:txBody>
-                  <a:tcPr marL="54864" marR="54864" marT="54864" marB="54864" anchor="ctr">
-                    <a:lnL w="6350" cap="flat" cmpd="sng" algn="ctr">
-                      <a:solidFill>
-                        <a:srgbClr val="D9DEE3"/>
-                      </a:solidFill>
-                      <a:prstDash val="solid"/>
-                      <a:round/>
-                      <a:headEnd type="none" w="med" len="med"/>
-                      <a:tailEnd type="none" w="med" len="med"/>
-                    </a:lnL>
-                    <a:lnR w="6350" cap="flat" cmpd="sng" algn="ctr">
-                      <a:solidFill>
-                        <a:srgbClr val="D9DEE3"/>
-                      </a:solidFill>
-                      <a:prstDash val="solid"/>
-                      <a:round/>
-                      <a:headEnd type="none" w="med" len="med"/>
-                      <a:tailEnd type="none" w="med" len="med"/>
-                    </a:lnR>
-                    <a:lnT w="6350" cap="flat" cmpd="sng" algn="ctr">
-                      <a:solidFill>
-                        <a:srgbClr val="D9DEE3"/>
-                      </a:solidFill>
-                      <a:prstDash val="solid"/>
-                      <a:round/>
-                      <a:headEnd type="none" w="med" len="med"/>
-                      <a:tailEnd type="none" w="med" len="med"/>
-                    </a:lnT>
-                    <a:lnB w="6350" cap="flat" cmpd="sng" algn="ctr">
-                      <a:solidFill>
-                        <a:srgbClr val="D9DEE3"/>
-                      </a:solidFill>
-                      <a:prstDash val="solid"/>
-                      <a:round/>
-                      <a:headEnd type="none" w="med" len="med"/>
-                      <a:tailEnd type="none" w="med" len="med"/>
-                    </a:lnB>
-                    <a:solidFill>
-                      <a:srgbClr val="FFFFFF"/>
-                    </a:solidFill>
-                  </a:tcPr>
-                </a:tc>
-                <a:tc>
-                  <a:txBody>
-                    <a:bodyPr/>
-                    <a:lstStyle/>
-                    <a:p>
-                      <a:pPr indent="0" marL="0">
-                        <a:buNone/>
-                      </a:pPr>
-                      <a:r>
-                        <a:rPr lang="en-US" sz="1050" dirty="0">
-                          <a:solidFill>
-                            <a:srgbClr val="1F2933"/>
-                          </a:solidFill>
-                          <a:latin typeface="Calibri" pitchFamily="34" charset="0"/>
-                          <a:ea typeface="Calibri" pitchFamily="34" charset="-122"/>
-                          <a:cs typeface="Calibri" pitchFamily="34" charset="-120"/>
-                        </a:rPr>
-                        <a:t>Show your own green Actions run on the projector. Delegates commit ci.yml locally and validate the YAML in the editor. Understanding the pipeline is the objective; running it is a bonus.</a:t>
-                      </a:r>
-                      <a:endParaRPr lang="en-US" sz="1050" dirty="0">
-                        <a:latin typeface="Calibri" charset="0"/>
-                        <a:ea typeface="Calibri" charset="0"/>
-                        <a:cs typeface="Calibri" charset="0"/>
-                      </a:endParaRPr>
-                    </a:p>
-                  </a:txBody>
-                  <a:tcPr marL="54864" marR="54864" marT="54864" marB="54864" anchor="ctr">
-                    <a:lnL w="6350" cap="flat" cmpd="sng" algn="ctr">
-                      <a:solidFill>
-                        <a:srgbClr val="D9DEE3"/>
-                      </a:solidFill>
-                      <a:prstDash val="solid"/>
-                      <a:round/>
-                      <a:headEnd type="none" w="med" len="med"/>
-                      <a:tailEnd type="none" w="med" len="med"/>
-                    </a:lnL>
-                    <a:lnR w="6350" cap="flat" cmpd="sng" algn="ctr">
-                      <a:solidFill>
-                        <a:srgbClr val="D9DEE3"/>
-                      </a:solidFill>
-                      <a:prstDash val="solid"/>
-                      <a:round/>
-                      <a:headEnd type="none" w="med" len="med"/>
-                      <a:tailEnd type="none" w="med" len="med"/>
-                    </a:lnR>
-                    <a:lnT w="6350" cap="flat" cmpd="sng" algn="ctr">
-                      <a:solidFill>
-                        <a:srgbClr val="D9DEE3"/>
-                      </a:solidFill>
-                      <a:prstDash val="solid"/>
-                      <a:round/>
-                      <a:headEnd type="none" w="med" len="med"/>
-                      <a:tailEnd type="none" w="med" len="med"/>
-                    </a:lnT>
-                    <a:lnB w="6350" cap="flat" cmpd="sng" algn="ctr">
-                      <a:solidFill>
-                        <a:srgbClr val="D9DEE3"/>
-                      </a:solidFill>
-                      <a:prstDash val="solid"/>
-                      <a:round/>
-                      <a:headEnd type="none" w="med" len="med"/>
-                      <a:tailEnd type="none" w="med" len="med"/>
-                    </a:lnB>
-                    <a:solidFill>
-                      <a:srgbClr val="FFFFFF"/>
-                    </a:solidFill>
-                  </a:tcPr>
-                </a:tc>
-              </a:tr>
-              <a:tr h="0">
-                <a:tc>
-                  <a:txBody>
-                    <a:bodyPr/>
-                    <a:lstStyle/>
-                    <a:p>
-                      <a:pPr indent="0" marL="0">
-                        <a:buNone/>
-                      </a:pPr>
-                      <a:r>
-                        <a:rPr lang="en-US" sz="1050" b="1" dirty="0">
-                          <a:solidFill>
-                            <a:srgbClr val="1F2933"/>
-                          </a:solidFill>
-                          <a:latin typeface="Calibri" pitchFamily="34" charset="0"/>
-                          <a:ea typeface="Calibri" pitchFamily="34" charset="-122"/>
-                          <a:cs typeface="Calibri" pitchFamily="34" charset="-120"/>
-                        </a:rPr>
-                        <a:t>Keystore or Gradle signing edit fails</a:t>
-                      </a:r>
-                      <a:endParaRPr lang="en-US" sz="1050" dirty="0">
-                        <a:latin typeface="Calibri" charset="0"/>
-                        <a:ea typeface="Calibri" charset="0"/>
-                        <a:cs typeface="Calibri" charset="0"/>
-                      </a:endParaRPr>
-                    </a:p>
-                  </a:txBody>
-                  <a:tcPr marL="54864" marR="54864" marT="54864" marB="54864" anchor="ctr">
-                    <a:lnL w="6350" cap="flat" cmpd="sng" algn="ctr">
-                      <a:solidFill>
-                        <a:srgbClr val="D9DEE3"/>
-                      </a:solidFill>
-                      <a:prstDash val="solid"/>
-                      <a:round/>
-                      <a:headEnd type="none" w="med" len="med"/>
-                      <a:tailEnd type="none" w="med" len="med"/>
-                    </a:lnL>
-                    <a:lnR w="6350" cap="flat" cmpd="sng" algn="ctr">
-                      <a:solidFill>
-                        <a:srgbClr val="D9DEE3"/>
-                      </a:solidFill>
-                      <a:prstDash val="solid"/>
-                      <a:round/>
-                      <a:headEnd type="none" w="med" len="med"/>
-                      <a:tailEnd type="none" w="med" len="med"/>
-                    </a:lnR>
-                    <a:lnT w="6350" cap="flat" cmpd="sng" algn="ctr">
-                      <a:solidFill>
-                        <a:srgbClr val="D9DEE3"/>
-                      </a:solidFill>
-                      <a:prstDash val="solid"/>
-                      <a:round/>
-                      <a:headEnd type="none" w="med" len="med"/>
-                      <a:tailEnd type="none" w="med" len="med"/>
-                    </a:lnT>
-                    <a:lnB w="6350" cap="flat" cmpd="sng" algn="ctr">
-                      <a:solidFill>
-                        <a:srgbClr val="D9DEE3"/>
-                      </a:solidFill>
-                      <a:prstDash val="solid"/>
-                      <a:round/>
-                      <a:headEnd type="none" w="med" len="med"/>
-                      <a:tailEnd type="none" w="med" len="med"/>
-                    </a:lnB>
-                    <a:solidFill>
-                      <a:srgbClr val="F3F5F8"/>
-                    </a:solidFill>
-                  </a:tcPr>
-                </a:tc>
-                <a:tc>
-                  <a:txBody>
-                    <a:bodyPr/>
-                    <a:lstStyle/>
-                    <a:p>
-                      <a:pPr indent="0" marL="0">
-                        <a:buNone/>
-                      </a:pPr>
-                      <a:r>
-                        <a:rPr lang="en-US" sz="950" dirty="0">
-                          <a:solidFill>
-                            <a:srgbClr val="1F2933"/>
-                          </a:solidFill>
-                          <a:latin typeface="Courier New" pitchFamily="34" charset="0"/>
-                          <a:ea typeface="Courier New" pitchFamily="34" charset="-122"/>
-                          <a:cs typeface="Courier New" pitchFamily="34" charset="-120"/>
-                        </a:rPr>
-                        <a:t>git checkout lab-5-3-solution for the Gradle block, then build. The deliverable is a signed AAB in their hands, not a hand-typed Gradle file.</a:t>
-                      </a:r>
-                      <a:endParaRPr lang="en-US" sz="950" dirty="0">
-                        <a:latin typeface="Courier New" charset="0"/>
-                        <a:ea typeface="Courier New" charset="0"/>
-                        <a:cs typeface="Courier New" charset="0"/>
-                      </a:endParaRPr>
-                    </a:p>
-                  </a:txBody>
-                  <a:tcPr marL="54864" marR="54864" marT="54864" marB="54864" anchor="ctr">
-                    <a:lnL w="6350" cap="flat" cmpd="sng" algn="ctr">
-                      <a:solidFill>
-                        <a:srgbClr val="D9DEE3"/>
-                      </a:solidFill>
-                      <a:prstDash val="solid"/>
-                      <a:round/>
-                      <a:headEnd type="none" w="med" len="med"/>
-                      <a:tailEnd type="none" w="med" len="med"/>
-                    </a:lnL>
-                    <a:lnR w="6350" cap="flat" cmpd="sng" algn="ctr">
-                      <a:solidFill>
-                        <a:srgbClr val="D9DEE3"/>
-                      </a:solidFill>
-                      <a:prstDash val="solid"/>
-                      <a:round/>
-                      <a:headEnd type="none" w="med" len="med"/>
-                      <a:tailEnd type="none" w="med" len="med"/>
-                    </a:lnR>
-                    <a:lnT w="6350" cap="flat" cmpd="sng" algn="ctr">
-                      <a:solidFill>
-                        <a:srgbClr val="D9DEE3"/>
-                      </a:solidFill>
-                      <a:prstDash val="solid"/>
-                      <a:round/>
-                      <a:headEnd type="none" w="med" len="med"/>
-                      <a:tailEnd type="none" w="med" len="med"/>
-                    </a:lnT>
-                    <a:lnB w="6350" cap="flat" cmpd="sng" algn="ctr">
-                      <a:solidFill>
-                        <a:srgbClr val="D9DEE3"/>
-                      </a:solidFill>
-                      <a:prstDash val="solid"/>
-                      <a:round/>
-                      <a:headEnd type="none" w="med" len="med"/>
-                      <a:tailEnd type="none" w="med" len="med"/>
-                    </a:lnB>
-                    <a:solidFill>
-                      <a:srgbClr val="F3F5F8"/>
-                    </a:solidFill>
-                  </a:tcPr>
-                </a:tc>
-              </a:tr>
-              <a:tr h="0">
-                <a:tc>
-                  <a:txBody>
-                    <a:bodyPr/>
-                    <a:lstStyle/>
-                    <a:p>
-                      <a:pPr indent="0" marL="0">
-                        <a:buNone/>
-                      </a:pPr>
-                      <a:r>
-                        <a:rPr lang="en-US" sz="1050" b="1" dirty="0">
-                          <a:solidFill>
-                            <a:srgbClr val="1F2933"/>
-                          </a:solidFill>
-                          <a:latin typeface="Calibri" pitchFamily="34" charset="0"/>
-                          <a:ea typeface="Calibri" pitchFamily="34" charset="-122"/>
-                          <a:cs typeface="Calibri" pitchFamily="34" charset="-120"/>
-                        </a:rPr>
-                        <a:t>Play Console / App Store Connect blocked at the venue</a:t>
-                      </a:r>
-                      <a:endParaRPr lang="en-US" sz="1050" dirty="0">
-                        <a:latin typeface="Calibri" charset="0"/>
-                        <a:ea typeface="Calibri" charset="0"/>
-                        <a:cs typeface="Calibri" charset="0"/>
-                      </a:endParaRPr>
-                    </a:p>
-                  </a:txBody>
-                  <a:tcPr marL="54864" marR="54864" marT="54864" marB="54864" anchor="ctr">
-                    <a:lnL w="6350" cap="flat" cmpd="sng" algn="ctr">
-                      <a:solidFill>
-                        <a:srgbClr val="D9DEE3"/>
-                      </a:solidFill>
-                      <a:prstDash val="solid"/>
-                      <a:round/>
-                      <a:headEnd type="none" w="med" len="med"/>
-                      <a:tailEnd type="none" w="med" len="med"/>
-                    </a:lnL>
-                    <a:lnR w="6350" cap="flat" cmpd="sng" algn="ctr">
-                      <a:solidFill>
-                        <a:srgbClr val="D9DEE3"/>
-                      </a:solidFill>
-                      <a:prstDash val="solid"/>
-                      <a:round/>
-                      <a:headEnd type="none" w="med" len="med"/>
-                      <a:tailEnd type="none" w="med" len="med"/>
-                    </a:lnR>
-                    <a:lnT w="6350" cap="flat" cmpd="sng" algn="ctr">
-                      <a:solidFill>
-                        <a:srgbClr val="D9DEE3"/>
-                      </a:solidFill>
-                      <a:prstDash val="solid"/>
-                      <a:round/>
-                      <a:headEnd type="none" w="med" len="med"/>
-                      <a:tailEnd type="none" w="med" len="med"/>
-                    </a:lnT>
-                    <a:lnB w="6350" cap="flat" cmpd="sng" algn="ctr">
-                      <a:solidFill>
-                        <a:srgbClr val="D9DEE3"/>
-                      </a:solidFill>
-                      <a:prstDash val="solid"/>
-                      <a:round/>
-                      <a:headEnd type="none" w="med" len="med"/>
-                      <a:tailEnd type="none" w="med" len="med"/>
-                    </a:lnB>
-                    <a:solidFill>
-                      <a:srgbClr val="FFFFFF"/>
-                    </a:solidFill>
-                  </a:tcPr>
-                </a:tc>
-                <a:tc>
-                  <a:txBody>
-                    <a:bodyPr/>
-                    <a:lstStyle/>
-                    <a:p>
-                      <a:pPr indent="0" marL="0">
-                        <a:buNone/>
-                      </a:pPr>
-                      <a:r>
-                        <a:rPr lang="en-US" sz="1050" dirty="0">
-                          <a:solidFill>
-                            <a:srgbClr val="1F2933"/>
-                          </a:solidFill>
-                          <a:latin typeface="Calibri" pitchFamily="34" charset="0"/>
-                          <a:ea typeface="Calibri" pitchFamily="34" charset="-122"/>
-                          <a:cs typeface="Calibri" pitchFamily="34" charset="-120"/>
-                        </a:rPr>
-                        <a:t>Use the screenshot walkthrough in your slides. Capture those screenshots BEFORE Monday from your own consoles - do not rely on live access.</a:t>
-                      </a:r>
-                      <a:endParaRPr lang="en-US" sz="1050" dirty="0">
-                        <a:latin typeface="Calibri" charset="0"/>
-                        <a:ea typeface="Calibri" charset="0"/>
-                        <a:cs typeface="Calibri" charset="0"/>
-                      </a:endParaRPr>
-                    </a:p>
-                  </a:txBody>
-                  <a:tcPr marL="54864" marR="54864" marT="54864" marB="54864" anchor="ctr">
-                    <a:lnL w="6350" cap="flat" cmpd="sng" algn="ctr">
-                      <a:solidFill>
-                        <a:srgbClr val="D9DEE3"/>
-                      </a:solidFill>
-                      <a:prstDash val="solid"/>
-                      <a:round/>
-                      <a:headEnd type="none" w="med" len="med"/>
-                      <a:tailEnd type="none" w="med" len="med"/>
-                    </a:lnL>
-                    <a:lnR w="6350" cap="flat" cmpd="sng" algn="ctr">
-                      <a:solidFill>
-                        <a:srgbClr val="D9DEE3"/>
-                      </a:solidFill>
-                      <a:prstDash val="solid"/>
-                      <a:round/>
-                      <a:headEnd type="none" w="med" len="med"/>
-                      <a:tailEnd type="none" w="med" len="med"/>
-                    </a:lnR>
-                    <a:lnT w="6350" cap="flat" cmpd="sng" algn="ctr">
-                      <a:solidFill>
-                        <a:srgbClr val="D9DEE3"/>
-                      </a:solidFill>
-                      <a:prstDash val="solid"/>
-                      <a:round/>
-                      <a:headEnd type="none" w="med" len="med"/>
-                      <a:tailEnd type="none" w="med" len="med"/>
-                    </a:lnT>
-                    <a:lnB w="6350" cap="flat" cmpd="sng" algn="ctr">
-                      <a:solidFill>
-                        <a:srgbClr val="D9DEE3"/>
-                      </a:solidFill>
-                      <a:prstDash val="solid"/>
-                      <a:round/>
-                      <a:headEnd type="none" w="med" len="med"/>
-                      <a:tailEnd type="none" w="med" len="med"/>
-                    </a:lnB>
-                    <a:solidFill>
-                      <a:srgbClr val="FFFFFF"/>
-                    </a:solidFill>
-                  </a:tcPr>
-                </a:tc>
-              </a:tr>
-              <a:tr h="0">
-                <a:tc>
-                  <a:txBody>
-                    <a:bodyPr/>
-                    <a:lstStyle/>
-                    <a:p>
-                      <a:pPr indent="0" marL="0">
-                        <a:buNone/>
-                      </a:pPr>
-                      <a:r>
-                        <a:rPr lang="en-US" sz="1050" b="1" dirty="0">
-                          <a:solidFill>
-                            <a:srgbClr val="1F2933"/>
-                          </a:solidFill>
-                          <a:latin typeface="Calibri" pitchFamily="34" charset="0"/>
-                          <a:ea typeface="Calibri" pitchFamily="34" charset="-122"/>
-                          <a:cs typeface="Calibri" pitchFamily="34" charset="-120"/>
-                        </a:rPr>
-                        <a:t>A test will not pass and you cannot see why</a:t>
-                      </a:r>
-                      <a:endParaRPr lang="en-US" sz="1050" dirty="0">
-                        <a:latin typeface="Calibri" charset="0"/>
-                        <a:ea typeface="Calibri" charset="0"/>
-                        <a:cs typeface="Calibri" charset="0"/>
-                      </a:endParaRPr>
-                    </a:p>
-                  </a:txBody>
-                  <a:tcPr marL="54864" marR="54864" marT="54864" marB="54864" anchor="ctr">
-                    <a:lnL w="6350" cap="flat" cmpd="sng" algn="ctr">
-                      <a:solidFill>
-                        <a:srgbClr val="D9DEE3"/>
-                      </a:solidFill>
-                      <a:prstDash val="solid"/>
-                      <a:round/>
-                      <a:headEnd type="none" w="med" len="med"/>
-                      <a:tailEnd type="none" w="med" len="med"/>
-                    </a:lnL>
-                    <a:lnR w="6350" cap="flat" cmpd="sng" algn="ctr">
-                      <a:solidFill>
-                        <a:srgbClr val="D9DEE3"/>
-                      </a:solidFill>
-                      <a:prstDash val="solid"/>
-                      <a:round/>
-                      <a:headEnd type="none" w="med" len="med"/>
-                      <a:tailEnd type="none" w="med" len="med"/>
-                    </a:lnR>
-                    <a:lnT w="6350" cap="flat" cmpd="sng" algn="ctr">
-                      <a:solidFill>
-                        <a:srgbClr val="D9DEE3"/>
-                      </a:solidFill>
-                      <a:prstDash val="solid"/>
-                      <a:round/>
-                      <a:headEnd type="none" w="med" len="med"/>
-                      <a:tailEnd type="none" w="med" len="med"/>
-                    </a:lnT>
-                    <a:lnB w="6350" cap="flat" cmpd="sng" algn="ctr">
-                      <a:solidFill>
-                        <a:srgbClr val="D9DEE3"/>
-                      </a:solidFill>
-                      <a:prstDash val="solid"/>
-                      <a:round/>
-                      <a:headEnd type="none" w="med" len="med"/>
-                      <a:tailEnd type="none" w="med" len="med"/>
-                    </a:lnB>
-                    <a:solidFill>
-                      <a:srgbClr val="F3F5F8"/>
-                    </a:solidFill>
-                  </a:tcPr>
-                </a:tc>
-                <a:tc>
-                  <a:txBody>
-                    <a:bodyPr/>
-                    <a:lstStyle/>
-                    <a:p>
-                      <a:pPr indent="0" marL="0">
-                        <a:buNone/>
-                      </a:pPr>
-                      <a:r>
-                        <a:rPr lang="en-US" sz="1050" dirty="0">
-                          <a:solidFill>
-                            <a:srgbClr val="1F2933"/>
-                          </a:solidFill>
-                          <a:latin typeface="Calibri" pitchFamily="34" charset="0"/>
-                          <a:ea typeface="Calibri" pitchFamily="34" charset="-122"/>
-                          <a:cs typeface="Calibri" pitchFamily="34" charset="-120"/>
-                        </a:rPr>
-                        <a:t>Run flutter test --reporter expanded for the full stack. If it is a pumpAndSettle hang, it is the spinner - swap to pump(Duration). That single fix covers most test failures in this course.</a:t>
-                      </a:r>
-                      <a:endParaRPr lang="en-US" sz="1050" dirty="0">
-                        <a:latin typeface="Calibri" charset="0"/>
-                        <a:ea typeface="Calibri" charset="0"/>
-                        <a:cs typeface="Calibri" charset="0"/>
-                      </a:endParaRPr>
-                    </a:p>
-                  </a:txBody>
-                  <a:tcPr marL="54864" marR="54864" marT="54864" marB="54864" anchor="ctr">
-                    <a:lnL w="6350" cap="flat" cmpd="sng" algn="ctr">
-                      <a:solidFill>
-                        <a:srgbClr val="D9DEE3"/>
-                      </a:solidFill>
-                      <a:prstDash val="solid"/>
-                      <a:round/>
-                      <a:headEnd type="none" w="med" len="med"/>
-                      <a:tailEnd type="none" w="med" len="med"/>
-                    </a:lnL>
-                    <a:lnR w="6350" cap="flat" cmpd="sng" algn="ctr">
-                      <a:solidFill>
-                        <a:srgbClr val="D9DEE3"/>
-                      </a:solidFill>
-                      <a:prstDash val="solid"/>
-                      <a:round/>
-                      <a:headEnd type="none" w="med" len="med"/>
-                      <a:tailEnd type="none" w="med" len="med"/>
-                    </a:lnR>
-                    <a:lnT w="6350" cap="flat" cmpd="sng" algn="ctr">
-                      <a:solidFill>
-                        <a:srgbClr val="D9DEE3"/>
-                      </a:solidFill>
-                      <a:prstDash val="solid"/>
-                      <a:round/>
-                      <a:headEnd type="none" w="med" len="med"/>
-                      <a:tailEnd type="none" w="med" len="med"/>
-                    </a:lnT>
-                    <a:lnB w="6350" cap="flat" cmpd="sng" algn="ctr">
-                      <a:solidFill>
-                        <a:srgbClr val="D9DEE3"/>
-                      </a:solidFill>
-                      <a:prstDash val="solid"/>
-                      <a:round/>
-                      <a:headEnd type="none" w="med" len="med"/>
-                      <a:tailEnd type="none" w="med" len="med"/>
-                    </a:lnB>
-                    <a:solidFill>
-                      <a:srgbClr val="F3F5F8"/>
-                    </a:solidFill>
-                  </a:tcPr>
-                </a:tc>
-              </a:tr>
-              <a:tr h="0">
-                <a:tc>
-                  <a:txBody>
-                    <a:bodyPr/>
-                    <a:lstStyle/>
-                    <a:p>
-                      <a:pPr indent="0" marL="0">
-                        <a:buNone/>
-                      </a:pPr>
-                      <a:r>
-                        <a:rPr lang="en-US" sz="1050" b="1" dirty="0">
-                          <a:solidFill>
-                            <a:srgbClr val="1F2933"/>
-                          </a:solidFill>
-                          <a:latin typeface="Calibri" pitchFamily="34" charset="0"/>
-                          <a:ea typeface="Calibri" pitchFamily="34" charset="-122"/>
-                          <a:cs typeface="Calibri" pitchFamily="34" charset="-120"/>
-                        </a:rPr>
-                        <a:t>Integration test cannot run (no emulator)</a:t>
-                      </a:r>
-                      <a:endParaRPr lang="en-US" sz="1050" dirty="0">
-                        <a:latin typeface="Calibri" charset="0"/>
-                        <a:ea typeface="Calibri" charset="0"/>
-                        <a:cs typeface="Calibri" charset="0"/>
-                      </a:endParaRPr>
-                    </a:p>
-                  </a:txBody>
-                  <a:tcPr marL="54864" marR="54864" marT="54864" marB="54864" anchor="ctr">
-                    <a:lnL w="6350" cap="flat" cmpd="sng" algn="ctr">
-                      <a:solidFill>
-                        <a:srgbClr val="D9DEE3"/>
-                      </a:solidFill>
-                      <a:prstDash val="solid"/>
-                      <a:round/>
-                      <a:headEnd type="none" w="med" len="med"/>
-                      <a:tailEnd type="none" w="med" len="med"/>
-                    </a:lnL>
-                    <a:lnR w="6350" cap="flat" cmpd="sng" algn="ctr">
-                      <a:solidFill>
-                        <a:srgbClr val="D9DEE3"/>
-                      </a:solidFill>
-                      <a:prstDash val="solid"/>
-                      <a:round/>
-                      <a:headEnd type="none" w="med" len="med"/>
-                      <a:tailEnd type="none" w="med" len="med"/>
-                    </a:lnR>
-                    <a:lnT w="6350" cap="flat" cmpd="sng" algn="ctr">
-                      <a:solidFill>
-                        <a:srgbClr val="D9DEE3"/>
-                      </a:solidFill>
-                      <a:prstDash val="solid"/>
-                      <a:round/>
-                      <a:headEnd type="none" w="med" len="med"/>
-                      <a:tailEnd type="none" w="med" len="med"/>
-                    </a:lnT>
-                    <a:lnB w="6350" cap="flat" cmpd="sng" algn="ctr">
-                      <a:solidFill>
-                        <a:srgbClr val="D9DEE3"/>
-                      </a:solidFill>
-                      <a:prstDash val="solid"/>
-                      <a:round/>
-                      <a:headEnd type="none" w="med" len="med"/>
-                      <a:tailEnd type="none" w="med" len="med"/>
-                    </a:lnB>
-                    <a:solidFill>
-                      <a:srgbClr val="FFFFFF"/>
-                    </a:solidFill>
-                  </a:tcPr>
-                </a:tc>
-                <a:tc>
-                  <a:txBody>
-                    <a:bodyPr/>
-                    <a:lstStyle/>
-                    <a:p>
-                      <a:pPr indent="0" marL="0">
-                        <a:buNone/>
-                      </a:pPr>
-                      <a:r>
-                        <a:rPr lang="en-US" sz="1050" dirty="0">
-                          <a:solidFill>
-                            <a:srgbClr val="1F2933"/>
-                          </a:solidFill>
-                          <a:latin typeface="Calibri" pitchFamily="34" charset="0"/>
-                          <a:ea typeface="Calibri" pitchFamily="34" charset="-122"/>
-                          <a:cs typeface="Calibri" pitchFamily="34" charset="-120"/>
-                        </a:rPr>
-                        <a:t>Run it on your machine on the projector; delegates read the test and write it without running. Unit and widget tests are the ones that matter for their daily work.</a:t>
-                      </a:r>
-                      <a:endParaRPr lang="en-US" sz="1050" dirty="0">
-                        <a:latin typeface="Calibri" charset="0"/>
-                        <a:ea typeface="Calibri" charset="0"/>
-                        <a:cs typeface="Calibri" charset="0"/>
-                      </a:endParaRPr>
-                    </a:p>
-                  </a:txBody>
-                  <a:tcPr marL="54864" marR="54864" marT="54864" marB="54864" anchor="ctr">
-                    <a:lnL w="6350" cap="flat" cmpd="sng" algn="ctr">
-                      <a:solidFill>
-                        <a:srgbClr val="D9DEE3"/>
-                      </a:solidFill>
-                      <a:prstDash val="solid"/>
-                      <a:round/>
-                      <a:headEnd type="none" w="med" len="med"/>
-                      <a:tailEnd type="none" w="med" len="med"/>
-                    </a:lnL>
-                    <a:lnR w="6350" cap="flat" cmpd="sng" algn="ctr">
-                      <a:solidFill>
-                        <a:srgbClr val="D9DEE3"/>
-                      </a:solidFill>
-                      <a:prstDash val="solid"/>
-                      <a:round/>
-                      <a:headEnd type="none" w="med" len="med"/>
-                      <a:tailEnd type="none" w="med" len="med"/>
-                    </a:lnR>
-                    <a:lnT w="6350" cap="flat" cmpd="sng" algn="ctr">
-                      <a:solidFill>
-                        <a:srgbClr val="D9DEE3"/>
-                      </a:solidFill>
-                      <a:prstDash val="solid"/>
-                      <a:round/>
-                      <a:headEnd type="none" w="med" len="med"/>
-                      <a:tailEnd type="none" w="med" len="med"/>
-                    </a:lnT>
-                    <a:lnB w="6350" cap="flat" cmpd="sng" algn="ctr">
-                      <a:solidFill>
-                        <a:srgbClr val="D9DEE3"/>
-                      </a:solidFill>
-                      <a:prstDash val="solid"/>
-                      <a:round/>
-                      <a:headEnd type="none" w="med" len="med"/>
-                      <a:tailEnd type="none" w="med" len="med"/>
-                    </a:lnB>
-                    <a:solidFill>
-                      <a:srgbClr val="FFFFFF"/>
-                    </a:solidFill>
-                  </a:tcPr>
-                </a:tc>
-              </a:tr>
-              <a:tr h="0">
-                <a:tc>
-                  <a:txBody>
-                    <a:bodyPr/>
-                    <a:lstStyle/>
-                    <a:p>
-                      <a:pPr indent="0" marL="0">
-                        <a:buNone/>
-                      </a:pPr>
-                      <a:r>
-                        <a:rPr lang="en-US" sz="1050" b="1" dirty="0">
-                          <a:solidFill>
-                            <a:srgbClr val="1F2933"/>
-                          </a:solidFill>
-                          <a:latin typeface="Calibri" pitchFamily="34" charset="0"/>
-                          <a:ea typeface="Calibri" pitchFamily="34" charset="-122"/>
-                          <a:cs typeface="Calibri" pitchFamily="34" charset="-120"/>
-                        </a:rPr>
-                        <a:t>Nobody has an Apple Developer account</a:t>
-                      </a:r>
-                      <a:endParaRPr lang="en-US" sz="1050" dirty="0">
-                        <a:latin typeface="Calibri" charset="0"/>
-                        <a:ea typeface="Calibri" charset="0"/>
-                        <a:cs typeface="Calibri" charset="0"/>
-                      </a:endParaRPr>
-                    </a:p>
-                  </a:txBody>
-                  <a:tcPr marL="54864" marR="54864" marT="54864" marB="54864" anchor="ctr">
-                    <a:lnL w="6350" cap="flat" cmpd="sng" algn="ctr">
-                      <a:solidFill>
-                        <a:srgbClr val="D9DEE3"/>
-                      </a:solidFill>
-                      <a:prstDash val="solid"/>
-                      <a:round/>
-                      <a:headEnd type="none" w="med" len="med"/>
-                      <a:tailEnd type="none" w="med" len="med"/>
-                    </a:lnL>
-                    <a:lnR w="6350" cap="flat" cmpd="sng" algn="ctr">
-                      <a:solidFill>
-                        <a:srgbClr val="D9DEE3"/>
-                      </a:solidFill>
-                      <a:prstDash val="solid"/>
-                      <a:round/>
-                      <a:headEnd type="none" w="med" len="med"/>
-                      <a:tailEnd type="none" w="med" len="med"/>
-                    </a:lnR>
-                    <a:lnT w="6350" cap="flat" cmpd="sng" algn="ctr">
-                      <a:solidFill>
-                        <a:srgbClr val="D9DEE3"/>
-                      </a:solidFill>
-                      <a:prstDash val="solid"/>
-                      <a:round/>
-                      <a:headEnd type="none" w="med" len="med"/>
-                      <a:tailEnd type="none" w="med" len="med"/>
-                    </a:lnT>
-                    <a:lnB w="6350" cap="flat" cmpd="sng" algn="ctr">
-                      <a:solidFill>
-                        <a:srgbClr val="D9DEE3"/>
-                      </a:solidFill>
-                      <a:prstDash val="solid"/>
-                      <a:round/>
-                      <a:headEnd type="none" w="med" len="med"/>
-                      <a:tailEnd type="none" w="med" len="med"/>
-                    </a:lnB>
-                    <a:solidFill>
-                      <a:srgbClr val="F3F5F8"/>
-                    </a:solidFill>
-                  </a:tcPr>
-                </a:tc>
-                <a:tc>
-                  <a:txBody>
-                    <a:bodyPr/>
-                    <a:lstStyle/>
-                    <a:p>
-                      <a:pPr indent="0" marL="0">
-                        <a:buNone/>
-                      </a:pPr>
-                      <a:r>
-                        <a:rPr lang="en-US" sz="1050" dirty="0">
-                          <a:solidFill>
-                            <a:srgbClr val="1F2933"/>
-                          </a:solidFill>
-                          <a:latin typeface="Calibri" pitchFamily="34" charset="0"/>
-                          <a:ea typeface="Calibri" pitchFamily="34" charset="-122"/>
-                          <a:cs typeface="Calibri" pitchFamily="34" charset="-120"/>
-                        </a:rPr>
-                        <a:t>The iOS half is view-only from your Mac plus the Codemagic YAML. That is exactly the situation their team is in, so it is a realistic demo, not a compromise.</a:t>
-                      </a:r>
-                      <a:endParaRPr lang="en-US" sz="1050" dirty="0">
-                        <a:latin typeface="Calibri" charset="0"/>
-                        <a:ea typeface="Calibri" charset="0"/>
-                        <a:cs typeface="Calibri" charset="0"/>
-                      </a:endParaRPr>
-                    </a:p>
-                  </a:txBody>
-                  <a:tcPr marL="54864" marR="54864" marT="54864" marB="54864" anchor="ctr">
-                    <a:lnL w="6350" cap="flat" cmpd="sng" algn="ctr">
-                      <a:solidFill>
-                        <a:srgbClr val="D9DEE3"/>
-                      </a:solidFill>
-                      <a:prstDash val="solid"/>
-                      <a:round/>
-                      <a:headEnd type="none" w="med" len="med"/>
-                      <a:tailEnd type="none" w="med" len="med"/>
-                    </a:lnL>
-                    <a:lnR w="6350" cap="flat" cmpd="sng" algn="ctr">
-                      <a:solidFill>
-                        <a:srgbClr val="D9DEE3"/>
-                      </a:solidFill>
-                      <a:prstDash val="solid"/>
-                      <a:round/>
-                      <a:headEnd type="none" w="med" len="med"/>
-                      <a:tailEnd type="none" w="med" len="med"/>
-                    </a:lnR>
-                    <a:lnT w="6350" cap="flat" cmpd="sng" algn="ctr">
-                      <a:solidFill>
-                        <a:srgbClr val="D9DEE3"/>
-                      </a:solidFill>
-                      <a:prstDash val="solid"/>
-                      <a:round/>
-                      <a:headEnd type="none" w="med" len="med"/>
-                      <a:tailEnd type="none" w="med" len="med"/>
-                    </a:lnT>
-                    <a:lnB w="6350" cap="flat" cmpd="sng" algn="ctr">
-                      <a:solidFill>
-                        <a:srgbClr val="D9DEE3"/>
-                      </a:solidFill>
-                      <a:prstDash val="solid"/>
-                      <a:round/>
-                      <a:headEnd type="none" w="med" len="med"/>
-                      <a:tailEnd type="none" w="med" len="med"/>
-                    </a:lnB>
-                    <a:solidFill>
-                      <a:srgbClr val="F3F5F8"/>
-                    </a:solidFill>
-                  </a:tcPr>
-                </a:tc>
-              </a:tr>
-              <a:tr h="0">
-                <a:tc>
-                  <a:txBody>
-                    <a:bodyPr/>
-                    <a:lstStyle/>
-                    <a:p>
-                      <a:pPr indent="0" marL="0">
-                        <a:buNone/>
-                      </a:pPr>
-                      <a:r>
-                        <a:rPr lang="en-US" sz="1050" b="1" dirty="0">
-                          <a:solidFill>
-                            <a:srgbClr val="1F2933"/>
-                          </a:solidFill>
-                          <a:latin typeface="Calibri" pitchFamily="34" charset="0"/>
-                          <a:ea typeface="Calibri" pitchFamily="34" charset="-122"/>
-                          <a:cs typeface="Calibri" pitchFamily="34" charset="-120"/>
-                        </a:rPr>
-                        <a:t>The clinic dries up / nobody talks</a:t>
-                      </a:r>
-                      <a:endParaRPr lang="en-US" sz="1050" dirty="0">
-                        <a:latin typeface="Calibri" charset="0"/>
-                        <a:ea typeface="Calibri" charset="0"/>
-                        <a:cs typeface="Calibri" charset="0"/>
-                      </a:endParaRPr>
-                    </a:p>
-                  </a:txBody>
-                  <a:tcPr marL="54864" marR="54864" marT="54864" marB="54864" anchor="ctr">
-                    <a:lnL w="6350" cap="flat" cmpd="sng" algn="ctr">
-                      <a:solidFill>
-                        <a:srgbClr val="D9DEE3"/>
-                      </a:solidFill>
-                      <a:prstDash val="solid"/>
-                      <a:round/>
-                      <a:headEnd type="none" w="med" len="med"/>
-                      <a:tailEnd type="none" w="med" len="med"/>
-                    </a:lnL>
-                    <a:lnR w="6350" cap="flat" cmpd="sng" algn="ctr">
-                      <a:solidFill>
-                        <a:srgbClr val="D9DEE3"/>
-                      </a:solidFill>
-                      <a:prstDash val="solid"/>
-                      <a:round/>
-                      <a:headEnd type="none" w="med" len="med"/>
-                      <a:tailEnd type="none" w="med" len="med"/>
-                    </a:lnR>
-                    <a:lnT w="6350" cap="flat" cmpd="sng" algn="ctr">
-                      <a:solidFill>
-                        <a:srgbClr val="D9DEE3"/>
-                      </a:solidFill>
-                      <a:prstDash val="solid"/>
-                      <a:round/>
-                      <a:headEnd type="none" w="med" len="med"/>
-                      <a:tailEnd type="none" w="med" len="med"/>
-                    </a:lnT>
-                    <a:lnB w="6350" cap="flat" cmpd="sng" algn="ctr">
-                      <a:solidFill>
-                        <a:srgbClr val="D9DEE3"/>
-                      </a:solidFill>
-                      <a:prstDash val="solid"/>
-                      <a:round/>
-                      <a:headEnd type="none" w="med" len="med"/>
-                      <a:tailEnd type="none" w="med" len="med"/>
-                    </a:lnB>
-                    <a:solidFill>
-                      <a:srgbClr val="FFFFFF"/>
-                    </a:solidFill>
-                  </a:tcPr>
-                </a:tc>
-                <a:tc>
-                  <a:txBody>
-                    <a:bodyPr/>
-                    <a:lstStyle/>
-                    <a:p>
-                      <a:pPr indent="0" marL="0">
-                        <a:buNone/>
-                      </a:pPr>
-                      <a:r>
-                        <a:rPr lang="en-US" sz="1050" dirty="0">
-                          <a:solidFill>
-                            <a:srgbClr val="1F2933"/>
-                          </a:solidFill>
-                          <a:latin typeface="Calibri" pitchFamily="34" charset="0"/>
-                          <a:ea typeface="Calibri" pitchFamily="34" charset="-122"/>
-                          <a:cs typeface="Calibri" pitchFamily="34" charset="-120"/>
-                        </a:rPr>
-                        <a:t>Start with question 1 on the clinic slide and go round the table by name. Then ask the two people who named the insurance project to sketch their current architecture - the room joins in once someone draws.</a:t>
-                      </a:r>
-                      <a:endParaRPr lang="en-US" sz="1050" dirty="0">
-                        <a:latin typeface="Calibri" charset="0"/>
-                        <a:ea typeface="Calibri" charset="0"/>
-                        <a:cs typeface="Calibri" charset="0"/>
-                      </a:endParaRPr>
-                    </a:p>
-                  </a:txBody>
-                  <a:tcPr marL="54864" marR="54864" marT="54864" marB="54864" anchor="ctr">
-                    <a:lnL w="6350" cap="flat" cmpd="sng" algn="ctr">
-                      <a:solidFill>
-                        <a:srgbClr val="D9DEE3"/>
-                      </a:solidFill>
-                      <a:prstDash val="solid"/>
-                      <a:round/>
-                      <a:headEnd type="none" w="med" len="med"/>
-                      <a:tailEnd type="none" w="med" len="med"/>
-                    </a:lnL>
-                    <a:lnR w="6350" cap="flat" cmpd="sng" algn="ctr">
-                      <a:solidFill>
-                        <a:srgbClr val="D9DEE3"/>
-                      </a:solidFill>
-                      <a:prstDash val="solid"/>
-                      <a:round/>
-                      <a:headEnd type="none" w="med" len="med"/>
-                      <a:tailEnd type="none" w="med" len="med"/>
-                    </a:lnR>
-                    <a:lnT w="6350" cap="flat" cmpd="sng" algn="ctr">
-                      <a:solidFill>
-                        <a:srgbClr val="D9DEE3"/>
-                      </a:solidFill>
-                      <a:prstDash val="solid"/>
-                      <a:round/>
-                      <a:headEnd type="none" w="med" len="med"/>
-                      <a:tailEnd type="none" w="med" len="med"/>
-                    </a:lnT>
-                    <a:lnB w="6350" cap="flat" cmpd="sng" algn="ctr">
-                      <a:solidFill>
-                        <a:srgbClr val="D9DEE3"/>
-                      </a:solidFill>
-                      <a:prstDash val="solid"/>
-                      <a:round/>
-                      <a:headEnd type="none" w="med" len="med"/>
-                      <a:tailEnd type="none" w="med" len="med"/>
-                    </a:lnB>
-                    <a:solidFill>
-                      <a:srgbClr val="FFFFFF"/>
-                    </a:solidFill>
-                  </a:tcPr>
-                </a:tc>
-              </a:tr>
-            </a:tbl>
-          </a:graphicData>
-        </a:graphic>
-      </p:graphicFrame>
-      <p:sp>
-        <p:nvSpPr>
-          <p:cNvPr id="4" name="Text 1"/>
-          <p:cNvSpPr txBox="1"/>
-          <p:nvPr/>
-        </p:nvSpPr>
-        <p:spPr>
-          <a:xfrm>
-            <a:off x="548640" y="6473952"/>
-            <a:ext cx="9994392" cy="274320"/>
-          </a:xfrm>
-          <a:prstGeom prst="rect">
-            <a:avLst/>
-          </a:prstGeom>
-          <a:noFill/>
-          <a:ln/>
-        </p:spPr>
-        <p:txBody>
-          <a:bodyPr wrap="square" lIns="0" tIns="0" rIns="0" bIns="0" rtlCol="0" anchor="ctr"/>
-          <a:lstStyle/>
-          <a:p>
-            <a:pPr indent="0" marL="0">
-              <a:buNone/>
-            </a:pPr>
-            <a:r>
-              <a:rPr lang="en-US" sz="900" dirty="0">
-                <a:solidFill>
-                  <a:srgbClr val="5B6773"/>
-                </a:solidFill>
-                <a:latin typeface="Calibri" pitchFamily="34" charset="0"/>
-                <a:ea typeface="Calibri" pitchFamily="34" charset="-122"/>
-                <a:cs typeface="Calibri" pitchFamily="34" charset="-120"/>
-              </a:rPr>
-              <a:t>MO Integrations · Flutter Training · Day 5 - Testing, CI/CD &amp; Shipping</a:t>
-            </a:r>
-            <a:endParaRPr lang="en-US" sz="900" dirty="0"/>
-          </a:p>
-        </p:txBody>
-      </p:sp>
-      <p:sp>
-        <p:nvSpPr>
-          <p:cNvPr id="5" name="Text 2"/>
-          <p:cNvSpPr txBox="1"/>
-          <p:nvPr/>
-        </p:nvSpPr>
-        <p:spPr>
-          <a:xfrm>
-            <a:off x="10543032" y="6473952"/>
-            <a:ext cx="1097280" cy="274320"/>
-          </a:xfrm>
-          <a:prstGeom prst="rect">
-            <a:avLst/>
-          </a:prstGeom>
-          <a:noFill/>
-          <a:ln/>
-        </p:spPr>
-        <p:txBody>
-          <a:bodyPr wrap="square" lIns="0" tIns="0" rIns="0" bIns="0" rtlCol="0" anchor="ctr"/>
-          <a:lstStyle/>
-          <a:p>
-            <a:pPr algn="r" indent="0" marL="0">
-              <a:buNone/>
-            </a:pPr>
-            <a:r>
-              <a:rPr lang="en-US" sz="900" dirty="0">
-                <a:solidFill>
-                  <a:srgbClr val="5B6773"/>
-                </a:solidFill>
-                <a:latin typeface="Calibri" pitchFamily="34" charset="0"/>
-                <a:ea typeface="Calibri" pitchFamily="34" charset="-122"/>
-                <a:cs typeface="Calibri" pitchFamily="34" charset="-120"/>
-              </a:rPr>
-              <a:t>46</a:t>
             </a:r>
             <a:endParaRPr lang="en-US" sz="900" dirty="0"/>
           </a:p>
